--- a/material/[SeSAC_YDP_6] 04_3_Javascript.pptx
+++ b/material/[SeSAC_YDP_6] 04_3_Javascript.pptx
@@ -17,8 +17,8 @@
     <p:sldId id="370" r:id="rId8"/>
     <p:sldId id="329" r:id="rId9"/>
     <p:sldId id="330" r:id="rId10"/>
-    <p:sldId id="449" r:id="rId11"/>
-    <p:sldId id="450" r:id="rId12"/>
+    <p:sldId id="681" r:id="rId11"/>
+    <p:sldId id="682" r:id="rId12"/>
     <p:sldId id="377" r:id="rId13"/>
     <p:sldId id="451" r:id="rId14"/>
     <p:sldId id="452" r:id="rId15"/>
@@ -26,10 +26,10 @@
     <p:sldId id="454" r:id="rId17"/>
     <p:sldId id="455" r:id="rId18"/>
     <p:sldId id="456" r:id="rId19"/>
-    <p:sldId id="457" r:id="rId20"/>
+    <p:sldId id="315" r:id="rId20"/>
     <p:sldId id="458" r:id="rId21"/>
     <p:sldId id="459" r:id="rId22"/>
-    <p:sldId id="460" r:id="rId23"/>
+    <p:sldId id="676" r:id="rId23"/>
     <p:sldId id="378" r:id="rId24"/>
     <p:sldId id="461" r:id="rId25"/>
     <p:sldId id="280" r:id="rId26"/>
@@ -39,12 +39,12 @@
     <p:sldId id="466" r:id="rId30"/>
     <p:sldId id="274" r:id="rId31"/>
     <p:sldId id="285" r:id="rId32"/>
-    <p:sldId id="464" r:id="rId33"/>
+    <p:sldId id="677" r:id="rId33"/>
     <p:sldId id="467" r:id="rId34"/>
     <p:sldId id="468" r:id="rId35"/>
     <p:sldId id="469" r:id="rId36"/>
-    <p:sldId id="352" r:id="rId37"/>
-    <p:sldId id="463" r:id="rId38"/>
+    <p:sldId id="678" r:id="rId37"/>
+    <p:sldId id="680" r:id="rId38"/>
   </p:sldIdLst>
   <p:sldSz cx="12192000" cy="6858000"/>
   <p:notesSz cx="6858000" cy="9144000"/>
@@ -236,7 +236,7 @@
           <a:p>
             <a:fld id="{2EF3F159-7250-4DD4-91C2-13B35D56E1AF}" type="datetimeFigureOut">
               <a:rPr lang="ko-KR" altLang="en-US" smtClean="0"/>
-              <a:t>2024-05-27</a:t>
+              <a:t>2024-05-29</a:t>
             </a:fld>
             <a:endParaRPr lang="ko-KR" altLang="en-US"/>
           </a:p>
@@ -631,42 +631,7 @@
           <a:bodyPr/>
           <a:lstStyle/>
           <a:p>
-            <a:pPr marL="0" marR="0" lvl="0" indent="0" algn="l" defTabSz="914400" rtl="0" eaLnBrk="1" fontAlgn="auto" latinLnBrk="1" hangingPunct="1">
-              <a:lnSpc>
-                <a:spcPct val="100000"/>
-              </a:lnSpc>
-              <a:spcBef>
-                <a:spcPts val="0"/>
-              </a:spcBef>
-              <a:spcAft>
-                <a:spcPts val="0"/>
-              </a:spcAft>
-              <a:buClrTx/>
-              <a:buSzTx/>
-              <a:buFontTx/>
-              <a:buNone/>
-              <a:tabLst/>
-              <a:defRPr/>
-            </a:pPr>
-            <a:r>
-              <a:rPr lang="ko-KR" altLang="en-US" dirty="0"/>
-              <a:t>시간 봐서 실습 하거나 숙제로 주기 </a:t>
-            </a:r>
-            <a:r>
-              <a:rPr lang="en-US" altLang="ko-KR" dirty="0"/>
-              <a:t>(</a:t>
-            </a:r>
-            <a:r>
-              <a:rPr lang="ko-KR" altLang="en-US" dirty="0" err="1"/>
-              <a:t>안보고</a:t>
-            </a:r>
-            <a:r>
-              <a:rPr lang="en-US" altLang="ko-KR" dirty="0"/>
-              <a:t>)</a:t>
-            </a:r>
-          </a:p>
-          <a:p>
-            <a:endParaRPr lang="ko-KR" altLang="en-US" dirty="0"/>
+            <a:endParaRPr lang="en-US" altLang="ko-KR" dirty="0"/>
           </a:p>
         </p:txBody>
       </p:sp>
@@ -677,7 +642,7 @@
             <a:spLocks noGrp="1"/>
           </p:cNvSpPr>
           <p:nvPr>
-            <p:ph type="sldNum" sz="quarter" idx="10"/>
+            <p:ph type="sldNum" sz="quarter" idx="5"/>
           </p:nvPr>
         </p:nvSpPr>
         <p:spPr/>
@@ -685,19 +650,18 @@
           <a:bodyPr/>
           <a:lstStyle/>
           <a:p>
-            <a:fld id="{1AE14B90-41C0-444C-B2BC-50B3345F5FF4}" type="slidenum">
+            <a:fld id="{C09E5BFC-1559-42F1-8940-AB342D56BF02}" type="slidenum">
               <a:rPr lang="ko-KR" altLang="en-US" smtClean="0"/>
-              <a:pPr/>
               <a:t>11</a:t>
             </a:fld>
-            <a:endParaRPr lang="ko-KR" altLang="en-US" dirty="0"/>
+            <a:endParaRPr lang="ko-KR" altLang="en-US"/>
           </a:p>
         </p:txBody>
       </p:sp>
     </p:spTree>
     <p:extLst>
       <p:ext uri="{BB962C8B-B14F-4D97-AF65-F5344CB8AC3E}">
-        <p14:creationId xmlns:p14="http://schemas.microsoft.com/office/powerpoint/2010/main" val="3320692373"/>
+        <p14:creationId xmlns:p14="http://schemas.microsoft.com/office/powerpoint/2010/main" val="2640377257"/>
       </p:ext>
     </p:extLst>
   </p:cSld>
@@ -1221,28 +1185,15 @@
           <a:p>
             <a:r>
               <a:rPr lang="en-US" altLang="ko-KR" dirty="0"/>
-              <a:t>If</a:t>
+              <a:t>LMS </a:t>
             </a:r>
             <a:r>
               <a:rPr lang="ko-KR" altLang="en-US" dirty="0"/>
-              <a:t>문 실습 해보자</a:t>
+              <a:t>실습 </a:t>
             </a:r>
             <a:r>
               <a:rPr lang="en-US" altLang="ko-KR" dirty="0"/>
-              <a:t>!</a:t>
-            </a:r>
-          </a:p>
-          <a:p>
-            <a:endParaRPr lang="en-US" altLang="ko-KR" dirty="0"/>
-          </a:p>
-          <a:p>
-            <a:r>
-              <a:rPr lang="ko-KR" altLang="en-US" dirty="0"/>
-              <a:t>실습에 대한 정답은</a:t>
-            </a:r>
-            <a:r>
-              <a:rPr lang="en-US" altLang="ko-KR" dirty="0"/>
-              <a:t>?</a:t>
+              <a:t>2</a:t>
             </a:r>
             <a:endParaRPr lang="ko-KR" altLang="en-US" dirty="0"/>
           </a:p>
@@ -1274,7 +1225,7 @@
     </p:spTree>
     <p:extLst>
       <p:ext uri="{BB962C8B-B14F-4D97-AF65-F5344CB8AC3E}">
-        <p14:creationId xmlns:p14="http://schemas.microsoft.com/office/powerpoint/2010/main" val="138261627"/>
+        <p14:creationId xmlns:p14="http://schemas.microsoft.com/office/powerpoint/2010/main" val="314342318"/>
       </p:ext>
     </p:extLst>
   </p:cSld>
@@ -1614,7 +1565,7 @@
     </p:spTree>
     <p:extLst>
       <p:ext uri="{BB962C8B-B14F-4D97-AF65-F5344CB8AC3E}">
-        <p14:creationId xmlns:p14="http://schemas.microsoft.com/office/powerpoint/2010/main" val="2652450379"/>
+        <p14:creationId xmlns:p14="http://schemas.microsoft.com/office/powerpoint/2010/main" val="2821580089"/>
       </p:ext>
     </p:extLst>
   </p:cSld>
@@ -2860,15 +2811,7 @@
           <a:bodyPr/>
           <a:lstStyle/>
           <a:p>
-            <a:r>
-              <a:rPr lang="en-US" altLang="ko-KR" dirty="0"/>
-              <a:t>For</a:t>
-            </a:r>
-            <a:r>
-              <a:rPr lang="ko-KR" altLang="en-US"/>
-              <a:t>문으로 만들어보세요</a:t>
-            </a:r>
-            <a:endParaRPr lang="ko-KR" altLang="en-US" dirty="0"/>
+            <a:endParaRPr lang="en-US" altLang="ko-KR" dirty="0"/>
           </a:p>
         </p:txBody>
       </p:sp>
@@ -2898,7 +2841,7 @@
     </p:spTree>
     <p:extLst>
       <p:ext uri="{BB962C8B-B14F-4D97-AF65-F5344CB8AC3E}">
-        <p14:creationId xmlns:p14="http://schemas.microsoft.com/office/powerpoint/2010/main" val="625489680"/>
+        <p14:creationId xmlns:p14="http://schemas.microsoft.com/office/powerpoint/2010/main" val="1799983360"/>
       </p:ext>
     </p:extLst>
   </p:cSld>
@@ -3467,7 +3410,7 @@
           <a:bodyPr/>
           <a:lstStyle/>
           <a:p>
-            <a:endParaRPr lang="ko-KR" altLang="en-US" dirty="0"/>
+            <a:endParaRPr lang="en-US" altLang="ko-KR" dirty="0"/>
           </a:p>
         </p:txBody>
       </p:sp>
@@ -3497,7 +3440,7 @@
     </p:spTree>
     <p:extLst>
       <p:ext uri="{BB962C8B-B14F-4D97-AF65-F5344CB8AC3E}">
-        <p14:creationId xmlns:p14="http://schemas.microsoft.com/office/powerpoint/2010/main" val="2034846619"/>
+        <p14:creationId xmlns:p14="http://schemas.microsoft.com/office/powerpoint/2010/main" val="286102401"/>
       </p:ext>
     </p:extLst>
   </p:cSld>
@@ -3551,7 +3494,7 @@
           <a:bodyPr/>
           <a:lstStyle/>
           <a:p>
-            <a:endParaRPr lang="ko-KR" altLang="en-US" dirty="0"/>
+            <a:endParaRPr lang="en-US" altLang="ko-KR" dirty="0"/>
           </a:p>
         </p:txBody>
       </p:sp>
@@ -3581,7 +3524,7 @@
     </p:spTree>
     <p:extLst>
       <p:ext uri="{BB962C8B-B14F-4D97-AF65-F5344CB8AC3E}">
-        <p14:creationId xmlns:p14="http://schemas.microsoft.com/office/powerpoint/2010/main" val="2230584639"/>
+        <p14:creationId xmlns:p14="http://schemas.microsoft.com/office/powerpoint/2010/main" val="2380925979"/>
       </p:ext>
     </p:extLst>
   </p:cSld>
@@ -4126,29 +4069,8 @@
           <a:bodyPr/>
           <a:lstStyle/>
           <a:p>
-            <a:r>
-              <a:rPr lang="ko-KR" altLang="en-US" dirty="0"/>
-              <a:t>시간 봐서 실습 하거나 숙제로 주기 </a:t>
-            </a:r>
-            <a:r>
-              <a:rPr lang="en-US" altLang="ko-KR" dirty="0"/>
-              <a:t>(</a:t>
-            </a:r>
-            <a:r>
-              <a:rPr lang="ko-KR" altLang="en-US" dirty="0" err="1"/>
-              <a:t>안보고</a:t>
-            </a:r>
-            <a:r>
-              <a:rPr lang="en-US" altLang="ko-KR" dirty="0"/>
-              <a:t>)</a:t>
-            </a:r>
-          </a:p>
-          <a:p>
             <a:endParaRPr lang="en-US" altLang="ko-KR" dirty="0"/>
           </a:p>
-          <a:p>
-            <a:endParaRPr lang="ko-KR" altLang="en-US" dirty="0"/>
-          </a:p>
         </p:txBody>
       </p:sp>
       <p:sp>
@@ -4158,7 +4080,7 @@
             <a:spLocks noGrp="1"/>
           </p:cNvSpPr>
           <p:nvPr>
-            <p:ph type="sldNum" sz="quarter" idx="10"/>
+            <p:ph type="sldNum" sz="quarter" idx="5"/>
           </p:nvPr>
         </p:nvSpPr>
         <p:spPr/>
@@ -4166,19 +4088,18 @@
           <a:bodyPr/>
           <a:lstStyle/>
           <a:p>
-            <a:fld id="{1AE14B90-41C0-444C-B2BC-50B3345F5FF4}" type="slidenum">
+            <a:fld id="{C09E5BFC-1559-42F1-8940-AB342D56BF02}" type="slidenum">
               <a:rPr lang="ko-KR" altLang="en-US" smtClean="0"/>
-              <a:pPr/>
               <a:t>10</a:t>
             </a:fld>
-            <a:endParaRPr lang="ko-KR" altLang="en-US" dirty="0"/>
+            <a:endParaRPr lang="ko-KR" altLang="en-US"/>
           </a:p>
         </p:txBody>
       </p:sp>
     </p:spTree>
     <p:extLst>
       <p:ext uri="{BB962C8B-B14F-4D97-AF65-F5344CB8AC3E}">
-        <p14:creationId xmlns:p14="http://schemas.microsoft.com/office/powerpoint/2010/main" val="1659648690"/>
+        <p14:creationId xmlns:p14="http://schemas.microsoft.com/office/powerpoint/2010/main" val="3312973158"/>
       </p:ext>
     </p:extLst>
   </p:cSld>
@@ -7951,166 +7872,10 @@
       </p:grpSpPr>
       <p:sp>
         <p:nvSpPr>
-          <p:cNvPr id="3" name="내용 개체 틀 2"/>
-          <p:cNvSpPr>
-            <a:spLocks noGrp="1"/>
-          </p:cNvSpPr>
-          <p:nvPr>
-            <p:ph idx="1"/>
-          </p:nvPr>
-        </p:nvSpPr>
-        <p:spPr/>
-        <p:txBody>
-          <a:bodyPr/>
-          <a:lstStyle/>
-          <a:p>
-            <a:r>
-              <a:rPr lang="en-US" altLang="ko-KR" dirty="0" err="1"/>
-              <a:t>multifly</a:t>
-            </a:r>
-            <a:r>
-              <a:rPr lang="en-US" altLang="ko-KR" dirty="0"/>
-              <a:t>() </a:t>
-            </a:r>
-            <a:r>
-              <a:rPr lang="ko-KR" altLang="en-US" dirty="0"/>
-              <a:t>함수를 만들어주세요</a:t>
-            </a:r>
-            <a:r>
-              <a:rPr lang="en-US" altLang="ko-KR" dirty="0"/>
-              <a:t>!</a:t>
-            </a:r>
-          </a:p>
-          <a:p>
-            <a:r>
-              <a:rPr lang="ko-KR" altLang="en-US" dirty="0"/>
-              <a:t>조건</a:t>
-            </a:r>
-            <a:endParaRPr lang="en-US" altLang="ko-KR" dirty="0"/>
-          </a:p>
-          <a:p>
-            <a:pPr lvl="1"/>
-            <a:r>
-              <a:rPr lang="ko-KR" altLang="en-US" dirty="0"/>
-              <a:t>매개변수로 두 개의 숫자를 </a:t>
-            </a:r>
-            <a:r>
-              <a:rPr lang="ko-KR" altLang="en-US" dirty="0" err="1"/>
-              <a:t>입력받기</a:t>
-            </a:r>
-            <a:endParaRPr lang="en-US" altLang="ko-KR" dirty="0"/>
-          </a:p>
-          <a:p>
-            <a:pPr lvl="1"/>
-            <a:r>
-              <a:rPr lang="ko-KR" altLang="en-US" dirty="0"/>
-              <a:t>두 인자의 곱을 </a:t>
-            </a:r>
-            <a:r>
-              <a:rPr lang="en-US" altLang="ko-KR" dirty="0"/>
-              <a:t>‘</a:t>
-            </a:r>
-            <a:r>
-              <a:rPr lang="ko-KR" altLang="en-US" dirty="0"/>
-              <a:t>반환</a:t>
-            </a:r>
-            <a:r>
-              <a:rPr lang="en-US" altLang="ko-KR" dirty="0"/>
-              <a:t>’ </a:t>
-            </a:r>
-            <a:r>
-              <a:rPr lang="ko-KR" altLang="en-US" dirty="0"/>
-              <a:t>하는 함수를 정의</a:t>
-            </a:r>
-            <a:endParaRPr lang="en-US" altLang="ko-KR" dirty="0"/>
-          </a:p>
-          <a:p>
-            <a:pPr lvl="1"/>
-            <a:r>
-              <a:rPr lang="en-US" altLang="ko-KR" dirty="0"/>
-              <a:t>!! </a:t>
-            </a:r>
-            <a:r>
-              <a:rPr lang="ko-KR" altLang="en-US" dirty="0"/>
-              <a:t>출력이 아닌 반환하는 함수</a:t>
-            </a:r>
-            <a:endParaRPr lang="en-US" altLang="ko-KR" dirty="0"/>
-          </a:p>
-          <a:p>
-            <a:pPr lvl="1"/>
-            <a:endParaRPr lang="en-US" altLang="ko-KR" dirty="0"/>
-          </a:p>
-          <a:p>
-            <a:pPr lvl="1"/>
-            <a:r>
-              <a:rPr lang="ko-KR" altLang="en-US" dirty="0" err="1"/>
-              <a:t>콘솔창에</a:t>
-            </a:r>
-            <a:r>
-              <a:rPr lang="ko-KR" altLang="en-US" dirty="0"/>
-              <a:t> 출력하고 싶다면 아래처럼 테스트 해보기</a:t>
-            </a:r>
-            <a:endParaRPr lang="en-US" altLang="ko-KR" dirty="0"/>
-          </a:p>
-          <a:p>
-            <a:pPr lvl="2"/>
-            <a:r>
-              <a:rPr lang="en-US" altLang="ko-KR" dirty="0"/>
-              <a:t> console.log(</a:t>
-            </a:r>
-            <a:r>
-              <a:rPr lang="en-US" altLang="ko-KR" dirty="0" err="1"/>
-              <a:t>multifly</a:t>
-            </a:r>
-            <a:r>
-              <a:rPr lang="en-US" altLang="ko-KR" dirty="0"/>
-              <a:t>(3,7)); </a:t>
-            </a:r>
-            <a:r>
-              <a:rPr lang="en-US" altLang="ko-KR" dirty="0">
-                <a:solidFill>
-                  <a:schemeClr val="accent6"/>
-                </a:solidFill>
-              </a:rPr>
-              <a:t>// 21</a:t>
-            </a:r>
-          </a:p>
-          <a:p>
-            <a:pPr lvl="2"/>
-            <a:r>
-              <a:rPr lang="en-US" altLang="ko-KR" dirty="0"/>
-              <a:t> console.log(</a:t>
-            </a:r>
-            <a:r>
-              <a:rPr lang="en-US" altLang="ko-KR" dirty="0" err="1"/>
-              <a:t>multifly</a:t>
-            </a:r>
-            <a:r>
-              <a:rPr lang="en-US" altLang="ko-KR" dirty="0"/>
-              <a:t>(2,2)); </a:t>
-            </a:r>
-            <a:r>
-              <a:rPr lang="en-US" altLang="ko-KR" dirty="0">
-                <a:solidFill>
-                  <a:schemeClr val="accent6"/>
-                </a:solidFill>
-              </a:rPr>
-              <a:t>// 4</a:t>
-            </a:r>
-            <a:endParaRPr lang="ko-KR" altLang="en-US" dirty="0">
-              <a:solidFill>
-                <a:schemeClr val="accent6"/>
-              </a:solidFill>
-            </a:endParaRPr>
-          </a:p>
-        </p:txBody>
-      </p:sp>
-      <p:sp>
-        <p:nvSpPr>
-          <p:cNvPr id="6" name="제목 5">
+          <p:cNvPr id="13" name="내용 개체 틀 2">
             <a:extLst>
               <a:ext uri="{FF2B5EF4-FFF2-40B4-BE49-F238E27FC236}">
-                <a16:creationId xmlns:a16="http://schemas.microsoft.com/office/drawing/2014/main" id="{A4C95C57-DEA6-F1CD-B4FE-80CED586378C}"/>
+                <a16:creationId xmlns:a16="http://schemas.microsoft.com/office/drawing/2014/main" id="{847FD532-7F61-A001-537F-B970BD821AF3}"/>
               </a:ext>
             </a:extLst>
           </p:cNvPr>
@@ -8118,7 +7883,48 @@
             <a:spLocks noGrp="1"/>
           </p:cNvSpPr>
           <p:nvPr>
-            <p:ph type="title"/>
+            <p:ph idx="1"/>
+          </p:nvPr>
+        </p:nvSpPr>
+        <p:spPr>
+          <a:xfrm>
+            <a:off x="510988" y="1328391"/>
+            <a:ext cx="11260802" cy="5328442"/>
+          </a:xfrm>
+        </p:spPr>
+        <p:txBody>
+          <a:bodyPr>
+            <a:normAutofit/>
+          </a:bodyPr>
+          <a:lstStyle/>
+          <a:p>
+            <a:endParaRPr lang="en-US" altLang="ko-KR" dirty="0"/>
+          </a:p>
+          <a:p>
+            <a:pPr marL="0" indent="0">
+              <a:buNone/>
+            </a:pPr>
+            <a:endParaRPr lang="en-US" altLang="ko-KR" dirty="0"/>
+          </a:p>
+          <a:p>
+            <a:endParaRPr lang="en-US" altLang="ko-KR" dirty="0"/>
+          </a:p>
+        </p:txBody>
+      </p:sp>
+      <p:sp>
+        <p:nvSpPr>
+          <p:cNvPr id="4" name="날짜 개체 틀 3">
+            <a:extLst>
+              <a:ext uri="{FF2B5EF4-FFF2-40B4-BE49-F238E27FC236}">
+                <a16:creationId xmlns:a16="http://schemas.microsoft.com/office/drawing/2014/main" id="{A695DDE5-0A39-A366-4CFE-A283911999CD}"/>
+              </a:ext>
+            </a:extLst>
+          </p:cNvPr>
+          <p:cNvSpPr>
+            <a:spLocks noGrp="1"/>
+          </p:cNvSpPr>
+          <p:nvPr>
+            <p:ph type="dt" sz="half" idx="10"/>
           </p:nvPr>
         </p:nvSpPr>
         <p:spPr/>
@@ -8126,42 +7932,498 @@
           <a:bodyPr/>
           <a:lstStyle/>
           <a:p>
+            <a:fld id="{0F78D9C4-20C1-4B15-A116-16DC77AD9A1E}" type="datetime1">
+              <a:rPr lang="ko-KR" altLang="en-US" smtClean="0"/>
+              <a:t>2024-05-29</a:t>
+            </a:fld>
+            <a:endParaRPr lang="ko-KR" altLang="en-US"/>
+          </a:p>
+        </p:txBody>
+      </p:sp>
+      <p:sp>
+        <p:nvSpPr>
+          <p:cNvPr id="5" name="슬라이드 번호 개체 틀 4">
+            <a:extLst>
+              <a:ext uri="{FF2B5EF4-FFF2-40B4-BE49-F238E27FC236}">
+                <a16:creationId xmlns:a16="http://schemas.microsoft.com/office/drawing/2014/main" id="{5E040F43-60A7-C50D-1F5B-F984054F2D7C}"/>
+              </a:ext>
+            </a:extLst>
+          </p:cNvPr>
+          <p:cNvSpPr>
+            <a:spLocks noGrp="1"/>
+          </p:cNvSpPr>
+          <p:nvPr>
+            <p:ph type="sldNum" sz="quarter" idx="12"/>
+          </p:nvPr>
+        </p:nvSpPr>
+        <p:spPr/>
+        <p:txBody>
+          <a:bodyPr/>
+          <a:lstStyle/>
+          <a:p>
+            <a:fld id="{083A2CE0-18CD-4102-B738-4ACFF9E68BA4}" type="slidenum">
+              <a:rPr lang="ko-KR" altLang="en-US" smtClean="0"/>
+              <a:t>10</a:t>
+            </a:fld>
+            <a:endParaRPr lang="ko-KR" altLang="en-US"/>
+          </a:p>
+        </p:txBody>
+      </p:sp>
+      <p:sp>
+        <p:nvSpPr>
+          <p:cNvPr id="2" name="제목 1">
+            <a:extLst>
+              <a:ext uri="{FF2B5EF4-FFF2-40B4-BE49-F238E27FC236}">
+                <a16:creationId xmlns:a16="http://schemas.microsoft.com/office/drawing/2014/main" id="{5FAC57F5-99D7-9C46-B6C1-D16224151FE9}"/>
+              </a:ext>
+            </a:extLst>
+          </p:cNvPr>
+          <p:cNvSpPr>
+            <a:spLocks noGrp="1"/>
+          </p:cNvSpPr>
+          <p:nvPr>
+            <p:ph type="title"/>
+          </p:nvPr>
+        </p:nvSpPr>
+        <p:spPr/>
+        <p:txBody>
+          <a:bodyPr/>
+          <a:lstStyle/>
+          <a:p>
             <a:r>
               <a:rPr lang="ko-KR" altLang="en-US" dirty="0">
                 <a:solidFill>
+                  <a:srgbClr val="6EC173"/>
+                </a:solidFill>
+              </a:rPr>
+              <a:t>실습</a:t>
+            </a:r>
+            <a:r>
+              <a:rPr lang="en-US" altLang="ko-KR" dirty="0">
+                <a:solidFill>
+                  <a:srgbClr val="6EC173"/>
+                </a:solidFill>
+              </a:rPr>
+              <a:t>.  </a:t>
+            </a:r>
+            <a:r>
+              <a:rPr lang="ko-KR" altLang="en-US" dirty="0"/>
+              <a:t>함수 만들기</a:t>
+            </a:r>
+          </a:p>
+        </p:txBody>
+      </p:sp>
+      <p:sp>
+        <p:nvSpPr>
+          <p:cNvPr id="6" name="내용 개체 틀 1">
+            <a:extLst>
+              <a:ext uri="{FF2B5EF4-FFF2-40B4-BE49-F238E27FC236}">
+                <a16:creationId xmlns:a16="http://schemas.microsoft.com/office/drawing/2014/main" id="{70C2BA37-BE91-39C4-AC08-0E8A1052E2F7}"/>
+              </a:ext>
+            </a:extLst>
+          </p:cNvPr>
+          <p:cNvSpPr txBox="1">
+            <a:spLocks/>
+          </p:cNvSpPr>
+          <p:nvPr/>
+        </p:nvSpPr>
+        <p:spPr>
+          <a:xfrm>
+            <a:off x="838200" y="1825625"/>
+            <a:ext cx="10515600" cy="4351338"/>
+          </a:xfrm>
+          <a:prstGeom prst="rect">
+            <a:avLst/>
+          </a:prstGeom>
+        </p:spPr>
+        <p:txBody>
+          <a:bodyPr vert="horz" lIns="91440" tIns="45720" rIns="91440" bIns="45720" rtlCol="0">
+            <a:normAutofit/>
+          </a:bodyPr>
+          <a:lstStyle>
+            <a:lvl1pPr marL="228600" indent="-228600" algn="l" defTabSz="914400" rtl="0" eaLnBrk="1" latinLnBrk="1" hangingPunct="1">
+              <a:lnSpc>
+                <a:spcPct val="90000"/>
+              </a:lnSpc>
+              <a:spcBef>
+                <a:spcPts val="1000"/>
+              </a:spcBef>
+              <a:buFont typeface="Arial" panose="020B0604020202020204" pitchFamily="34" charset="0"/>
+              <a:buChar char="•"/>
+              <a:defRPr sz="2800" kern="1200">
+                <a:solidFill>
+                  <a:schemeClr val="tx1"/>
+                </a:solidFill>
+                <a:latin typeface="+mn-lt"/>
+                <a:ea typeface="+mn-ea"/>
+                <a:cs typeface="+mn-cs"/>
+              </a:defRPr>
+            </a:lvl1pPr>
+            <a:lvl2pPr marL="685800" indent="-228600" algn="l" defTabSz="914400" rtl="0" eaLnBrk="1" latinLnBrk="1" hangingPunct="1">
+              <a:lnSpc>
+                <a:spcPct val="90000"/>
+              </a:lnSpc>
+              <a:spcBef>
+                <a:spcPts val="500"/>
+              </a:spcBef>
+              <a:buFont typeface="Arial" panose="020B0604020202020204" pitchFamily="34" charset="0"/>
+              <a:buChar char="•"/>
+              <a:defRPr sz="2400" kern="1200">
+                <a:solidFill>
+                  <a:schemeClr val="tx1"/>
+                </a:solidFill>
+                <a:latin typeface="+mn-lt"/>
+                <a:ea typeface="+mn-ea"/>
+                <a:cs typeface="+mn-cs"/>
+              </a:defRPr>
+            </a:lvl2pPr>
+            <a:lvl3pPr marL="1143000" indent="-228600" algn="l" defTabSz="914400" rtl="0" eaLnBrk="1" latinLnBrk="1" hangingPunct="1">
+              <a:lnSpc>
+                <a:spcPct val="90000"/>
+              </a:lnSpc>
+              <a:spcBef>
+                <a:spcPts val="500"/>
+              </a:spcBef>
+              <a:buFont typeface="Arial" panose="020B0604020202020204" pitchFamily="34" charset="0"/>
+              <a:buChar char="•"/>
+              <a:defRPr sz="2000" kern="1200">
+                <a:solidFill>
+                  <a:schemeClr val="tx1"/>
+                </a:solidFill>
+                <a:latin typeface="+mn-lt"/>
+                <a:ea typeface="+mn-ea"/>
+                <a:cs typeface="+mn-cs"/>
+              </a:defRPr>
+            </a:lvl3pPr>
+            <a:lvl4pPr marL="1600200" indent="-228600" algn="l" defTabSz="914400" rtl="0" eaLnBrk="1" latinLnBrk="1" hangingPunct="1">
+              <a:lnSpc>
+                <a:spcPct val="90000"/>
+              </a:lnSpc>
+              <a:spcBef>
+                <a:spcPts val="500"/>
+              </a:spcBef>
+              <a:buFont typeface="Arial" panose="020B0604020202020204" pitchFamily="34" charset="0"/>
+              <a:buChar char="•"/>
+              <a:defRPr sz="1800" kern="1200">
+                <a:solidFill>
+                  <a:schemeClr val="tx1"/>
+                </a:solidFill>
+                <a:latin typeface="+mn-lt"/>
+                <a:ea typeface="+mn-ea"/>
+                <a:cs typeface="+mn-cs"/>
+              </a:defRPr>
+            </a:lvl4pPr>
+            <a:lvl5pPr marL="2057400" indent="-228600" algn="l" defTabSz="914400" rtl="0" eaLnBrk="1" latinLnBrk="1" hangingPunct="1">
+              <a:lnSpc>
+                <a:spcPct val="90000"/>
+              </a:lnSpc>
+              <a:spcBef>
+                <a:spcPts val="500"/>
+              </a:spcBef>
+              <a:buFont typeface="Arial" panose="020B0604020202020204" pitchFamily="34" charset="0"/>
+              <a:buChar char="•"/>
+              <a:defRPr sz="1800" kern="1200">
+                <a:solidFill>
+                  <a:schemeClr val="tx1"/>
+                </a:solidFill>
+                <a:latin typeface="+mn-lt"/>
+                <a:ea typeface="+mn-ea"/>
+                <a:cs typeface="+mn-cs"/>
+              </a:defRPr>
+            </a:lvl5pPr>
+            <a:lvl6pPr marL="2514600" indent="-228600" algn="l" defTabSz="914400" rtl="0" eaLnBrk="1" latinLnBrk="1" hangingPunct="1">
+              <a:lnSpc>
+                <a:spcPct val="90000"/>
+              </a:lnSpc>
+              <a:spcBef>
+                <a:spcPts val="500"/>
+              </a:spcBef>
+              <a:buFont typeface="Arial" panose="020B0604020202020204" pitchFamily="34" charset="0"/>
+              <a:buChar char="•"/>
+              <a:defRPr sz="1800" kern="1200">
+                <a:solidFill>
+                  <a:schemeClr val="tx1"/>
+                </a:solidFill>
+                <a:latin typeface="+mn-lt"/>
+                <a:ea typeface="+mn-ea"/>
+                <a:cs typeface="+mn-cs"/>
+              </a:defRPr>
+            </a:lvl6pPr>
+            <a:lvl7pPr marL="2971800" indent="-228600" algn="l" defTabSz="914400" rtl="0" eaLnBrk="1" latinLnBrk="1" hangingPunct="1">
+              <a:lnSpc>
+                <a:spcPct val="90000"/>
+              </a:lnSpc>
+              <a:spcBef>
+                <a:spcPts val="500"/>
+              </a:spcBef>
+              <a:buFont typeface="Arial" panose="020B0604020202020204" pitchFamily="34" charset="0"/>
+              <a:buChar char="•"/>
+              <a:defRPr sz="1800" kern="1200">
+                <a:solidFill>
+                  <a:schemeClr val="tx1"/>
+                </a:solidFill>
+                <a:latin typeface="+mn-lt"/>
+                <a:ea typeface="+mn-ea"/>
+                <a:cs typeface="+mn-cs"/>
+              </a:defRPr>
+            </a:lvl7pPr>
+            <a:lvl8pPr marL="3429000" indent="-228600" algn="l" defTabSz="914400" rtl="0" eaLnBrk="1" latinLnBrk="1" hangingPunct="1">
+              <a:lnSpc>
+                <a:spcPct val="90000"/>
+              </a:lnSpc>
+              <a:spcBef>
+                <a:spcPts val="500"/>
+              </a:spcBef>
+              <a:buFont typeface="Arial" panose="020B0604020202020204" pitchFamily="34" charset="0"/>
+              <a:buChar char="•"/>
+              <a:defRPr sz="1800" kern="1200">
+                <a:solidFill>
+                  <a:schemeClr val="tx1"/>
+                </a:solidFill>
+                <a:latin typeface="+mn-lt"/>
+                <a:ea typeface="+mn-ea"/>
+                <a:cs typeface="+mn-cs"/>
+              </a:defRPr>
+            </a:lvl8pPr>
+            <a:lvl9pPr marL="3886200" indent="-228600" algn="l" defTabSz="914400" rtl="0" eaLnBrk="1" latinLnBrk="1" hangingPunct="1">
+              <a:lnSpc>
+                <a:spcPct val="90000"/>
+              </a:lnSpc>
+              <a:spcBef>
+                <a:spcPts val="500"/>
+              </a:spcBef>
+              <a:buFont typeface="Arial" panose="020B0604020202020204" pitchFamily="34" charset="0"/>
+              <a:buChar char="•"/>
+              <a:defRPr sz="1800" kern="1200">
+                <a:solidFill>
+                  <a:schemeClr val="tx1"/>
+                </a:solidFill>
+                <a:latin typeface="+mn-lt"/>
+                <a:ea typeface="+mn-ea"/>
+                <a:cs typeface="+mn-cs"/>
+              </a:defRPr>
+            </a:lvl9pPr>
+          </a:lstStyle>
+          <a:p>
+            <a:pPr marL="457200" lvl="1" indent="0">
+              <a:buFont typeface="Arial" panose="020B0604020202020204" pitchFamily="34" charset="0"/>
+              <a:buNone/>
+            </a:pPr>
+            <a:endParaRPr lang="en-US" altLang="ko-KR" dirty="0">
+              <a:solidFill>
+                <a:srgbClr val="212529"/>
+              </a:solidFill>
+              <a:latin typeface="+mn-ea"/>
+            </a:endParaRPr>
+          </a:p>
+          <a:p>
+            <a:pPr marL="457200" lvl="1" indent="0">
+              <a:buFont typeface="Arial" panose="020B0604020202020204" pitchFamily="34" charset="0"/>
+              <a:buNone/>
+            </a:pPr>
+            <a:endParaRPr lang="en-US" altLang="ko-KR" dirty="0">
+              <a:solidFill>
+                <a:srgbClr val="212529"/>
+              </a:solidFill>
+              <a:latin typeface="+mn-ea"/>
+            </a:endParaRPr>
+          </a:p>
+          <a:p>
+            <a:r>
+              <a:rPr lang="en-US" altLang="ko-KR" b="1" dirty="0">
+                <a:solidFill>
+                  <a:srgbClr val="212529"/>
+                </a:solidFill>
+                <a:latin typeface="+mn-ea"/>
+              </a:rPr>
+              <a:t>[</a:t>
+            </a:r>
+            <a:r>
+              <a:rPr lang="ko-KR" altLang="en-US" b="1" dirty="0" err="1">
+                <a:solidFill>
+                  <a:srgbClr val="212529"/>
+                </a:solidFill>
+                <a:latin typeface="+mn-ea"/>
+              </a:rPr>
+              <a:t>코딩온</a:t>
+            </a:r>
+            <a:r>
+              <a:rPr lang="en-US" altLang="ko-KR" b="1" dirty="0">
+                <a:solidFill>
+                  <a:srgbClr val="212529"/>
+                </a:solidFill>
+                <a:latin typeface="+mn-ea"/>
+              </a:rPr>
+              <a:t>] HTML, CSS, JS </a:t>
+            </a:r>
+            <a:r>
+              <a:rPr lang="ko-KR" altLang="en-US" b="1" dirty="0">
+                <a:solidFill>
+                  <a:srgbClr val="212529"/>
+                </a:solidFill>
+                <a:latin typeface="+mn-ea"/>
+              </a:rPr>
+              <a:t>실습</a:t>
+            </a:r>
+            <a:r>
+              <a:rPr lang="en-US" altLang="ko-KR" b="1" dirty="0">
+                <a:solidFill>
+                  <a:srgbClr val="212529"/>
+                </a:solidFill>
+                <a:latin typeface="+mn-ea"/>
+              </a:rPr>
+              <a:t> </a:t>
+            </a:r>
+            <a:r>
+              <a:rPr lang="ko-KR" altLang="en-US" dirty="0">
+                <a:solidFill>
+                  <a:srgbClr val="212529"/>
+                </a:solidFill>
+                <a:latin typeface="+mn-ea"/>
+              </a:rPr>
+              <a:t>강의 클릭</a:t>
+            </a:r>
+            <a:br>
+              <a:rPr lang="en-US" altLang="ko-KR" dirty="0">
+                <a:solidFill>
+                  <a:srgbClr val="212529"/>
+                </a:solidFill>
+                <a:latin typeface="+mn-ea"/>
+              </a:rPr>
+            </a:br>
+            <a:endParaRPr lang="en-US" altLang="ko-KR" dirty="0">
+              <a:solidFill>
+                <a:srgbClr val="212529"/>
+              </a:solidFill>
+              <a:latin typeface="+mn-ea"/>
+            </a:endParaRPr>
+          </a:p>
+          <a:p>
+            <a:pPr lvl="1"/>
+            <a:r>
+              <a:rPr lang="ko-KR" altLang="en-US" sz="2800" b="1" dirty="0">
+                <a:solidFill>
+                  <a:srgbClr val="212529"/>
+                </a:solidFill>
+                <a:latin typeface="+mn-ea"/>
+              </a:rPr>
+              <a:t>➡ </a:t>
+            </a:r>
+            <a:r>
+              <a:rPr lang="en-US" altLang="ko-KR" sz="2800" b="1" dirty="0">
+                <a:solidFill>
+                  <a:srgbClr val="212529"/>
+                </a:solidFill>
+                <a:latin typeface="+mn-ea"/>
+              </a:rPr>
+              <a:t>[</a:t>
+            </a:r>
+            <a:r>
+              <a:rPr lang="ko-KR" altLang="en-US" sz="2800" b="1" dirty="0">
+                <a:solidFill>
+                  <a:srgbClr val="212529"/>
+                </a:solidFill>
+                <a:latin typeface="+mn-ea"/>
+              </a:rPr>
+              <a:t>함수 만들기 실습</a:t>
+            </a:r>
+            <a:r>
+              <a:rPr lang="en-US" altLang="ko-KR" sz="2800" b="1" dirty="0">
+                <a:solidFill>
+                  <a:srgbClr val="212529"/>
+                </a:solidFill>
+                <a:latin typeface="+mn-ea"/>
+              </a:rPr>
+              <a:t>]</a:t>
+            </a:r>
+            <a:r>
+              <a:rPr lang="en-US" altLang="ko-KR" sz="2800" dirty="0">
+                <a:solidFill>
+                  <a:srgbClr val="212529"/>
+                </a:solidFill>
+                <a:latin typeface="+mn-ea"/>
+              </a:rPr>
+              <a:t> </a:t>
+            </a:r>
+            <a:r>
+              <a:rPr lang="ko-KR" altLang="en-US" sz="2800" dirty="0">
+                <a:solidFill>
+                  <a:srgbClr val="212529"/>
+                </a:solidFill>
+                <a:latin typeface="+mn-ea"/>
+              </a:rPr>
+              <a:t>커리큘럼 클릭</a:t>
+            </a:r>
+            <a:endParaRPr lang="en-US" altLang="ko-KR" sz="2800" dirty="0">
+              <a:solidFill>
+                <a:srgbClr val="212529"/>
+              </a:solidFill>
+              <a:latin typeface="+mn-ea"/>
+            </a:endParaRPr>
+          </a:p>
+          <a:p>
+            <a:pPr lvl="1"/>
+            <a:r>
+              <a:rPr lang="ko-KR" altLang="en-US" sz="2800" b="1" dirty="0">
+                <a:solidFill>
+                  <a:srgbClr val="212529"/>
+                </a:solidFill>
+                <a:latin typeface="+mn-ea"/>
+              </a:rPr>
+              <a:t>➡ </a:t>
+            </a:r>
+            <a:r>
+              <a:rPr lang="en-US" altLang="ko-KR" sz="2800" b="1" dirty="0">
+                <a:solidFill>
                   <a:schemeClr val="accent1"/>
                 </a:solidFill>
-              </a:rPr>
-              <a:t>실습</a:t>
-            </a:r>
-            <a:r>
-              <a:rPr lang="en-US" altLang="ko-KR" dirty="0">
+                <a:latin typeface="+mn-ea"/>
+              </a:rPr>
+              <a:t>[</a:t>
+            </a:r>
+            <a:r>
+              <a:rPr lang="ko-KR" altLang="en-US" sz="2800" b="1" dirty="0">
                 <a:solidFill>
                   <a:schemeClr val="accent1"/>
                 </a:solidFill>
-              </a:rPr>
-              <a:t>. </a:t>
-            </a:r>
-            <a:r>
-              <a:rPr lang="en-US" altLang="ko-KR" dirty="0"/>
-              <a:t>JavaScript </a:t>
-            </a:r>
-            <a:r>
-              <a:rPr lang="ko-KR" altLang="en-US" dirty="0"/>
-              <a:t>함수 실습 </a:t>
-            </a:r>
-            <a:r>
-              <a:rPr lang="en-US" altLang="ko-KR" dirty="0"/>
-              <a:t>(1)</a:t>
-            </a:r>
-            <a:endParaRPr lang="ko-KR" altLang="en-US" dirty="0"/>
+                <a:latin typeface="+mn-ea"/>
+              </a:rPr>
+              <a:t>실습문제</a:t>
+            </a:r>
+            <a:r>
+              <a:rPr lang="en-US" altLang="ko-KR" sz="2800" b="1" dirty="0">
+                <a:solidFill>
+                  <a:schemeClr val="accent1"/>
+                </a:solidFill>
+                <a:latin typeface="+mn-ea"/>
+              </a:rPr>
+              <a:t>1]</a:t>
+            </a:r>
+            <a:r>
+              <a:rPr lang="en-US" altLang="ko-KR" sz="2800" dirty="0">
+                <a:solidFill>
+                  <a:schemeClr val="accent1"/>
+                </a:solidFill>
+                <a:latin typeface="+mn-ea"/>
+              </a:rPr>
+              <a:t> </a:t>
+            </a:r>
+            <a:r>
+              <a:rPr lang="ko-KR" altLang="en-US" sz="2800" dirty="0">
+                <a:solidFill>
+                  <a:srgbClr val="212529"/>
+                </a:solidFill>
+                <a:latin typeface="+mn-ea"/>
+              </a:rPr>
+              <a:t> 진행</a:t>
+            </a:r>
           </a:p>
         </p:txBody>
       </p:sp>
     </p:spTree>
     <p:extLst>
       <p:ext uri="{BB962C8B-B14F-4D97-AF65-F5344CB8AC3E}">
-        <p14:creationId xmlns:p14="http://schemas.microsoft.com/office/powerpoint/2010/main" val="2868415337"/>
+        <p14:creationId xmlns:p14="http://schemas.microsoft.com/office/powerpoint/2010/main" val="903823382"/>
       </p:ext>
     </p:extLst>
   </p:cSld>
@@ -8190,148 +8452,10 @@
       </p:grpSpPr>
       <p:sp>
         <p:nvSpPr>
-          <p:cNvPr id="3" name="내용 개체 틀 2"/>
-          <p:cNvSpPr>
-            <a:spLocks noGrp="1"/>
-          </p:cNvSpPr>
-          <p:nvPr>
-            <p:ph idx="1"/>
-          </p:nvPr>
-        </p:nvSpPr>
-        <p:spPr/>
-        <p:txBody>
-          <a:bodyPr/>
-          <a:lstStyle/>
-          <a:p>
-            <a:r>
-              <a:rPr lang="en-US" altLang="ko-KR" dirty="0"/>
-              <a:t>square() </a:t>
-            </a:r>
-            <a:r>
-              <a:rPr lang="ko-KR" altLang="en-US" dirty="0"/>
-              <a:t>함수를 만들어주세요</a:t>
-            </a:r>
-            <a:r>
-              <a:rPr lang="en-US" altLang="ko-KR" dirty="0"/>
-              <a:t>!</a:t>
-            </a:r>
-          </a:p>
-          <a:p>
-            <a:r>
-              <a:rPr lang="ko-KR" altLang="en-US" dirty="0"/>
-              <a:t>조건</a:t>
-            </a:r>
-            <a:endParaRPr lang="en-US" altLang="ko-KR" dirty="0"/>
-          </a:p>
-          <a:p>
-            <a:pPr lvl="1"/>
-            <a:r>
-              <a:rPr lang="ko-KR" altLang="en-US" dirty="0"/>
-              <a:t>매개변수로 하나의 숫자를 </a:t>
-            </a:r>
-            <a:r>
-              <a:rPr lang="ko-KR" altLang="en-US" dirty="0" err="1"/>
-              <a:t>입력받기</a:t>
-            </a:r>
-            <a:endParaRPr lang="en-US" altLang="ko-KR" dirty="0"/>
-          </a:p>
-          <a:p>
-            <a:pPr lvl="1"/>
-            <a:r>
-              <a:rPr lang="ko-KR" altLang="en-US" dirty="0" err="1"/>
-              <a:t>입력받은</a:t>
-            </a:r>
-            <a:r>
-              <a:rPr lang="ko-KR" altLang="en-US" dirty="0"/>
-              <a:t> 수의 제곱을 </a:t>
-            </a:r>
-            <a:r>
-              <a:rPr lang="ko-KR" altLang="en-US" dirty="0" err="1"/>
-              <a:t>콘솔창에</a:t>
-            </a:r>
-            <a:r>
-              <a:rPr lang="ko-KR" altLang="en-US" dirty="0"/>
-              <a:t> 출력하는 함수 정의</a:t>
-            </a:r>
-            <a:endParaRPr lang="en-US" altLang="ko-KR" dirty="0"/>
-          </a:p>
-          <a:p>
-            <a:pPr lvl="1"/>
-            <a:endParaRPr lang="en-US" altLang="ko-KR" dirty="0"/>
-          </a:p>
-          <a:p>
-            <a:pPr lvl="1"/>
-            <a:r>
-              <a:rPr lang="ko-KR" altLang="en-US" dirty="0" err="1"/>
-              <a:t>콘솔창에</a:t>
-            </a:r>
-            <a:r>
-              <a:rPr lang="ko-KR" altLang="en-US" dirty="0"/>
-              <a:t> 출력하고 싶다면 아래처럼 테스트 해보기</a:t>
-            </a:r>
-            <a:endParaRPr lang="en-US" altLang="ko-KR" dirty="0"/>
-          </a:p>
-          <a:p>
-            <a:pPr lvl="2"/>
-            <a:r>
-              <a:rPr lang="en-US" altLang="ko-KR" dirty="0"/>
-              <a:t> square(4)</a:t>
-            </a:r>
-            <a:r>
-              <a:rPr lang="en-US" altLang="ko-KR" dirty="0">
-                <a:solidFill>
-                  <a:schemeClr val="accent6"/>
-                </a:solidFill>
-              </a:rPr>
-              <a:t>// 16</a:t>
-            </a:r>
-          </a:p>
-          <a:p>
-            <a:pPr lvl="2"/>
-            <a:r>
-              <a:rPr lang="en-US" altLang="ko-KR" dirty="0"/>
-              <a:t> square(11); </a:t>
-            </a:r>
-            <a:r>
-              <a:rPr lang="en-US" altLang="ko-KR" dirty="0">
-                <a:solidFill>
-                  <a:schemeClr val="accent6"/>
-                </a:solidFill>
-              </a:rPr>
-              <a:t>// 121</a:t>
-            </a:r>
-          </a:p>
-          <a:p>
-            <a:pPr lvl="2"/>
-            <a:r>
-              <a:rPr lang="en-US" altLang="ko-KR" dirty="0"/>
-              <a:t> square(5); </a:t>
-            </a:r>
-            <a:r>
-              <a:rPr lang="en-US" altLang="ko-KR" dirty="0">
-                <a:solidFill>
-                  <a:schemeClr val="accent6"/>
-                </a:solidFill>
-              </a:rPr>
-              <a:t>// 25</a:t>
-            </a:r>
-            <a:endParaRPr lang="ko-KR" altLang="en-US" dirty="0">
-              <a:solidFill>
-                <a:schemeClr val="accent6"/>
-              </a:solidFill>
-            </a:endParaRPr>
-          </a:p>
-          <a:p>
-            <a:endParaRPr lang="ko-KR" altLang="en-US" dirty="0"/>
-          </a:p>
-        </p:txBody>
-      </p:sp>
-      <p:sp>
-        <p:nvSpPr>
-          <p:cNvPr id="5" name="제목 4">
+          <p:cNvPr id="13" name="내용 개체 틀 2">
             <a:extLst>
               <a:ext uri="{FF2B5EF4-FFF2-40B4-BE49-F238E27FC236}">
-                <a16:creationId xmlns:a16="http://schemas.microsoft.com/office/drawing/2014/main" id="{4D1E9275-11A8-3E89-9FC3-9A0A8783F63E}"/>
+                <a16:creationId xmlns:a16="http://schemas.microsoft.com/office/drawing/2014/main" id="{847FD532-7F61-A001-537F-B970BD821AF3}"/>
               </a:ext>
             </a:extLst>
           </p:cNvPr>
@@ -8339,7 +8463,48 @@
             <a:spLocks noGrp="1"/>
           </p:cNvSpPr>
           <p:nvPr>
-            <p:ph type="title"/>
+            <p:ph idx="1"/>
+          </p:nvPr>
+        </p:nvSpPr>
+        <p:spPr>
+          <a:xfrm>
+            <a:off x="510988" y="1328391"/>
+            <a:ext cx="11260802" cy="5328442"/>
+          </a:xfrm>
+        </p:spPr>
+        <p:txBody>
+          <a:bodyPr>
+            <a:normAutofit/>
+          </a:bodyPr>
+          <a:lstStyle/>
+          <a:p>
+            <a:endParaRPr lang="en-US" altLang="ko-KR" dirty="0"/>
+          </a:p>
+          <a:p>
+            <a:pPr marL="0" indent="0">
+              <a:buNone/>
+            </a:pPr>
+            <a:endParaRPr lang="en-US" altLang="ko-KR" dirty="0"/>
+          </a:p>
+          <a:p>
+            <a:endParaRPr lang="en-US" altLang="ko-KR" dirty="0"/>
+          </a:p>
+        </p:txBody>
+      </p:sp>
+      <p:sp>
+        <p:nvSpPr>
+          <p:cNvPr id="4" name="날짜 개체 틀 3">
+            <a:extLst>
+              <a:ext uri="{FF2B5EF4-FFF2-40B4-BE49-F238E27FC236}">
+                <a16:creationId xmlns:a16="http://schemas.microsoft.com/office/drawing/2014/main" id="{A695DDE5-0A39-A366-4CFE-A283911999CD}"/>
+              </a:ext>
+            </a:extLst>
+          </p:cNvPr>
+          <p:cNvSpPr>
+            <a:spLocks noGrp="1"/>
+          </p:cNvSpPr>
+          <p:nvPr>
+            <p:ph type="dt" sz="half" idx="10"/>
           </p:nvPr>
         </p:nvSpPr>
         <p:spPr/>
@@ -8347,42 +8512,498 @@
           <a:bodyPr/>
           <a:lstStyle/>
           <a:p>
+            <a:fld id="{0F78D9C4-20C1-4B15-A116-16DC77AD9A1E}" type="datetime1">
+              <a:rPr lang="ko-KR" altLang="en-US" smtClean="0"/>
+              <a:t>2024-05-29</a:t>
+            </a:fld>
+            <a:endParaRPr lang="ko-KR" altLang="en-US"/>
+          </a:p>
+        </p:txBody>
+      </p:sp>
+      <p:sp>
+        <p:nvSpPr>
+          <p:cNvPr id="5" name="슬라이드 번호 개체 틀 4">
+            <a:extLst>
+              <a:ext uri="{FF2B5EF4-FFF2-40B4-BE49-F238E27FC236}">
+                <a16:creationId xmlns:a16="http://schemas.microsoft.com/office/drawing/2014/main" id="{5E040F43-60A7-C50D-1F5B-F984054F2D7C}"/>
+              </a:ext>
+            </a:extLst>
+          </p:cNvPr>
+          <p:cNvSpPr>
+            <a:spLocks noGrp="1"/>
+          </p:cNvSpPr>
+          <p:nvPr>
+            <p:ph type="sldNum" sz="quarter" idx="12"/>
+          </p:nvPr>
+        </p:nvSpPr>
+        <p:spPr/>
+        <p:txBody>
+          <a:bodyPr/>
+          <a:lstStyle/>
+          <a:p>
+            <a:fld id="{083A2CE0-18CD-4102-B738-4ACFF9E68BA4}" type="slidenum">
+              <a:rPr lang="ko-KR" altLang="en-US" smtClean="0"/>
+              <a:t>11</a:t>
+            </a:fld>
+            <a:endParaRPr lang="ko-KR" altLang="en-US"/>
+          </a:p>
+        </p:txBody>
+      </p:sp>
+      <p:sp>
+        <p:nvSpPr>
+          <p:cNvPr id="2" name="제목 1">
+            <a:extLst>
+              <a:ext uri="{FF2B5EF4-FFF2-40B4-BE49-F238E27FC236}">
+                <a16:creationId xmlns:a16="http://schemas.microsoft.com/office/drawing/2014/main" id="{5FAC57F5-99D7-9C46-B6C1-D16224151FE9}"/>
+              </a:ext>
+            </a:extLst>
+          </p:cNvPr>
+          <p:cNvSpPr>
+            <a:spLocks noGrp="1"/>
+          </p:cNvSpPr>
+          <p:nvPr>
+            <p:ph type="title"/>
+          </p:nvPr>
+        </p:nvSpPr>
+        <p:spPr/>
+        <p:txBody>
+          <a:bodyPr/>
+          <a:lstStyle/>
+          <a:p>
             <a:r>
               <a:rPr lang="ko-KR" altLang="en-US" dirty="0">
                 <a:solidFill>
+                  <a:srgbClr val="6EC173"/>
+                </a:solidFill>
+              </a:rPr>
+              <a:t>실습</a:t>
+            </a:r>
+            <a:r>
+              <a:rPr lang="en-US" altLang="ko-KR" dirty="0">
+                <a:solidFill>
+                  <a:srgbClr val="6EC173"/>
+                </a:solidFill>
+              </a:rPr>
+              <a:t>.  </a:t>
+            </a:r>
+            <a:r>
+              <a:rPr lang="ko-KR" altLang="en-US" dirty="0"/>
+              <a:t>함수 만들기</a:t>
+            </a:r>
+          </a:p>
+        </p:txBody>
+      </p:sp>
+      <p:sp>
+        <p:nvSpPr>
+          <p:cNvPr id="6" name="내용 개체 틀 1">
+            <a:extLst>
+              <a:ext uri="{FF2B5EF4-FFF2-40B4-BE49-F238E27FC236}">
+                <a16:creationId xmlns:a16="http://schemas.microsoft.com/office/drawing/2014/main" id="{70C2BA37-BE91-39C4-AC08-0E8A1052E2F7}"/>
+              </a:ext>
+            </a:extLst>
+          </p:cNvPr>
+          <p:cNvSpPr txBox="1">
+            <a:spLocks/>
+          </p:cNvSpPr>
+          <p:nvPr/>
+        </p:nvSpPr>
+        <p:spPr>
+          <a:xfrm>
+            <a:off x="838200" y="1825625"/>
+            <a:ext cx="10515600" cy="4351338"/>
+          </a:xfrm>
+          <a:prstGeom prst="rect">
+            <a:avLst/>
+          </a:prstGeom>
+        </p:spPr>
+        <p:txBody>
+          <a:bodyPr vert="horz" lIns="91440" tIns="45720" rIns="91440" bIns="45720" rtlCol="0">
+            <a:normAutofit/>
+          </a:bodyPr>
+          <a:lstStyle>
+            <a:lvl1pPr marL="228600" indent="-228600" algn="l" defTabSz="914400" rtl="0" eaLnBrk="1" latinLnBrk="1" hangingPunct="1">
+              <a:lnSpc>
+                <a:spcPct val="90000"/>
+              </a:lnSpc>
+              <a:spcBef>
+                <a:spcPts val="1000"/>
+              </a:spcBef>
+              <a:buFont typeface="Arial" panose="020B0604020202020204" pitchFamily="34" charset="0"/>
+              <a:buChar char="•"/>
+              <a:defRPr sz="2800" kern="1200">
+                <a:solidFill>
+                  <a:schemeClr val="tx1"/>
+                </a:solidFill>
+                <a:latin typeface="+mn-lt"/>
+                <a:ea typeface="+mn-ea"/>
+                <a:cs typeface="+mn-cs"/>
+              </a:defRPr>
+            </a:lvl1pPr>
+            <a:lvl2pPr marL="685800" indent="-228600" algn="l" defTabSz="914400" rtl="0" eaLnBrk="1" latinLnBrk="1" hangingPunct="1">
+              <a:lnSpc>
+                <a:spcPct val="90000"/>
+              </a:lnSpc>
+              <a:spcBef>
+                <a:spcPts val="500"/>
+              </a:spcBef>
+              <a:buFont typeface="Arial" panose="020B0604020202020204" pitchFamily="34" charset="0"/>
+              <a:buChar char="•"/>
+              <a:defRPr sz="2400" kern="1200">
+                <a:solidFill>
+                  <a:schemeClr val="tx1"/>
+                </a:solidFill>
+                <a:latin typeface="+mn-lt"/>
+                <a:ea typeface="+mn-ea"/>
+                <a:cs typeface="+mn-cs"/>
+              </a:defRPr>
+            </a:lvl2pPr>
+            <a:lvl3pPr marL="1143000" indent="-228600" algn="l" defTabSz="914400" rtl="0" eaLnBrk="1" latinLnBrk="1" hangingPunct="1">
+              <a:lnSpc>
+                <a:spcPct val="90000"/>
+              </a:lnSpc>
+              <a:spcBef>
+                <a:spcPts val="500"/>
+              </a:spcBef>
+              <a:buFont typeface="Arial" panose="020B0604020202020204" pitchFamily="34" charset="0"/>
+              <a:buChar char="•"/>
+              <a:defRPr sz="2000" kern="1200">
+                <a:solidFill>
+                  <a:schemeClr val="tx1"/>
+                </a:solidFill>
+                <a:latin typeface="+mn-lt"/>
+                <a:ea typeface="+mn-ea"/>
+                <a:cs typeface="+mn-cs"/>
+              </a:defRPr>
+            </a:lvl3pPr>
+            <a:lvl4pPr marL="1600200" indent="-228600" algn="l" defTabSz="914400" rtl="0" eaLnBrk="1" latinLnBrk="1" hangingPunct="1">
+              <a:lnSpc>
+                <a:spcPct val="90000"/>
+              </a:lnSpc>
+              <a:spcBef>
+                <a:spcPts val="500"/>
+              </a:spcBef>
+              <a:buFont typeface="Arial" panose="020B0604020202020204" pitchFamily="34" charset="0"/>
+              <a:buChar char="•"/>
+              <a:defRPr sz="1800" kern="1200">
+                <a:solidFill>
+                  <a:schemeClr val="tx1"/>
+                </a:solidFill>
+                <a:latin typeface="+mn-lt"/>
+                <a:ea typeface="+mn-ea"/>
+                <a:cs typeface="+mn-cs"/>
+              </a:defRPr>
+            </a:lvl4pPr>
+            <a:lvl5pPr marL="2057400" indent="-228600" algn="l" defTabSz="914400" rtl="0" eaLnBrk="1" latinLnBrk="1" hangingPunct="1">
+              <a:lnSpc>
+                <a:spcPct val="90000"/>
+              </a:lnSpc>
+              <a:spcBef>
+                <a:spcPts val="500"/>
+              </a:spcBef>
+              <a:buFont typeface="Arial" panose="020B0604020202020204" pitchFamily="34" charset="0"/>
+              <a:buChar char="•"/>
+              <a:defRPr sz="1800" kern="1200">
+                <a:solidFill>
+                  <a:schemeClr val="tx1"/>
+                </a:solidFill>
+                <a:latin typeface="+mn-lt"/>
+                <a:ea typeface="+mn-ea"/>
+                <a:cs typeface="+mn-cs"/>
+              </a:defRPr>
+            </a:lvl5pPr>
+            <a:lvl6pPr marL="2514600" indent="-228600" algn="l" defTabSz="914400" rtl="0" eaLnBrk="1" latinLnBrk="1" hangingPunct="1">
+              <a:lnSpc>
+                <a:spcPct val="90000"/>
+              </a:lnSpc>
+              <a:spcBef>
+                <a:spcPts val="500"/>
+              </a:spcBef>
+              <a:buFont typeface="Arial" panose="020B0604020202020204" pitchFamily="34" charset="0"/>
+              <a:buChar char="•"/>
+              <a:defRPr sz="1800" kern="1200">
+                <a:solidFill>
+                  <a:schemeClr val="tx1"/>
+                </a:solidFill>
+                <a:latin typeface="+mn-lt"/>
+                <a:ea typeface="+mn-ea"/>
+                <a:cs typeface="+mn-cs"/>
+              </a:defRPr>
+            </a:lvl6pPr>
+            <a:lvl7pPr marL="2971800" indent="-228600" algn="l" defTabSz="914400" rtl="0" eaLnBrk="1" latinLnBrk="1" hangingPunct="1">
+              <a:lnSpc>
+                <a:spcPct val="90000"/>
+              </a:lnSpc>
+              <a:spcBef>
+                <a:spcPts val="500"/>
+              </a:spcBef>
+              <a:buFont typeface="Arial" panose="020B0604020202020204" pitchFamily="34" charset="0"/>
+              <a:buChar char="•"/>
+              <a:defRPr sz="1800" kern="1200">
+                <a:solidFill>
+                  <a:schemeClr val="tx1"/>
+                </a:solidFill>
+                <a:latin typeface="+mn-lt"/>
+                <a:ea typeface="+mn-ea"/>
+                <a:cs typeface="+mn-cs"/>
+              </a:defRPr>
+            </a:lvl7pPr>
+            <a:lvl8pPr marL="3429000" indent="-228600" algn="l" defTabSz="914400" rtl="0" eaLnBrk="1" latinLnBrk="1" hangingPunct="1">
+              <a:lnSpc>
+                <a:spcPct val="90000"/>
+              </a:lnSpc>
+              <a:spcBef>
+                <a:spcPts val="500"/>
+              </a:spcBef>
+              <a:buFont typeface="Arial" panose="020B0604020202020204" pitchFamily="34" charset="0"/>
+              <a:buChar char="•"/>
+              <a:defRPr sz="1800" kern="1200">
+                <a:solidFill>
+                  <a:schemeClr val="tx1"/>
+                </a:solidFill>
+                <a:latin typeface="+mn-lt"/>
+                <a:ea typeface="+mn-ea"/>
+                <a:cs typeface="+mn-cs"/>
+              </a:defRPr>
+            </a:lvl8pPr>
+            <a:lvl9pPr marL="3886200" indent="-228600" algn="l" defTabSz="914400" rtl="0" eaLnBrk="1" latinLnBrk="1" hangingPunct="1">
+              <a:lnSpc>
+                <a:spcPct val="90000"/>
+              </a:lnSpc>
+              <a:spcBef>
+                <a:spcPts val="500"/>
+              </a:spcBef>
+              <a:buFont typeface="Arial" panose="020B0604020202020204" pitchFamily="34" charset="0"/>
+              <a:buChar char="•"/>
+              <a:defRPr sz="1800" kern="1200">
+                <a:solidFill>
+                  <a:schemeClr val="tx1"/>
+                </a:solidFill>
+                <a:latin typeface="+mn-lt"/>
+                <a:ea typeface="+mn-ea"/>
+                <a:cs typeface="+mn-cs"/>
+              </a:defRPr>
+            </a:lvl9pPr>
+          </a:lstStyle>
+          <a:p>
+            <a:pPr marL="457200" lvl="1" indent="0">
+              <a:buFont typeface="Arial" panose="020B0604020202020204" pitchFamily="34" charset="0"/>
+              <a:buNone/>
+            </a:pPr>
+            <a:endParaRPr lang="en-US" altLang="ko-KR" dirty="0">
+              <a:solidFill>
+                <a:srgbClr val="212529"/>
+              </a:solidFill>
+              <a:latin typeface="+mn-ea"/>
+            </a:endParaRPr>
+          </a:p>
+          <a:p>
+            <a:pPr marL="457200" lvl="1" indent="0">
+              <a:buFont typeface="Arial" panose="020B0604020202020204" pitchFamily="34" charset="0"/>
+              <a:buNone/>
+            </a:pPr>
+            <a:endParaRPr lang="en-US" altLang="ko-KR" dirty="0">
+              <a:solidFill>
+                <a:srgbClr val="212529"/>
+              </a:solidFill>
+              <a:latin typeface="+mn-ea"/>
+            </a:endParaRPr>
+          </a:p>
+          <a:p>
+            <a:r>
+              <a:rPr lang="en-US" altLang="ko-KR" b="1" dirty="0">
+                <a:solidFill>
+                  <a:srgbClr val="212529"/>
+                </a:solidFill>
+                <a:latin typeface="+mn-ea"/>
+              </a:rPr>
+              <a:t>[</a:t>
+            </a:r>
+            <a:r>
+              <a:rPr lang="ko-KR" altLang="en-US" b="1" dirty="0" err="1">
+                <a:solidFill>
+                  <a:srgbClr val="212529"/>
+                </a:solidFill>
+                <a:latin typeface="+mn-ea"/>
+              </a:rPr>
+              <a:t>코딩온</a:t>
+            </a:r>
+            <a:r>
+              <a:rPr lang="en-US" altLang="ko-KR" b="1" dirty="0">
+                <a:solidFill>
+                  <a:srgbClr val="212529"/>
+                </a:solidFill>
+                <a:latin typeface="+mn-ea"/>
+              </a:rPr>
+              <a:t>] HTML, CSS, JS </a:t>
+            </a:r>
+            <a:r>
+              <a:rPr lang="ko-KR" altLang="en-US" b="1" dirty="0">
+                <a:solidFill>
+                  <a:srgbClr val="212529"/>
+                </a:solidFill>
+                <a:latin typeface="+mn-ea"/>
+              </a:rPr>
+              <a:t>실습</a:t>
+            </a:r>
+            <a:r>
+              <a:rPr lang="en-US" altLang="ko-KR" b="1" dirty="0">
+                <a:solidFill>
+                  <a:srgbClr val="212529"/>
+                </a:solidFill>
+                <a:latin typeface="+mn-ea"/>
+              </a:rPr>
+              <a:t> </a:t>
+            </a:r>
+            <a:r>
+              <a:rPr lang="ko-KR" altLang="en-US" dirty="0">
+                <a:solidFill>
+                  <a:srgbClr val="212529"/>
+                </a:solidFill>
+                <a:latin typeface="+mn-ea"/>
+              </a:rPr>
+              <a:t>강의 클릭</a:t>
+            </a:r>
+            <a:br>
+              <a:rPr lang="en-US" altLang="ko-KR" dirty="0">
+                <a:solidFill>
+                  <a:srgbClr val="212529"/>
+                </a:solidFill>
+                <a:latin typeface="+mn-ea"/>
+              </a:rPr>
+            </a:br>
+            <a:endParaRPr lang="en-US" altLang="ko-KR" dirty="0">
+              <a:solidFill>
+                <a:srgbClr val="212529"/>
+              </a:solidFill>
+              <a:latin typeface="+mn-ea"/>
+            </a:endParaRPr>
+          </a:p>
+          <a:p>
+            <a:pPr lvl="1"/>
+            <a:r>
+              <a:rPr lang="ko-KR" altLang="en-US" sz="2800" b="1" dirty="0">
+                <a:solidFill>
+                  <a:srgbClr val="212529"/>
+                </a:solidFill>
+                <a:latin typeface="+mn-ea"/>
+              </a:rPr>
+              <a:t>➡ </a:t>
+            </a:r>
+            <a:r>
+              <a:rPr lang="en-US" altLang="ko-KR" sz="2800" b="1" dirty="0">
+                <a:solidFill>
+                  <a:srgbClr val="212529"/>
+                </a:solidFill>
+                <a:latin typeface="+mn-ea"/>
+              </a:rPr>
+              <a:t>[</a:t>
+            </a:r>
+            <a:r>
+              <a:rPr lang="ko-KR" altLang="en-US" sz="2800" b="1" dirty="0">
+                <a:solidFill>
+                  <a:srgbClr val="212529"/>
+                </a:solidFill>
+                <a:latin typeface="+mn-ea"/>
+              </a:rPr>
+              <a:t>함수 만들기 실습</a:t>
+            </a:r>
+            <a:r>
+              <a:rPr lang="en-US" altLang="ko-KR" sz="2800" b="1" dirty="0">
+                <a:solidFill>
+                  <a:srgbClr val="212529"/>
+                </a:solidFill>
+                <a:latin typeface="+mn-ea"/>
+              </a:rPr>
+              <a:t>]</a:t>
+            </a:r>
+            <a:r>
+              <a:rPr lang="en-US" altLang="ko-KR" sz="2800" dirty="0">
+                <a:solidFill>
+                  <a:srgbClr val="212529"/>
+                </a:solidFill>
+                <a:latin typeface="+mn-ea"/>
+              </a:rPr>
+              <a:t> </a:t>
+            </a:r>
+            <a:r>
+              <a:rPr lang="ko-KR" altLang="en-US" sz="2800" dirty="0">
+                <a:solidFill>
+                  <a:srgbClr val="212529"/>
+                </a:solidFill>
+                <a:latin typeface="+mn-ea"/>
+              </a:rPr>
+              <a:t>커리큘럼 클릭</a:t>
+            </a:r>
+            <a:endParaRPr lang="en-US" altLang="ko-KR" sz="2800" dirty="0">
+              <a:solidFill>
+                <a:srgbClr val="212529"/>
+              </a:solidFill>
+              <a:latin typeface="+mn-ea"/>
+            </a:endParaRPr>
+          </a:p>
+          <a:p>
+            <a:pPr lvl="1"/>
+            <a:r>
+              <a:rPr lang="ko-KR" altLang="en-US" sz="2800" b="1" dirty="0">
+                <a:solidFill>
+                  <a:srgbClr val="212529"/>
+                </a:solidFill>
+                <a:latin typeface="+mn-ea"/>
+              </a:rPr>
+              <a:t>➡ </a:t>
+            </a:r>
+            <a:r>
+              <a:rPr lang="en-US" altLang="ko-KR" sz="2800" b="1" dirty="0">
+                <a:solidFill>
                   <a:schemeClr val="accent1"/>
                 </a:solidFill>
-              </a:rPr>
-              <a:t>실습</a:t>
-            </a:r>
-            <a:r>
-              <a:rPr lang="en-US" altLang="ko-KR" dirty="0">
+                <a:latin typeface="+mn-ea"/>
+              </a:rPr>
+              <a:t>[</a:t>
+            </a:r>
+            <a:r>
+              <a:rPr lang="ko-KR" altLang="en-US" sz="2800" b="1" dirty="0">
                 <a:solidFill>
                   <a:schemeClr val="accent1"/>
                 </a:solidFill>
-              </a:rPr>
-              <a:t>. </a:t>
-            </a:r>
-            <a:r>
-              <a:rPr lang="en-US" altLang="ko-KR" dirty="0"/>
-              <a:t>JavaScript </a:t>
-            </a:r>
-            <a:r>
-              <a:rPr lang="ko-KR" altLang="en-US" dirty="0"/>
-              <a:t>함수 실습 </a:t>
-            </a:r>
-            <a:r>
-              <a:rPr lang="en-US" altLang="ko-KR" dirty="0"/>
-              <a:t>(2)</a:t>
-            </a:r>
-            <a:endParaRPr lang="ko-KR" altLang="en-US" dirty="0"/>
+                <a:latin typeface="+mn-ea"/>
+              </a:rPr>
+              <a:t>실습문제</a:t>
+            </a:r>
+            <a:r>
+              <a:rPr lang="en-US" altLang="ko-KR" sz="2800" b="1" dirty="0">
+                <a:solidFill>
+                  <a:schemeClr val="accent1"/>
+                </a:solidFill>
+                <a:latin typeface="+mn-ea"/>
+              </a:rPr>
+              <a:t>2]</a:t>
+            </a:r>
+            <a:r>
+              <a:rPr lang="en-US" altLang="ko-KR" sz="2800" dirty="0">
+                <a:solidFill>
+                  <a:schemeClr val="accent1"/>
+                </a:solidFill>
+                <a:latin typeface="+mn-ea"/>
+              </a:rPr>
+              <a:t> </a:t>
+            </a:r>
+            <a:r>
+              <a:rPr lang="ko-KR" altLang="en-US" sz="2800" dirty="0">
+                <a:solidFill>
+                  <a:srgbClr val="212529"/>
+                </a:solidFill>
+                <a:latin typeface="+mn-ea"/>
+              </a:rPr>
+              <a:t> 진행</a:t>
+            </a:r>
           </a:p>
         </p:txBody>
       </p:sp>
     </p:spTree>
     <p:extLst>
       <p:ext uri="{BB962C8B-B14F-4D97-AF65-F5344CB8AC3E}">
-        <p14:creationId xmlns:p14="http://schemas.microsoft.com/office/powerpoint/2010/main" val="790919020"/>
+        <p14:creationId xmlns:p14="http://schemas.microsoft.com/office/powerpoint/2010/main" val="2351949335"/>
       </p:ext>
     </p:extLst>
   </p:cSld>
@@ -11562,10 +12183,10 @@
       </p:grpSpPr>
       <p:sp>
         <p:nvSpPr>
-          <p:cNvPr id="2" name="내용 개체 틀 1">
+          <p:cNvPr id="13" name="내용 개체 틀 2">
             <a:extLst>
               <a:ext uri="{FF2B5EF4-FFF2-40B4-BE49-F238E27FC236}">
-                <a16:creationId xmlns:a16="http://schemas.microsoft.com/office/drawing/2014/main" id="{DB6689DB-22E7-73DE-E013-B8DFF912EA8A}"/>
+                <a16:creationId xmlns:a16="http://schemas.microsoft.com/office/drawing/2014/main" id="{847FD532-7F61-A001-537F-B970BD821AF3}"/>
               </a:ext>
             </a:extLst>
           </p:cNvPr>
@@ -11576,295 +12197,37 @@
             <p:ph idx="1"/>
           </p:nvPr>
         </p:nvSpPr>
-        <p:spPr/>
-        <p:txBody>
-          <a:bodyPr/>
+        <p:spPr>
+          <a:xfrm>
+            <a:off x="510988" y="1328391"/>
+            <a:ext cx="11260802" cy="5328442"/>
+          </a:xfrm>
+        </p:spPr>
+        <p:txBody>
+          <a:bodyPr>
+            <a:normAutofit/>
+          </a:bodyPr>
           <a:lstStyle/>
           <a:p>
-            <a:r>
-              <a:rPr lang="en-US" altLang="ko-KR" sz="2800" dirty="0">
-                <a:latin typeface="+mn-ea"/>
-              </a:rPr>
-              <a:t>if</a:t>
-            </a:r>
-            <a:r>
-              <a:rPr lang="ko-KR" altLang="en-US" sz="2800" dirty="0">
-                <a:latin typeface="+mn-ea"/>
-              </a:rPr>
-              <a:t>문을 이용해서 </a:t>
-            </a:r>
-            <a:r>
-              <a:rPr lang="en-US" altLang="ko-KR" sz="2800" dirty="0">
-                <a:latin typeface="+mn-ea"/>
-              </a:rPr>
-              <a:t>console</a:t>
-            </a:r>
-            <a:r>
-              <a:rPr lang="ko-KR" altLang="en-US" sz="2800" dirty="0">
-                <a:latin typeface="+mn-ea"/>
-              </a:rPr>
-              <a:t>창에 연령대별 단어 출력해보기</a:t>
-            </a:r>
-            <a:r>
-              <a:rPr lang="en-US" altLang="ko-KR" sz="2800" dirty="0">
-                <a:latin typeface="+mn-ea"/>
-              </a:rPr>
-              <a:t>!</a:t>
-            </a:r>
-          </a:p>
-          <a:p>
-            <a:endParaRPr lang="ko-KR" altLang="en-US" sz="2800" dirty="0">
-              <a:latin typeface="+mn-ea"/>
-            </a:endParaRPr>
-          </a:p>
-          <a:p>
-            <a:pPr marL="457200" indent="-457200">
-              <a:buFont typeface="Arial" panose="020B0604020202020204" pitchFamily="34" charset="0"/>
-              <a:buChar char="•"/>
+            <a:endParaRPr lang="en-US" altLang="ko-KR" dirty="0"/>
+          </a:p>
+          <a:p>
+            <a:pPr marL="0" indent="0">
+              <a:buNone/>
             </a:pPr>
-            <a:r>
-              <a:rPr lang="en-US" altLang="ko-KR" sz="2800" dirty="0">
-                <a:latin typeface="+mn-ea"/>
-              </a:rPr>
-              <a:t>age </a:t>
-            </a:r>
-            <a:r>
-              <a:rPr lang="ko-KR" altLang="en-US" sz="2800" dirty="0">
-                <a:latin typeface="+mn-ea"/>
-              </a:rPr>
-              <a:t>변수 선언</a:t>
-            </a:r>
-            <a:endParaRPr lang="en-US" altLang="ko-KR" sz="2800" dirty="0">
-              <a:latin typeface="+mn-ea"/>
-            </a:endParaRPr>
-          </a:p>
-          <a:p>
-            <a:pPr marL="457200" indent="-457200">
-              <a:buFont typeface="Arial" panose="020B0604020202020204" pitchFamily="34" charset="0"/>
-              <a:buChar char="•"/>
-            </a:pPr>
-            <a:r>
-              <a:rPr lang="en-US" altLang="ko-KR" sz="2800" dirty="0">
-                <a:latin typeface="+mn-ea"/>
-              </a:rPr>
-              <a:t>age</a:t>
-            </a:r>
-            <a:r>
-              <a:rPr lang="ko-KR" altLang="en-US" sz="2800" dirty="0">
-                <a:latin typeface="+mn-ea"/>
-              </a:rPr>
-              <a:t>가 </a:t>
-            </a:r>
-            <a:r>
-              <a:rPr lang="en-US" altLang="ko-KR" sz="2800" dirty="0">
-                <a:latin typeface="+mn-ea"/>
-              </a:rPr>
-              <a:t>20 </a:t>
-            </a:r>
-            <a:r>
-              <a:rPr lang="ko-KR" altLang="en-US" sz="2800" dirty="0">
-                <a:latin typeface="+mn-ea"/>
-              </a:rPr>
-              <a:t>이상</a:t>
-            </a:r>
-            <a:r>
-              <a:rPr lang="en-US" altLang="ko-KR" sz="2800" dirty="0">
-                <a:latin typeface="+mn-ea"/>
-              </a:rPr>
-              <a:t>: </a:t>
-            </a:r>
-            <a:r>
-              <a:rPr lang="ko-KR" altLang="en-US" sz="2800" dirty="0">
-                <a:latin typeface="+mn-ea"/>
-              </a:rPr>
-              <a:t>성인</a:t>
-            </a:r>
-          </a:p>
-          <a:p>
-            <a:pPr marL="457200" indent="-457200">
-              <a:buFont typeface="Arial" panose="020B0604020202020204" pitchFamily="34" charset="0"/>
-              <a:buChar char="•"/>
-            </a:pPr>
-            <a:r>
-              <a:rPr lang="en-US" altLang="ko-KR" sz="2800" dirty="0">
-                <a:latin typeface="+mn-ea"/>
-              </a:rPr>
-              <a:t>age</a:t>
-            </a:r>
-            <a:r>
-              <a:rPr lang="ko-KR" altLang="en-US" sz="2800" dirty="0">
-                <a:latin typeface="+mn-ea"/>
-              </a:rPr>
-              <a:t>가 </a:t>
-            </a:r>
-            <a:r>
-              <a:rPr lang="en-US" altLang="ko-KR" sz="2800" dirty="0">
-                <a:latin typeface="+mn-ea"/>
-              </a:rPr>
-              <a:t>17 </a:t>
-            </a:r>
-            <a:r>
-              <a:rPr lang="ko-KR" altLang="en-US" sz="2800" dirty="0">
-                <a:latin typeface="+mn-ea"/>
-              </a:rPr>
-              <a:t>이상</a:t>
-            </a:r>
-            <a:r>
-              <a:rPr lang="en-US" altLang="ko-KR" sz="2800" dirty="0">
-                <a:latin typeface="+mn-ea"/>
-              </a:rPr>
-              <a:t>: </a:t>
-            </a:r>
-            <a:r>
-              <a:rPr lang="ko-KR" altLang="en-US" sz="2800" dirty="0">
-                <a:latin typeface="+mn-ea"/>
-              </a:rPr>
-              <a:t>고등학생</a:t>
-            </a:r>
-          </a:p>
-          <a:p>
-            <a:pPr marL="457200" indent="-457200">
-              <a:buFont typeface="Arial" panose="020B0604020202020204" pitchFamily="34" charset="0"/>
-              <a:buChar char="•"/>
-            </a:pPr>
-            <a:r>
-              <a:rPr lang="en-US" altLang="ko-KR" sz="2800" dirty="0">
-                <a:latin typeface="+mn-ea"/>
-              </a:rPr>
-              <a:t>age</a:t>
-            </a:r>
-            <a:r>
-              <a:rPr lang="ko-KR" altLang="en-US" sz="2800" dirty="0">
-                <a:latin typeface="+mn-ea"/>
-              </a:rPr>
-              <a:t>가 </a:t>
-            </a:r>
-            <a:r>
-              <a:rPr lang="en-US" altLang="ko-KR" sz="2800" dirty="0">
-                <a:latin typeface="+mn-ea"/>
-              </a:rPr>
-              <a:t>14 </a:t>
-            </a:r>
-            <a:r>
-              <a:rPr lang="ko-KR" altLang="en-US" sz="2800" dirty="0">
-                <a:latin typeface="+mn-ea"/>
-              </a:rPr>
-              <a:t>이상</a:t>
-            </a:r>
-            <a:r>
-              <a:rPr lang="en-US" altLang="ko-KR" sz="2800" dirty="0">
-                <a:latin typeface="+mn-ea"/>
-              </a:rPr>
-              <a:t>: </a:t>
-            </a:r>
-            <a:r>
-              <a:rPr lang="ko-KR" altLang="en-US" sz="2800" dirty="0">
-                <a:latin typeface="+mn-ea"/>
-              </a:rPr>
-              <a:t>중학생</a:t>
-            </a:r>
-          </a:p>
-          <a:p>
-            <a:pPr marL="457200" indent="-457200">
-              <a:buFont typeface="Arial" panose="020B0604020202020204" pitchFamily="34" charset="0"/>
-              <a:buChar char="•"/>
-            </a:pPr>
-            <a:r>
-              <a:rPr lang="en-US" altLang="ko-KR" sz="2800" dirty="0">
-                <a:latin typeface="+mn-ea"/>
-              </a:rPr>
-              <a:t>age</a:t>
-            </a:r>
-            <a:r>
-              <a:rPr lang="ko-KR" altLang="en-US" sz="2800" dirty="0">
-                <a:latin typeface="+mn-ea"/>
-              </a:rPr>
-              <a:t>가 </a:t>
-            </a:r>
-            <a:r>
-              <a:rPr lang="en-US" altLang="ko-KR" sz="2800" dirty="0">
-                <a:latin typeface="+mn-ea"/>
-              </a:rPr>
-              <a:t>8 </a:t>
-            </a:r>
-            <a:r>
-              <a:rPr lang="ko-KR" altLang="en-US" sz="2800" dirty="0">
-                <a:latin typeface="+mn-ea"/>
-              </a:rPr>
-              <a:t>이상</a:t>
-            </a:r>
-            <a:r>
-              <a:rPr lang="en-US" altLang="ko-KR" sz="2800" dirty="0">
-                <a:latin typeface="+mn-ea"/>
-              </a:rPr>
-              <a:t>: </a:t>
-            </a:r>
-            <a:r>
-              <a:rPr lang="ko-KR" altLang="en-US" sz="2800" dirty="0">
-                <a:latin typeface="+mn-ea"/>
-              </a:rPr>
-              <a:t>초등학생</a:t>
-            </a:r>
-          </a:p>
-          <a:p>
-            <a:pPr marL="457200" indent="-457200">
-              <a:buFont typeface="Arial" panose="020B0604020202020204" pitchFamily="34" charset="0"/>
-              <a:buChar char="•"/>
-            </a:pPr>
-            <a:r>
-              <a:rPr lang="en-US" altLang="ko-KR" sz="2800" dirty="0">
-                <a:latin typeface="+mn-ea"/>
-              </a:rPr>
-              <a:t>age</a:t>
-            </a:r>
-            <a:r>
-              <a:rPr lang="ko-KR" altLang="en-US" sz="2800" dirty="0">
-                <a:latin typeface="+mn-ea"/>
-              </a:rPr>
-              <a:t>가 </a:t>
-            </a:r>
-            <a:r>
-              <a:rPr lang="en-US" altLang="ko-KR" sz="2800" dirty="0">
-                <a:latin typeface="+mn-ea"/>
-              </a:rPr>
-              <a:t>0 </a:t>
-            </a:r>
-            <a:r>
-              <a:rPr lang="ko-KR" altLang="en-US" sz="2800" dirty="0">
-                <a:latin typeface="+mn-ea"/>
-              </a:rPr>
-              <a:t>이상</a:t>
-            </a:r>
-            <a:r>
-              <a:rPr lang="en-US" altLang="ko-KR" sz="2800" dirty="0">
-                <a:latin typeface="+mn-ea"/>
-              </a:rPr>
-              <a:t>: </a:t>
-            </a:r>
-            <a:r>
-              <a:rPr lang="ko-KR" altLang="en-US" sz="2800" dirty="0">
-                <a:latin typeface="+mn-ea"/>
-              </a:rPr>
-              <a:t>유아</a:t>
-            </a:r>
-            <a:endParaRPr lang="ko-KR" altLang="en-US" sz="2800" b="0" dirty="0">
-              <a:effectLst/>
-              <a:latin typeface="+mn-ea"/>
-            </a:endParaRPr>
-          </a:p>
-          <a:p>
-            <a:endParaRPr lang="ko-KR" altLang="en-US" dirty="0">
-              <a:latin typeface="+mn-ea"/>
-            </a:endParaRPr>
-          </a:p>
-        </p:txBody>
-      </p:sp>
-      <p:sp>
-        <p:nvSpPr>
-          <p:cNvPr id="3" name="날짜 개체 틀 2">
+            <a:endParaRPr lang="en-US" altLang="ko-KR" dirty="0"/>
+          </a:p>
+          <a:p>
+            <a:endParaRPr lang="en-US" altLang="ko-KR" dirty="0"/>
+          </a:p>
+        </p:txBody>
+      </p:sp>
+      <p:sp>
+        <p:nvSpPr>
+          <p:cNvPr id="4" name="날짜 개체 틀 3">
             <a:extLst>
               <a:ext uri="{FF2B5EF4-FFF2-40B4-BE49-F238E27FC236}">
-                <a16:creationId xmlns:a16="http://schemas.microsoft.com/office/drawing/2014/main" id="{56A84848-616A-28DE-3CFD-54978D33E1E8}"/>
+                <a16:creationId xmlns:a16="http://schemas.microsoft.com/office/drawing/2014/main" id="{A695DDE5-0A39-A366-4CFE-A283911999CD}"/>
               </a:ext>
             </a:extLst>
           </p:cNvPr>
@@ -11880,9 +12243,9 @@
           <a:bodyPr/>
           <a:lstStyle/>
           <a:p>
-            <a:fld id="{3C9CE3CE-253F-4F9D-BA15-C226C8D8501E}" type="datetime6">
+            <a:fld id="{0F78D9C4-20C1-4B15-A116-16DC77AD9A1E}" type="datetime1">
               <a:rPr lang="ko-KR" altLang="en-US" smtClean="0"/>
-              <a:t>2024년 5월</a:t>
+              <a:t>2024-05-29</a:t>
             </a:fld>
             <a:endParaRPr lang="ko-KR" altLang="en-US"/>
           </a:p>
@@ -11890,10 +12253,10 @@
       </p:sp>
       <p:sp>
         <p:nvSpPr>
-          <p:cNvPr id="4" name="슬라이드 번호 개체 틀 3">
+          <p:cNvPr id="5" name="슬라이드 번호 개체 틀 4">
             <a:extLst>
               <a:ext uri="{FF2B5EF4-FFF2-40B4-BE49-F238E27FC236}">
-                <a16:creationId xmlns:a16="http://schemas.microsoft.com/office/drawing/2014/main" id="{DDE24E26-06F4-2B64-6712-2E4EA8CB2CFD}"/>
+                <a16:creationId xmlns:a16="http://schemas.microsoft.com/office/drawing/2014/main" id="{5E040F43-60A7-C50D-1F5B-F984054F2D7C}"/>
               </a:ext>
             </a:extLst>
           </p:cNvPr>
@@ -11919,10 +12282,10 @@
       </p:sp>
       <p:sp>
         <p:nvSpPr>
-          <p:cNvPr id="5" name="제목 4">
+          <p:cNvPr id="2" name="제목 1">
             <a:extLst>
               <a:ext uri="{FF2B5EF4-FFF2-40B4-BE49-F238E27FC236}">
-                <a16:creationId xmlns:a16="http://schemas.microsoft.com/office/drawing/2014/main" id="{1D513863-AF9E-607F-9E99-474A764FC45D}"/>
+                <a16:creationId xmlns:a16="http://schemas.microsoft.com/office/drawing/2014/main" id="{5FAC57F5-99D7-9C46-B6C1-D16224151FE9}"/>
               </a:ext>
             </a:extLst>
           </p:cNvPr>
@@ -11941,26 +12304,429 @@
             <a:r>
               <a:rPr lang="ko-KR" altLang="en-US" dirty="0">
                 <a:solidFill>
+                  <a:srgbClr val="6EC173"/>
+                </a:solidFill>
+              </a:rPr>
+              <a:t>실습</a:t>
+            </a:r>
+            <a:r>
+              <a:rPr lang="en-US" altLang="ko-KR" dirty="0">
+                <a:solidFill>
+                  <a:srgbClr val="6EC173"/>
+                </a:solidFill>
+              </a:rPr>
+              <a:t>. </a:t>
+            </a:r>
+            <a:r>
+              <a:rPr lang="ko-KR" altLang="en-US" dirty="0"/>
+              <a:t>연령대별 단어 출력</a:t>
+            </a:r>
+          </a:p>
+        </p:txBody>
+      </p:sp>
+      <p:sp>
+        <p:nvSpPr>
+          <p:cNvPr id="6" name="내용 개체 틀 1">
+            <a:extLst>
+              <a:ext uri="{FF2B5EF4-FFF2-40B4-BE49-F238E27FC236}">
+                <a16:creationId xmlns:a16="http://schemas.microsoft.com/office/drawing/2014/main" id="{70C2BA37-BE91-39C4-AC08-0E8A1052E2F7}"/>
+              </a:ext>
+            </a:extLst>
+          </p:cNvPr>
+          <p:cNvSpPr txBox="1">
+            <a:spLocks/>
+          </p:cNvSpPr>
+          <p:nvPr/>
+        </p:nvSpPr>
+        <p:spPr>
+          <a:xfrm>
+            <a:off x="838200" y="1825625"/>
+            <a:ext cx="10515600" cy="4351338"/>
+          </a:xfrm>
+          <a:prstGeom prst="rect">
+            <a:avLst/>
+          </a:prstGeom>
+        </p:spPr>
+        <p:txBody>
+          <a:bodyPr vert="horz" lIns="91440" tIns="45720" rIns="91440" bIns="45720" rtlCol="0">
+            <a:normAutofit/>
+          </a:bodyPr>
+          <a:lstStyle>
+            <a:lvl1pPr marL="228600" indent="-228600" algn="l" defTabSz="914400" rtl="0" eaLnBrk="1" latinLnBrk="1" hangingPunct="1">
+              <a:lnSpc>
+                <a:spcPct val="90000"/>
+              </a:lnSpc>
+              <a:spcBef>
+                <a:spcPts val="1000"/>
+              </a:spcBef>
+              <a:buFont typeface="Arial" panose="020B0604020202020204" pitchFamily="34" charset="0"/>
+              <a:buChar char="•"/>
+              <a:defRPr sz="2800" kern="1200">
+                <a:solidFill>
+                  <a:schemeClr val="tx1"/>
+                </a:solidFill>
+                <a:latin typeface="+mn-lt"/>
+                <a:ea typeface="+mn-ea"/>
+                <a:cs typeface="+mn-cs"/>
+              </a:defRPr>
+            </a:lvl1pPr>
+            <a:lvl2pPr marL="685800" indent="-228600" algn="l" defTabSz="914400" rtl="0" eaLnBrk="1" latinLnBrk="1" hangingPunct="1">
+              <a:lnSpc>
+                <a:spcPct val="90000"/>
+              </a:lnSpc>
+              <a:spcBef>
+                <a:spcPts val="500"/>
+              </a:spcBef>
+              <a:buFont typeface="Arial" panose="020B0604020202020204" pitchFamily="34" charset="0"/>
+              <a:buChar char="•"/>
+              <a:defRPr sz="2400" kern="1200">
+                <a:solidFill>
+                  <a:schemeClr val="tx1"/>
+                </a:solidFill>
+                <a:latin typeface="+mn-lt"/>
+                <a:ea typeface="+mn-ea"/>
+                <a:cs typeface="+mn-cs"/>
+              </a:defRPr>
+            </a:lvl2pPr>
+            <a:lvl3pPr marL="1143000" indent="-228600" algn="l" defTabSz="914400" rtl="0" eaLnBrk="1" latinLnBrk="1" hangingPunct="1">
+              <a:lnSpc>
+                <a:spcPct val="90000"/>
+              </a:lnSpc>
+              <a:spcBef>
+                <a:spcPts val="500"/>
+              </a:spcBef>
+              <a:buFont typeface="Arial" panose="020B0604020202020204" pitchFamily="34" charset="0"/>
+              <a:buChar char="•"/>
+              <a:defRPr sz="2000" kern="1200">
+                <a:solidFill>
+                  <a:schemeClr val="tx1"/>
+                </a:solidFill>
+                <a:latin typeface="+mn-lt"/>
+                <a:ea typeface="+mn-ea"/>
+                <a:cs typeface="+mn-cs"/>
+              </a:defRPr>
+            </a:lvl3pPr>
+            <a:lvl4pPr marL="1600200" indent="-228600" algn="l" defTabSz="914400" rtl="0" eaLnBrk="1" latinLnBrk="1" hangingPunct="1">
+              <a:lnSpc>
+                <a:spcPct val="90000"/>
+              </a:lnSpc>
+              <a:spcBef>
+                <a:spcPts val="500"/>
+              </a:spcBef>
+              <a:buFont typeface="Arial" panose="020B0604020202020204" pitchFamily="34" charset="0"/>
+              <a:buChar char="•"/>
+              <a:defRPr sz="1800" kern="1200">
+                <a:solidFill>
+                  <a:schemeClr val="tx1"/>
+                </a:solidFill>
+                <a:latin typeface="+mn-lt"/>
+                <a:ea typeface="+mn-ea"/>
+                <a:cs typeface="+mn-cs"/>
+              </a:defRPr>
+            </a:lvl4pPr>
+            <a:lvl5pPr marL="2057400" indent="-228600" algn="l" defTabSz="914400" rtl="0" eaLnBrk="1" latinLnBrk="1" hangingPunct="1">
+              <a:lnSpc>
+                <a:spcPct val="90000"/>
+              </a:lnSpc>
+              <a:spcBef>
+                <a:spcPts val="500"/>
+              </a:spcBef>
+              <a:buFont typeface="Arial" panose="020B0604020202020204" pitchFamily="34" charset="0"/>
+              <a:buChar char="•"/>
+              <a:defRPr sz="1800" kern="1200">
+                <a:solidFill>
+                  <a:schemeClr val="tx1"/>
+                </a:solidFill>
+                <a:latin typeface="+mn-lt"/>
+                <a:ea typeface="+mn-ea"/>
+                <a:cs typeface="+mn-cs"/>
+              </a:defRPr>
+            </a:lvl5pPr>
+            <a:lvl6pPr marL="2514600" indent="-228600" algn="l" defTabSz="914400" rtl="0" eaLnBrk="1" latinLnBrk="1" hangingPunct="1">
+              <a:lnSpc>
+                <a:spcPct val="90000"/>
+              </a:lnSpc>
+              <a:spcBef>
+                <a:spcPts val="500"/>
+              </a:spcBef>
+              <a:buFont typeface="Arial" panose="020B0604020202020204" pitchFamily="34" charset="0"/>
+              <a:buChar char="•"/>
+              <a:defRPr sz="1800" kern="1200">
+                <a:solidFill>
+                  <a:schemeClr val="tx1"/>
+                </a:solidFill>
+                <a:latin typeface="+mn-lt"/>
+                <a:ea typeface="+mn-ea"/>
+                <a:cs typeface="+mn-cs"/>
+              </a:defRPr>
+            </a:lvl6pPr>
+            <a:lvl7pPr marL="2971800" indent="-228600" algn="l" defTabSz="914400" rtl="0" eaLnBrk="1" latinLnBrk="1" hangingPunct="1">
+              <a:lnSpc>
+                <a:spcPct val="90000"/>
+              </a:lnSpc>
+              <a:spcBef>
+                <a:spcPts val="500"/>
+              </a:spcBef>
+              <a:buFont typeface="Arial" panose="020B0604020202020204" pitchFamily="34" charset="0"/>
+              <a:buChar char="•"/>
+              <a:defRPr sz="1800" kern="1200">
+                <a:solidFill>
+                  <a:schemeClr val="tx1"/>
+                </a:solidFill>
+                <a:latin typeface="+mn-lt"/>
+                <a:ea typeface="+mn-ea"/>
+                <a:cs typeface="+mn-cs"/>
+              </a:defRPr>
+            </a:lvl7pPr>
+            <a:lvl8pPr marL="3429000" indent="-228600" algn="l" defTabSz="914400" rtl="0" eaLnBrk="1" latinLnBrk="1" hangingPunct="1">
+              <a:lnSpc>
+                <a:spcPct val="90000"/>
+              </a:lnSpc>
+              <a:spcBef>
+                <a:spcPts val="500"/>
+              </a:spcBef>
+              <a:buFont typeface="Arial" panose="020B0604020202020204" pitchFamily="34" charset="0"/>
+              <a:buChar char="•"/>
+              <a:defRPr sz="1800" kern="1200">
+                <a:solidFill>
+                  <a:schemeClr val="tx1"/>
+                </a:solidFill>
+                <a:latin typeface="+mn-lt"/>
+                <a:ea typeface="+mn-ea"/>
+                <a:cs typeface="+mn-cs"/>
+              </a:defRPr>
+            </a:lvl8pPr>
+            <a:lvl9pPr marL="3886200" indent="-228600" algn="l" defTabSz="914400" rtl="0" eaLnBrk="1" latinLnBrk="1" hangingPunct="1">
+              <a:lnSpc>
+                <a:spcPct val="90000"/>
+              </a:lnSpc>
+              <a:spcBef>
+                <a:spcPts val="500"/>
+              </a:spcBef>
+              <a:buFont typeface="Arial" panose="020B0604020202020204" pitchFamily="34" charset="0"/>
+              <a:buChar char="•"/>
+              <a:defRPr sz="1800" kern="1200">
+                <a:solidFill>
+                  <a:schemeClr val="tx1"/>
+                </a:solidFill>
+                <a:latin typeface="+mn-lt"/>
+                <a:ea typeface="+mn-ea"/>
+                <a:cs typeface="+mn-cs"/>
+              </a:defRPr>
+            </a:lvl9pPr>
+          </a:lstStyle>
+          <a:p>
+            <a:pPr marL="457200" lvl="1" indent="0">
+              <a:buFont typeface="Arial" panose="020B0604020202020204" pitchFamily="34" charset="0"/>
+              <a:buNone/>
+            </a:pPr>
+            <a:endParaRPr lang="en-US" altLang="ko-KR" dirty="0">
+              <a:solidFill>
+                <a:srgbClr val="212529"/>
+              </a:solidFill>
+              <a:latin typeface="+mn-ea"/>
+            </a:endParaRPr>
+          </a:p>
+          <a:p>
+            <a:pPr marL="457200" lvl="1" indent="0">
+              <a:buFont typeface="Arial" panose="020B0604020202020204" pitchFamily="34" charset="0"/>
+              <a:buNone/>
+            </a:pPr>
+            <a:endParaRPr lang="en-US" altLang="ko-KR" dirty="0">
+              <a:solidFill>
+                <a:srgbClr val="212529"/>
+              </a:solidFill>
+              <a:latin typeface="+mn-ea"/>
+            </a:endParaRPr>
+          </a:p>
+          <a:p>
+            <a:r>
+              <a:rPr lang="en-US" altLang="ko-KR" b="1" dirty="0">
+                <a:solidFill>
+                  <a:srgbClr val="212529"/>
+                </a:solidFill>
+                <a:latin typeface="+mn-ea"/>
+              </a:rPr>
+              <a:t>[</a:t>
+            </a:r>
+            <a:r>
+              <a:rPr lang="ko-KR" altLang="en-US" b="1" dirty="0" err="1">
+                <a:solidFill>
+                  <a:srgbClr val="212529"/>
+                </a:solidFill>
+                <a:latin typeface="+mn-ea"/>
+              </a:rPr>
+              <a:t>코딩온</a:t>
+            </a:r>
+            <a:r>
+              <a:rPr lang="en-US" altLang="ko-KR" b="1" dirty="0">
+                <a:solidFill>
+                  <a:srgbClr val="212529"/>
+                </a:solidFill>
+                <a:latin typeface="+mn-ea"/>
+              </a:rPr>
+              <a:t>] HTML, CSS, JS </a:t>
+            </a:r>
+            <a:r>
+              <a:rPr lang="ko-KR" altLang="en-US" b="1" dirty="0">
+                <a:solidFill>
+                  <a:srgbClr val="212529"/>
+                </a:solidFill>
+                <a:latin typeface="+mn-ea"/>
+              </a:rPr>
+              <a:t>실습</a:t>
+            </a:r>
+            <a:r>
+              <a:rPr lang="en-US" altLang="ko-KR" b="1" dirty="0">
+                <a:solidFill>
+                  <a:srgbClr val="212529"/>
+                </a:solidFill>
+                <a:latin typeface="+mn-ea"/>
+              </a:rPr>
+              <a:t> </a:t>
+            </a:r>
+            <a:r>
+              <a:rPr lang="ko-KR" altLang="en-US" dirty="0">
+                <a:solidFill>
+                  <a:srgbClr val="212529"/>
+                </a:solidFill>
+                <a:latin typeface="+mn-ea"/>
+              </a:rPr>
+              <a:t>강의 클릭</a:t>
+            </a:r>
+            <a:br>
+              <a:rPr lang="en-US" altLang="ko-KR" dirty="0">
+                <a:solidFill>
+                  <a:srgbClr val="212529"/>
+                </a:solidFill>
+                <a:latin typeface="+mn-ea"/>
+              </a:rPr>
+            </a:br>
+            <a:endParaRPr lang="en-US" altLang="ko-KR" dirty="0">
+              <a:solidFill>
+                <a:srgbClr val="212529"/>
+              </a:solidFill>
+              <a:latin typeface="+mn-ea"/>
+            </a:endParaRPr>
+          </a:p>
+          <a:p>
+            <a:pPr lvl="1"/>
+            <a:r>
+              <a:rPr lang="ko-KR" altLang="en-US" sz="2800" b="1" dirty="0">
+                <a:solidFill>
+                  <a:srgbClr val="212529"/>
+                </a:solidFill>
+                <a:latin typeface="+mn-ea"/>
+              </a:rPr>
+              <a:t>➡ </a:t>
+            </a:r>
+            <a:r>
+              <a:rPr lang="en-US" altLang="ko-KR" sz="2800" b="1" dirty="0">
+                <a:solidFill>
+                  <a:srgbClr val="212529"/>
+                </a:solidFill>
+                <a:latin typeface="+mn-ea"/>
+              </a:rPr>
+              <a:t>[</a:t>
+            </a:r>
+            <a:r>
+              <a:rPr lang="ko-KR" altLang="en-US" sz="2800" b="1" dirty="0">
+                <a:solidFill>
+                  <a:srgbClr val="212529"/>
+                </a:solidFill>
+                <a:latin typeface="+mn-ea"/>
+              </a:rPr>
+              <a:t>조건문 실습</a:t>
+            </a:r>
+            <a:r>
+              <a:rPr lang="en-US" altLang="ko-KR" sz="2800" b="1" dirty="0">
+                <a:solidFill>
+                  <a:srgbClr val="212529"/>
+                </a:solidFill>
+                <a:latin typeface="+mn-ea"/>
+              </a:rPr>
+              <a:t>]</a:t>
+            </a:r>
+            <a:r>
+              <a:rPr lang="en-US" altLang="ko-KR" sz="2800" dirty="0">
+                <a:solidFill>
+                  <a:srgbClr val="212529"/>
+                </a:solidFill>
+                <a:latin typeface="+mn-ea"/>
+              </a:rPr>
+              <a:t> </a:t>
+            </a:r>
+            <a:r>
+              <a:rPr lang="ko-KR" altLang="en-US" sz="2800" dirty="0">
+                <a:solidFill>
+                  <a:srgbClr val="212529"/>
+                </a:solidFill>
+                <a:latin typeface="+mn-ea"/>
+              </a:rPr>
+              <a:t>커리큘럼 클릭</a:t>
+            </a:r>
+            <a:endParaRPr lang="en-US" altLang="ko-KR" sz="2800" dirty="0">
+              <a:solidFill>
+                <a:srgbClr val="212529"/>
+              </a:solidFill>
+              <a:latin typeface="+mn-ea"/>
+            </a:endParaRPr>
+          </a:p>
+          <a:p>
+            <a:pPr lvl="1"/>
+            <a:r>
+              <a:rPr lang="ko-KR" altLang="en-US" sz="2800" b="1" dirty="0">
+                <a:solidFill>
+                  <a:srgbClr val="212529"/>
+                </a:solidFill>
+                <a:latin typeface="+mn-ea"/>
+              </a:rPr>
+              <a:t>➡ </a:t>
+            </a:r>
+            <a:r>
+              <a:rPr lang="en-US" altLang="ko-KR" sz="2800" b="1" dirty="0">
+                <a:solidFill>
                   <a:schemeClr val="accent1"/>
                 </a:solidFill>
-              </a:rPr>
-              <a:t>실습</a:t>
-            </a:r>
-            <a:r>
-              <a:rPr lang="en-US" altLang="ko-KR" dirty="0">
+                <a:latin typeface="+mn-ea"/>
+              </a:rPr>
+              <a:t>[</a:t>
+            </a:r>
+            <a:r>
+              <a:rPr lang="ko-KR" altLang="en-US" sz="2800" b="1" dirty="0">
                 <a:solidFill>
                   <a:schemeClr val="accent1"/>
                 </a:solidFill>
-              </a:rPr>
-              <a:t>. </a:t>
-            </a:r>
-            <a:r>
-              <a:rPr lang="en-US" altLang="ko-KR" dirty="0"/>
-              <a:t>if </a:t>
-            </a:r>
-            <a:r>
-              <a:rPr lang="ko-KR" altLang="en-US" dirty="0"/>
-              <a:t>문 실습</a:t>
+                <a:latin typeface="+mn-ea"/>
+              </a:rPr>
+              <a:t>실습문제</a:t>
+            </a:r>
+            <a:r>
+              <a:rPr lang="en-US" altLang="ko-KR" sz="2800" b="1" dirty="0">
+                <a:solidFill>
+                  <a:schemeClr val="accent1"/>
+                </a:solidFill>
+                <a:latin typeface="+mn-ea"/>
+              </a:rPr>
+              <a:t>1]</a:t>
+            </a:r>
+            <a:r>
+              <a:rPr lang="en-US" altLang="ko-KR" sz="2800" dirty="0">
+                <a:solidFill>
+                  <a:schemeClr val="accent1"/>
+                </a:solidFill>
+                <a:latin typeface="+mn-ea"/>
+              </a:rPr>
+              <a:t> </a:t>
+            </a:r>
+            <a:r>
+              <a:rPr lang="ko-KR" altLang="en-US" sz="2800" dirty="0">
+                <a:solidFill>
+                  <a:srgbClr val="212529"/>
+                </a:solidFill>
+                <a:latin typeface="+mn-ea"/>
+              </a:rPr>
+              <a:t> 진행</a:t>
             </a:r>
           </a:p>
         </p:txBody>
@@ -11968,7 +12734,7 @@
     </p:spTree>
     <p:extLst>
       <p:ext uri="{BB962C8B-B14F-4D97-AF65-F5344CB8AC3E}">
-        <p14:creationId xmlns:p14="http://schemas.microsoft.com/office/powerpoint/2010/main" val="2996396598"/>
+        <p14:creationId xmlns:p14="http://schemas.microsoft.com/office/powerpoint/2010/main" val="3305511218"/>
       </p:ext>
     </p:extLst>
   </p:cSld>
@@ -14070,10 +14836,10 @@
       </p:grpSpPr>
       <p:sp>
         <p:nvSpPr>
-          <p:cNvPr id="2" name="내용 개체 틀 1">
+          <p:cNvPr id="13" name="내용 개체 틀 2">
             <a:extLst>
               <a:ext uri="{FF2B5EF4-FFF2-40B4-BE49-F238E27FC236}">
-                <a16:creationId xmlns:a16="http://schemas.microsoft.com/office/drawing/2014/main" id="{1B19C46C-E019-6553-AAFB-9F856172EEE2}"/>
+                <a16:creationId xmlns:a16="http://schemas.microsoft.com/office/drawing/2014/main" id="{847FD532-7F61-A001-537F-B970BD821AF3}"/>
               </a:ext>
             </a:extLst>
           </p:cNvPr>
@@ -14086,8 +14852,8 @@
         </p:nvSpPr>
         <p:spPr>
           <a:xfrm>
-            <a:off x="838200" y="2170713"/>
-            <a:ext cx="10515600" cy="4006250"/>
+            <a:off x="510988" y="1328391"/>
+            <a:ext cx="11260802" cy="5328442"/>
           </a:xfrm>
         </p:spPr>
         <p:txBody>
@@ -14096,207 +14862,25 @@
           </a:bodyPr>
           <a:lstStyle/>
           <a:p>
-            <a:r>
-              <a:rPr lang="ko-KR" altLang="en-US" sz="1800" b="0" dirty="0">
-                <a:solidFill>
-                  <a:schemeClr val="tx2"/>
-                </a:solidFill>
-                <a:effectLst/>
-                <a:latin typeface="+mn-ea"/>
-              </a:rPr>
-              <a:t>위의 코드는 현재 </a:t>
-            </a:r>
-            <a:r>
-              <a:rPr lang="en-US" altLang="ko-KR" sz="1800" b="0" dirty="0">
-                <a:solidFill>
-                  <a:schemeClr val="tx2"/>
-                </a:solidFill>
-                <a:effectLst/>
-                <a:latin typeface="+mn-ea"/>
-              </a:rPr>
-              <a:t>‘</a:t>
-            </a:r>
-            <a:r>
-              <a:rPr lang="ko-KR" altLang="en-US" sz="1800" b="0" dirty="0">
-                <a:solidFill>
-                  <a:schemeClr val="tx2"/>
-                </a:solidFill>
-                <a:effectLst/>
-                <a:latin typeface="+mn-ea"/>
-              </a:rPr>
-              <a:t>시간</a:t>
-            </a:r>
-            <a:r>
-              <a:rPr lang="en-US" altLang="ko-KR" sz="1800" b="0" dirty="0">
-                <a:solidFill>
-                  <a:schemeClr val="tx2"/>
-                </a:solidFill>
-                <a:effectLst/>
-                <a:latin typeface="+mn-ea"/>
-              </a:rPr>
-              <a:t>’</a:t>
-            </a:r>
-            <a:r>
-              <a:rPr lang="ko-KR" altLang="en-US" sz="1800" b="0" dirty="0">
-                <a:solidFill>
-                  <a:schemeClr val="tx2"/>
-                </a:solidFill>
-                <a:effectLst/>
-                <a:latin typeface="+mn-ea"/>
-              </a:rPr>
-              <a:t>만을 받아오는 코드입니다</a:t>
-            </a:r>
-            <a:r>
-              <a:rPr lang="en-US" altLang="ko-KR" sz="1800" b="0" dirty="0">
-                <a:solidFill>
-                  <a:schemeClr val="tx2"/>
-                </a:solidFill>
-                <a:effectLst/>
-                <a:latin typeface="+mn-ea"/>
-              </a:rPr>
-              <a:t>.</a:t>
-            </a:r>
-          </a:p>
-          <a:p>
-            <a:r>
-              <a:rPr lang="en-US" altLang="ko-KR" sz="1800" dirty="0">
-                <a:solidFill>
-                  <a:schemeClr val="tx2"/>
-                </a:solidFill>
-                <a:latin typeface="+mn-ea"/>
-              </a:rPr>
-              <a:t>0~ 23</a:t>
-            </a:r>
-            <a:r>
-              <a:rPr lang="ko-KR" altLang="en-US" sz="1800" dirty="0">
-                <a:solidFill>
-                  <a:schemeClr val="tx2"/>
-                </a:solidFill>
-                <a:latin typeface="+mn-ea"/>
-              </a:rPr>
-              <a:t>까지의 숫자를 반환하고 </a:t>
-            </a:r>
-            <a:r>
-              <a:rPr lang="en-US" altLang="ko-KR" sz="1800" dirty="0">
-                <a:solidFill>
-                  <a:schemeClr val="tx2"/>
-                </a:solidFill>
-                <a:latin typeface="+mn-ea"/>
-              </a:rPr>
-              <a:t>0</a:t>
-            </a:r>
-            <a:r>
-              <a:rPr lang="ko-KR" altLang="en-US" sz="1800" dirty="0">
-                <a:solidFill>
-                  <a:schemeClr val="tx2"/>
-                </a:solidFill>
-                <a:latin typeface="+mn-ea"/>
-              </a:rPr>
-              <a:t>이 자정</a:t>
-            </a:r>
-            <a:r>
-              <a:rPr lang="en-US" altLang="ko-KR" sz="1800" dirty="0">
-                <a:solidFill>
-                  <a:schemeClr val="tx2"/>
-                </a:solidFill>
-                <a:latin typeface="+mn-ea"/>
-              </a:rPr>
-              <a:t>, 12</a:t>
-            </a:r>
-            <a:r>
-              <a:rPr lang="ko-KR" altLang="en-US" sz="1800" dirty="0">
-                <a:solidFill>
-                  <a:schemeClr val="tx2"/>
-                </a:solidFill>
-                <a:latin typeface="+mn-ea"/>
-              </a:rPr>
-              <a:t>가 정오를 뜻합니다</a:t>
-            </a:r>
-            <a:r>
-              <a:rPr lang="en-US" altLang="ko-KR" sz="1800" dirty="0">
-                <a:solidFill>
-                  <a:schemeClr val="tx2"/>
-                </a:solidFill>
-                <a:latin typeface="+mn-ea"/>
-              </a:rPr>
-              <a:t>.</a:t>
-            </a:r>
-          </a:p>
-          <a:p>
-            <a:r>
-              <a:rPr lang="en-US" altLang="ko-KR" sz="1800" dirty="0">
-                <a:solidFill>
-                  <a:schemeClr val="tx2"/>
-                </a:solidFill>
-                <a:latin typeface="+mn-ea"/>
-              </a:rPr>
-              <a:t>now</a:t>
-            </a:r>
-            <a:r>
-              <a:rPr lang="ko-KR" altLang="en-US" sz="1800" dirty="0">
-                <a:solidFill>
-                  <a:schemeClr val="tx2"/>
-                </a:solidFill>
-                <a:latin typeface="+mn-ea"/>
-              </a:rPr>
-              <a:t>라는 변수에는 현재 시간에 대한 숫자가 저장이 되어있겠죠</a:t>
-            </a:r>
-            <a:r>
-              <a:rPr lang="en-US" altLang="ko-KR" sz="1800" dirty="0">
-                <a:solidFill>
-                  <a:schemeClr val="tx2"/>
-                </a:solidFill>
-                <a:latin typeface="+mn-ea"/>
-              </a:rPr>
-              <a:t>?</a:t>
-            </a:r>
-          </a:p>
-          <a:p>
-            <a:endParaRPr lang="en-US" altLang="ko-KR" sz="2600" dirty="0">
-              <a:latin typeface="+mn-ea"/>
-            </a:endParaRPr>
-          </a:p>
-          <a:p>
-            <a:pPr marL="342900" indent="-342900">
-              <a:buFont typeface="Arial" panose="020B0604020202020204" pitchFamily="34" charset="0"/>
-              <a:buChar char="•"/>
+            <a:endParaRPr lang="en-US" altLang="ko-KR" dirty="0"/>
+          </a:p>
+          <a:p>
+            <a:pPr marL="0" indent="0">
+              <a:buNone/>
             </a:pPr>
-            <a:r>
-              <a:rPr lang="ko-KR" altLang="en-US" sz="2600" dirty="0" err="1">
-                <a:latin typeface="+mn-ea"/>
-              </a:rPr>
-              <a:t>삼항연산자로</a:t>
-            </a:r>
-            <a:r>
-              <a:rPr lang="ko-KR" altLang="en-US" sz="2600" dirty="0">
-                <a:latin typeface="+mn-ea"/>
-              </a:rPr>
-              <a:t> 지금 시각이 오전인지 오후인지 콘솔창에 출력해보세요</a:t>
-            </a:r>
-            <a:r>
-              <a:rPr lang="en-US" altLang="ko-KR" sz="2600" dirty="0">
-                <a:latin typeface="+mn-ea"/>
-              </a:rPr>
-              <a:t>!</a:t>
-            </a:r>
-            <a:endParaRPr lang="ko-KR" altLang="en-US" sz="2600" b="0" dirty="0">
-              <a:effectLst/>
-              <a:latin typeface="+mn-ea"/>
-            </a:endParaRPr>
-          </a:p>
-          <a:p>
-            <a:endParaRPr lang="ko-KR" altLang="en-US" sz="2600" dirty="0">
-              <a:latin typeface="+mn-ea"/>
-            </a:endParaRPr>
-          </a:p>
-        </p:txBody>
-      </p:sp>
-      <p:sp>
-        <p:nvSpPr>
-          <p:cNvPr id="3" name="날짜 개체 틀 2">
+            <a:endParaRPr lang="en-US" altLang="ko-KR" dirty="0"/>
+          </a:p>
+          <a:p>
+            <a:endParaRPr lang="en-US" altLang="ko-KR" dirty="0"/>
+          </a:p>
+        </p:txBody>
+      </p:sp>
+      <p:sp>
+        <p:nvSpPr>
+          <p:cNvPr id="4" name="날짜 개체 틀 3">
             <a:extLst>
               <a:ext uri="{FF2B5EF4-FFF2-40B4-BE49-F238E27FC236}">
-                <a16:creationId xmlns:a16="http://schemas.microsoft.com/office/drawing/2014/main" id="{0C507751-F511-25F4-420E-38B4175F13E0}"/>
+                <a16:creationId xmlns:a16="http://schemas.microsoft.com/office/drawing/2014/main" id="{A695DDE5-0A39-A366-4CFE-A283911999CD}"/>
               </a:ext>
             </a:extLst>
           </p:cNvPr>
@@ -14312,9 +14896,9 @@
           <a:bodyPr/>
           <a:lstStyle/>
           <a:p>
-            <a:fld id="{3C9CE3CE-253F-4F9D-BA15-C226C8D8501E}" type="datetime6">
+            <a:fld id="{0F78D9C4-20C1-4B15-A116-16DC77AD9A1E}" type="datetime1">
               <a:rPr lang="ko-KR" altLang="en-US" smtClean="0"/>
-              <a:t>2024년 5월</a:t>
+              <a:t>2024-05-29</a:t>
             </a:fld>
             <a:endParaRPr lang="ko-KR" altLang="en-US"/>
           </a:p>
@@ -14322,10 +14906,10 @@
       </p:sp>
       <p:sp>
         <p:nvSpPr>
-          <p:cNvPr id="4" name="슬라이드 번호 개체 틀 3">
+          <p:cNvPr id="5" name="슬라이드 번호 개체 틀 4">
             <a:extLst>
               <a:ext uri="{FF2B5EF4-FFF2-40B4-BE49-F238E27FC236}">
-                <a16:creationId xmlns:a16="http://schemas.microsoft.com/office/drawing/2014/main" id="{01A68424-8F46-A196-19E1-CAC0F6615EF5}"/>
+                <a16:creationId xmlns:a16="http://schemas.microsoft.com/office/drawing/2014/main" id="{5E040F43-60A7-C50D-1F5B-F984054F2D7C}"/>
               </a:ext>
             </a:extLst>
           </p:cNvPr>
@@ -14351,10 +14935,10 @@
       </p:sp>
       <p:sp>
         <p:nvSpPr>
-          <p:cNvPr id="5" name="제목 4">
+          <p:cNvPr id="2" name="제목 1">
             <a:extLst>
               <a:ext uri="{FF2B5EF4-FFF2-40B4-BE49-F238E27FC236}">
-                <a16:creationId xmlns:a16="http://schemas.microsoft.com/office/drawing/2014/main" id="{7DBEBE29-1164-B928-707A-E2C0DD058A4C}"/>
+                <a16:creationId xmlns:a16="http://schemas.microsoft.com/office/drawing/2014/main" id="{5FAC57F5-99D7-9C46-B6C1-D16224151FE9}"/>
               </a:ext>
             </a:extLst>
           </p:cNvPr>
@@ -14373,7 +14957,7 @@
             <a:r>
               <a:rPr lang="ko-KR" altLang="en-US" dirty="0">
                 <a:solidFill>
-                  <a:schemeClr val="accent1"/>
+                  <a:srgbClr val="6EC173"/>
                 </a:solidFill>
               </a:rPr>
               <a:t>실습</a:t>
@@ -14381,7 +14965,7 @@
             <a:r>
               <a:rPr lang="en-US" altLang="ko-KR" dirty="0">
                 <a:solidFill>
-                  <a:schemeClr val="accent1"/>
+                  <a:srgbClr val="6EC173"/>
                 </a:solidFill>
               </a:rPr>
               <a:t>. </a:t>
@@ -14400,7 +14984,7 @@
             </a:r>
             <a:r>
               <a:rPr lang="en-US" altLang="ko-KR" dirty="0"/>
-              <a:t>!?</a:t>
+              <a:t>?</a:t>
             </a:r>
             <a:endParaRPr lang="ko-KR" altLang="en-US" dirty="0"/>
           </a:p>
@@ -14408,141 +14992,415 @@
       </p:sp>
       <p:sp>
         <p:nvSpPr>
-          <p:cNvPr id="8" name="직사각형 7">
+          <p:cNvPr id="6" name="내용 개체 틀 1">
             <a:extLst>
               <a:ext uri="{FF2B5EF4-FFF2-40B4-BE49-F238E27FC236}">
-                <a16:creationId xmlns:a16="http://schemas.microsoft.com/office/drawing/2014/main" id="{2911DB3E-6E28-CC5E-BCB0-85C878642AC5}"/>
+                <a16:creationId xmlns:a16="http://schemas.microsoft.com/office/drawing/2014/main" id="{70C2BA37-BE91-39C4-AC08-0E8A1052E2F7}"/>
               </a:ext>
             </a:extLst>
           </p:cNvPr>
-          <p:cNvSpPr/>
+          <p:cNvSpPr txBox="1">
+            <a:spLocks/>
+          </p:cNvSpPr>
           <p:nvPr/>
         </p:nvSpPr>
         <p:spPr>
           <a:xfrm>
-            <a:off x="838200" y="1683297"/>
-            <a:ext cx="4237057" cy="369332"/>
+            <a:off x="838200" y="1825625"/>
+            <a:ext cx="10515600" cy="4351338"/>
           </a:xfrm>
           <a:prstGeom prst="rect">
             <a:avLst/>
           </a:prstGeom>
-          <a:solidFill>
-            <a:schemeClr val="tx1">
-              <a:lumMod val="95000"/>
-              <a:lumOff val="5000"/>
-            </a:schemeClr>
-          </a:solidFill>
         </p:spPr>
         <p:txBody>
-          <a:bodyPr wrap="none">
-            <a:spAutoFit/>
+          <a:bodyPr vert="horz" lIns="91440" tIns="45720" rIns="91440" bIns="45720" rtlCol="0">
+            <a:normAutofit/>
           </a:bodyPr>
-          <a:lstStyle/>
-          <a:p>
-            <a:r>
+          <a:lstStyle>
+            <a:lvl1pPr marL="228600" indent="-228600" algn="l" defTabSz="914400" rtl="0" eaLnBrk="1" latinLnBrk="1" hangingPunct="1">
+              <a:lnSpc>
+                <a:spcPct val="90000"/>
+              </a:lnSpc>
+              <a:spcBef>
+                <a:spcPts val="1000"/>
+              </a:spcBef>
+              <a:buFont typeface="Arial" panose="020B0604020202020204" pitchFamily="34" charset="0"/>
+              <a:buChar char="•"/>
+              <a:defRPr sz="2800" kern="1200">
+                <a:solidFill>
+                  <a:schemeClr val="tx1"/>
+                </a:solidFill>
+                <a:latin typeface="+mn-lt"/>
+                <a:ea typeface="+mn-ea"/>
+                <a:cs typeface="+mn-cs"/>
+              </a:defRPr>
+            </a:lvl1pPr>
+            <a:lvl2pPr marL="685800" indent="-228600" algn="l" defTabSz="914400" rtl="0" eaLnBrk="1" latinLnBrk="1" hangingPunct="1">
+              <a:lnSpc>
+                <a:spcPct val="90000"/>
+              </a:lnSpc>
+              <a:spcBef>
+                <a:spcPts val="500"/>
+              </a:spcBef>
+              <a:buFont typeface="Arial" panose="020B0604020202020204" pitchFamily="34" charset="0"/>
+              <a:buChar char="•"/>
+              <a:defRPr sz="2400" kern="1200">
+                <a:solidFill>
+                  <a:schemeClr val="tx1"/>
+                </a:solidFill>
+                <a:latin typeface="+mn-lt"/>
+                <a:ea typeface="+mn-ea"/>
+                <a:cs typeface="+mn-cs"/>
+              </a:defRPr>
+            </a:lvl2pPr>
+            <a:lvl3pPr marL="1143000" indent="-228600" algn="l" defTabSz="914400" rtl="0" eaLnBrk="1" latinLnBrk="1" hangingPunct="1">
+              <a:lnSpc>
+                <a:spcPct val="90000"/>
+              </a:lnSpc>
+              <a:spcBef>
+                <a:spcPts val="500"/>
+              </a:spcBef>
+              <a:buFont typeface="Arial" panose="020B0604020202020204" pitchFamily="34" charset="0"/>
+              <a:buChar char="•"/>
+              <a:defRPr sz="2000" kern="1200">
+                <a:solidFill>
+                  <a:schemeClr val="tx1"/>
+                </a:solidFill>
+                <a:latin typeface="+mn-lt"/>
+                <a:ea typeface="+mn-ea"/>
+                <a:cs typeface="+mn-cs"/>
+              </a:defRPr>
+            </a:lvl3pPr>
+            <a:lvl4pPr marL="1600200" indent="-228600" algn="l" defTabSz="914400" rtl="0" eaLnBrk="1" latinLnBrk="1" hangingPunct="1">
+              <a:lnSpc>
+                <a:spcPct val="90000"/>
+              </a:lnSpc>
+              <a:spcBef>
+                <a:spcPts val="500"/>
+              </a:spcBef>
+              <a:buFont typeface="Arial" panose="020B0604020202020204" pitchFamily="34" charset="0"/>
+              <a:buChar char="•"/>
+              <a:defRPr sz="1800" kern="1200">
+                <a:solidFill>
+                  <a:schemeClr val="tx1"/>
+                </a:solidFill>
+                <a:latin typeface="+mn-lt"/>
+                <a:ea typeface="+mn-ea"/>
+                <a:cs typeface="+mn-cs"/>
+              </a:defRPr>
+            </a:lvl4pPr>
+            <a:lvl5pPr marL="2057400" indent="-228600" algn="l" defTabSz="914400" rtl="0" eaLnBrk="1" latinLnBrk="1" hangingPunct="1">
+              <a:lnSpc>
+                <a:spcPct val="90000"/>
+              </a:lnSpc>
+              <a:spcBef>
+                <a:spcPts val="500"/>
+              </a:spcBef>
+              <a:buFont typeface="Arial" panose="020B0604020202020204" pitchFamily="34" charset="0"/>
+              <a:buChar char="•"/>
+              <a:defRPr sz="1800" kern="1200">
+                <a:solidFill>
+                  <a:schemeClr val="tx1"/>
+                </a:solidFill>
+                <a:latin typeface="+mn-lt"/>
+                <a:ea typeface="+mn-ea"/>
+                <a:cs typeface="+mn-cs"/>
+              </a:defRPr>
+            </a:lvl5pPr>
+            <a:lvl6pPr marL="2514600" indent="-228600" algn="l" defTabSz="914400" rtl="0" eaLnBrk="1" latinLnBrk="1" hangingPunct="1">
+              <a:lnSpc>
+                <a:spcPct val="90000"/>
+              </a:lnSpc>
+              <a:spcBef>
+                <a:spcPts val="500"/>
+              </a:spcBef>
+              <a:buFont typeface="Arial" panose="020B0604020202020204" pitchFamily="34" charset="0"/>
+              <a:buChar char="•"/>
+              <a:defRPr sz="1800" kern="1200">
+                <a:solidFill>
+                  <a:schemeClr val="tx1"/>
+                </a:solidFill>
+                <a:latin typeface="+mn-lt"/>
+                <a:ea typeface="+mn-ea"/>
+                <a:cs typeface="+mn-cs"/>
+              </a:defRPr>
+            </a:lvl6pPr>
+            <a:lvl7pPr marL="2971800" indent="-228600" algn="l" defTabSz="914400" rtl="0" eaLnBrk="1" latinLnBrk="1" hangingPunct="1">
+              <a:lnSpc>
+                <a:spcPct val="90000"/>
+              </a:lnSpc>
+              <a:spcBef>
+                <a:spcPts val="500"/>
+              </a:spcBef>
+              <a:buFont typeface="Arial" panose="020B0604020202020204" pitchFamily="34" charset="0"/>
+              <a:buChar char="•"/>
+              <a:defRPr sz="1800" kern="1200">
+                <a:solidFill>
+                  <a:schemeClr val="tx1"/>
+                </a:solidFill>
+                <a:latin typeface="+mn-lt"/>
+                <a:ea typeface="+mn-ea"/>
+                <a:cs typeface="+mn-cs"/>
+              </a:defRPr>
+            </a:lvl7pPr>
+            <a:lvl8pPr marL="3429000" indent="-228600" algn="l" defTabSz="914400" rtl="0" eaLnBrk="1" latinLnBrk="1" hangingPunct="1">
+              <a:lnSpc>
+                <a:spcPct val="90000"/>
+              </a:lnSpc>
+              <a:spcBef>
+                <a:spcPts val="500"/>
+              </a:spcBef>
+              <a:buFont typeface="Arial" panose="020B0604020202020204" pitchFamily="34" charset="0"/>
+              <a:buChar char="•"/>
+              <a:defRPr sz="1800" kern="1200">
+                <a:solidFill>
+                  <a:schemeClr val="tx1"/>
+                </a:solidFill>
+                <a:latin typeface="+mn-lt"/>
+                <a:ea typeface="+mn-ea"/>
+                <a:cs typeface="+mn-cs"/>
+              </a:defRPr>
+            </a:lvl8pPr>
+            <a:lvl9pPr marL="3886200" indent="-228600" algn="l" defTabSz="914400" rtl="0" eaLnBrk="1" latinLnBrk="1" hangingPunct="1">
+              <a:lnSpc>
+                <a:spcPct val="90000"/>
+              </a:lnSpc>
+              <a:spcBef>
+                <a:spcPts val="500"/>
+              </a:spcBef>
+              <a:buFont typeface="Arial" panose="020B0604020202020204" pitchFamily="34" charset="0"/>
+              <a:buChar char="•"/>
+              <a:defRPr sz="1800" kern="1200">
+                <a:solidFill>
+                  <a:schemeClr val="tx1"/>
+                </a:solidFill>
+                <a:latin typeface="+mn-lt"/>
+                <a:ea typeface="+mn-ea"/>
+                <a:cs typeface="+mn-cs"/>
+              </a:defRPr>
+            </a:lvl9pPr>
+          </a:lstStyle>
+          <a:p>
+            <a:pPr marL="457200" lvl="1" indent="0">
+              <a:buFont typeface="Arial" panose="020B0604020202020204" pitchFamily="34" charset="0"/>
+              <a:buNone/>
+            </a:pPr>
+            <a:endParaRPr lang="en-US" altLang="ko-KR" dirty="0">
+              <a:solidFill>
+                <a:srgbClr val="212529"/>
+              </a:solidFill>
+              <a:latin typeface="+mn-ea"/>
+            </a:endParaRPr>
+          </a:p>
+          <a:p>
+            <a:pPr marL="457200" lvl="1" indent="0">
+              <a:buFont typeface="Arial" panose="020B0604020202020204" pitchFamily="34" charset="0"/>
+              <a:buNone/>
+            </a:pPr>
+            <a:endParaRPr lang="en-US" altLang="ko-KR" dirty="0">
+              <a:solidFill>
+                <a:srgbClr val="212529"/>
+              </a:solidFill>
+              <a:latin typeface="+mn-ea"/>
+            </a:endParaRPr>
+          </a:p>
+          <a:p>
+            <a:r>
+              <a:rPr lang="en-US" altLang="ko-KR" b="1" dirty="0">
+                <a:solidFill>
+                  <a:srgbClr val="212529"/>
+                </a:solidFill>
+                <a:latin typeface="+mn-ea"/>
+              </a:rPr>
+              <a:t>[</a:t>
+            </a:r>
+            <a:r>
+              <a:rPr lang="ko-KR" altLang="en-US" b="1" dirty="0" err="1">
+                <a:solidFill>
+                  <a:srgbClr val="212529"/>
+                </a:solidFill>
+                <a:latin typeface="+mn-ea"/>
+              </a:rPr>
+              <a:t>코딩온</a:t>
+            </a:r>
+            <a:r>
+              <a:rPr lang="en-US" altLang="ko-KR" b="1" dirty="0">
+                <a:solidFill>
+                  <a:srgbClr val="212529"/>
+                </a:solidFill>
+                <a:latin typeface="+mn-ea"/>
+              </a:rPr>
+              <a:t>] HTML, CSS, JS </a:t>
+            </a:r>
+            <a:r>
+              <a:rPr lang="ko-KR" altLang="en-US" b="1" dirty="0">
+                <a:solidFill>
+                  <a:srgbClr val="212529"/>
+                </a:solidFill>
+                <a:latin typeface="+mn-ea"/>
+              </a:rPr>
+              <a:t>실습</a:t>
+            </a:r>
+            <a:r>
+              <a:rPr lang="en-US" altLang="ko-KR" b="1" dirty="0">
+                <a:solidFill>
+                  <a:srgbClr val="212529"/>
+                </a:solidFill>
+                <a:latin typeface="+mn-ea"/>
+              </a:rPr>
+              <a:t> </a:t>
+            </a:r>
+            <a:r>
+              <a:rPr lang="ko-KR" altLang="en-US" dirty="0">
+                <a:solidFill>
+                  <a:srgbClr val="212529"/>
+                </a:solidFill>
+                <a:latin typeface="+mn-ea"/>
+              </a:rPr>
+              <a:t>강의 클릭</a:t>
+            </a:r>
+            <a:br>
               <a:rPr lang="en-US" altLang="ko-KR" dirty="0">
                 <a:solidFill>
-                  <a:srgbClr val="569CD6"/>
-                </a:solidFill>
-                <a:latin typeface="Consolas" panose="020B0609020204030204" pitchFamily="49" charset="0"/>
-              </a:rPr>
-              <a:t>let</a:t>
-            </a:r>
-            <a:r>
-              <a:rPr lang="en-US" altLang="ko-KR" dirty="0">
-                <a:solidFill>
-                  <a:srgbClr val="D4D4D4"/>
-                </a:solidFill>
-                <a:latin typeface="Consolas" panose="020B0609020204030204" pitchFamily="49" charset="0"/>
+                  <a:srgbClr val="212529"/>
+                </a:solidFill>
+                <a:latin typeface="+mn-ea"/>
+              </a:rPr>
+            </a:br>
+            <a:endParaRPr lang="en-US" altLang="ko-KR" dirty="0">
+              <a:solidFill>
+                <a:srgbClr val="212529"/>
+              </a:solidFill>
+              <a:latin typeface="+mn-ea"/>
+            </a:endParaRPr>
+          </a:p>
+          <a:p>
+            <a:pPr lvl="1"/>
+            <a:r>
+              <a:rPr lang="ko-KR" altLang="en-US" sz="2800" b="1" dirty="0">
+                <a:solidFill>
+                  <a:srgbClr val="212529"/>
+                </a:solidFill>
+                <a:latin typeface="+mn-ea"/>
+              </a:rPr>
+              <a:t>➡ </a:t>
+            </a:r>
+            <a:r>
+              <a:rPr lang="en-US" altLang="ko-KR" sz="2800" b="1" dirty="0">
+                <a:solidFill>
+                  <a:srgbClr val="212529"/>
+                </a:solidFill>
+                <a:latin typeface="+mn-ea"/>
+              </a:rPr>
+              <a:t>[</a:t>
+            </a:r>
+            <a:r>
+              <a:rPr lang="ko-KR" altLang="en-US" sz="2800" b="1" dirty="0">
+                <a:solidFill>
+                  <a:srgbClr val="212529"/>
+                </a:solidFill>
+                <a:latin typeface="+mn-ea"/>
+              </a:rPr>
+              <a:t>조건문 실습</a:t>
+            </a:r>
+            <a:r>
+              <a:rPr lang="en-US" altLang="ko-KR" sz="2800" b="1" dirty="0">
+                <a:solidFill>
+                  <a:srgbClr val="212529"/>
+                </a:solidFill>
+                <a:latin typeface="+mn-ea"/>
+              </a:rPr>
+              <a:t>]</a:t>
+            </a:r>
+            <a:r>
+              <a:rPr lang="en-US" altLang="ko-KR" sz="2800" dirty="0">
+                <a:solidFill>
+                  <a:srgbClr val="212529"/>
+                </a:solidFill>
+                <a:latin typeface="+mn-ea"/>
               </a:rPr>
               <a:t> </a:t>
             </a:r>
             <a:r>
-              <a:rPr lang="en-US" altLang="ko-KR" dirty="0">
-                <a:solidFill>
-                  <a:srgbClr val="9CDCFE"/>
-                </a:solidFill>
-                <a:latin typeface="Consolas" panose="020B0609020204030204" pitchFamily="49" charset="0"/>
-              </a:rPr>
-              <a:t>now</a:t>
-            </a:r>
-            <a:r>
-              <a:rPr lang="en-US" altLang="ko-KR" dirty="0">
-                <a:solidFill>
-                  <a:srgbClr val="D4D4D4"/>
-                </a:solidFill>
-                <a:latin typeface="Consolas" panose="020B0609020204030204" pitchFamily="49" charset="0"/>
-              </a:rPr>
-              <a:t> = </a:t>
-            </a:r>
-            <a:r>
-              <a:rPr lang="en-US" altLang="ko-KR" dirty="0">
-                <a:solidFill>
-                  <a:srgbClr val="569CD6"/>
-                </a:solidFill>
-                <a:latin typeface="Consolas" panose="020B0609020204030204" pitchFamily="49" charset="0"/>
-              </a:rPr>
-              <a:t>new</a:t>
-            </a:r>
-            <a:r>
-              <a:rPr lang="en-US" altLang="ko-KR" dirty="0">
-                <a:solidFill>
-                  <a:srgbClr val="D4D4D4"/>
-                </a:solidFill>
-                <a:latin typeface="Consolas" panose="020B0609020204030204" pitchFamily="49" charset="0"/>
+              <a:rPr lang="ko-KR" altLang="en-US" sz="2800" dirty="0">
+                <a:solidFill>
+                  <a:srgbClr val="212529"/>
+                </a:solidFill>
+                <a:latin typeface="+mn-ea"/>
+              </a:rPr>
+              <a:t>커리큘럼 클릭</a:t>
+            </a:r>
+            <a:endParaRPr lang="en-US" altLang="ko-KR" sz="2800" dirty="0">
+              <a:solidFill>
+                <a:srgbClr val="212529"/>
+              </a:solidFill>
+              <a:latin typeface="+mn-ea"/>
+            </a:endParaRPr>
+          </a:p>
+          <a:p>
+            <a:pPr lvl="1"/>
+            <a:r>
+              <a:rPr lang="ko-KR" altLang="en-US" sz="2800" b="1" dirty="0">
+                <a:solidFill>
+                  <a:srgbClr val="212529"/>
+                </a:solidFill>
+                <a:latin typeface="+mn-ea"/>
+              </a:rPr>
+              <a:t>➡ </a:t>
+            </a:r>
+            <a:r>
+              <a:rPr lang="en-US" altLang="ko-KR" sz="2800" b="1" dirty="0">
+                <a:solidFill>
+                  <a:schemeClr val="accent1"/>
+                </a:solidFill>
+                <a:latin typeface="+mn-ea"/>
+              </a:rPr>
+              <a:t>[</a:t>
+            </a:r>
+            <a:r>
+              <a:rPr lang="ko-KR" altLang="en-US" sz="2800" b="1" dirty="0">
+                <a:solidFill>
+                  <a:schemeClr val="accent1"/>
+                </a:solidFill>
+                <a:latin typeface="+mn-ea"/>
+              </a:rPr>
+              <a:t>실습문제</a:t>
+            </a:r>
+            <a:r>
+              <a:rPr lang="en-US" altLang="ko-KR" sz="2800" b="1" dirty="0">
+                <a:solidFill>
+                  <a:schemeClr val="accent1"/>
+                </a:solidFill>
+                <a:latin typeface="+mn-ea"/>
+              </a:rPr>
+              <a:t>2]</a:t>
+            </a:r>
+            <a:r>
+              <a:rPr lang="en-US" altLang="ko-KR" sz="2800" dirty="0">
+                <a:solidFill>
+                  <a:schemeClr val="accent1"/>
+                </a:solidFill>
+                <a:latin typeface="+mn-ea"/>
               </a:rPr>
               <a:t> </a:t>
             </a:r>
             <a:r>
-              <a:rPr lang="en-US" altLang="ko-KR" dirty="0">
-                <a:solidFill>
-                  <a:srgbClr val="4EC9B0"/>
-                </a:solidFill>
-                <a:latin typeface="Consolas" panose="020B0609020204030204" pitchFamily="49" charset="0"/>
-              </a:rPr>
-              <a:t>Date</a:t>
-            </a:r>
-            <a:r>
-              <a:rPr lang="en-US" altLang="ko-KR" dirty="0">
-                <a:solidFill>
-                  <a:srgbClr val="D4D4D4"/>
-                </a:solidFill>
-                <a:latin typeface="Consolas" panose="020B0609020204030204" pitchFamily="49" charset="0"/>
-              </a:rPr>
-              <a:t>().</a:t>
-            </a:r>
-            <a:r>
-              <a:rPr lang="en-US" altLang="ko-KR" dirty="0" err="1">
-                <a:solidFill>
-                  <a:srgbClr val="DCDCAA"/>
-                </a:solidFill>
-                <a:latin typeface="Consolas" panose="020B0609020204030204" pitchFamily="49" charset="0"/>
-              </a:rPr>
-              <a:t>getHours</a:t>
-            </a:r>
-            <a:r>
-              <a:rPr lang="en-US" altLang="ko-KR" dirty="0">
-                <a:solidFill>
-                  <a:srgbClr val="D4D4D4"/>
-                </a:solidFill>
-                <a:latin typeface="Consolas" panose="020B0609020204030204" pitchFamily="49" charset="0"/>
-              </a:rPr>
-              <a:t>();</a:t>
-            </a:r>
-            <a:endParaRPr lang="en-US" altLang="ko-KR" b="0" dirty="0">
-              <a:solidFill>
-                <a:srgbClr val="D4D4D4"/>
-              </a:solidFill>
-              <a:effectLst/>
-              <a:latin typeface="Consolas" panose="020B0609020204030204" pitchFamily="49" charset="0"/>
-            </a:endParaRPr>
+              <a:rPr lang="ko-KR" altLang="en-US" sz="2800" dirty="0">
+                <a:solidFill>
+                  <a:srgbClr val="212529"/>
+                </a:solidFill>
+                <a:latin typeface="+mn-ea"/>
+              </a:rPr>
+              <a:t> 진행</a:t>
+            </a:r>
           </a:p>
         </p:txBody>
       </p:sp>
     </p:spTree>
     <p:extLst>
       <p:ext uri="{BB962C8B-B14F-4D97-AF65-F5344CB8AC3E}">
-        <p14:creationId xmlns:p14="http://schemas.microsoft.com/office/powerpoint/2010/main" val="1258125985"/>
+        <p14:creationId xmlns:p14="http://schemas.microsoft.com/office/powerpoint/2010/main" val="4057935393"/>
       </p:ext>
     </p:extLst>
   </p:cSld>
@@ -19152,10 +20010,10 @@
       </p:grpSpPr>
       <p:sp>
         <p:nvSpPr>
-          <p:cNvPr id="2" name="내용 개체 틀 1">
+          <p:cNvPr id="13" name="내용 개체 틀 2">
             <a:extLst>
               <a:ext uri="{FF2B5EF4-FFF2-40B4-BE49-F238E27FC236}">
-                <a16:creationId xmlns:a16="http://schemas.microsoft.com/office/drawing/2014/main" id="{9DA6579E-77D9-FEBC-ECC8-826C17452B7E}"/>
+                <a16:creationId xmlns:a16="http://schemas.microsoft.com/office/drawing/2014/main" id="{847FD532-7F61-A001-537F-B970BD821AF3}"/>
               </a:ext>
             </a:extLst>
           </p:cNvPr>
@@ -19168,48 +20026,35 @@
         </p:nvSpPr>
         <p:spPr>
           <a:xfrm>
-            <a:off x="838200" y="1371600"/>
-            <a:ext cx="10515600" cy="4805363"/>
+            <a:off x="510988" y="1328391"/>
+            <a:ext cx="11260802" cy="5328442"/>
           </a:xfrm>
         </p:spPr>
         <p:txBody>
-          <a:bodyPr/>
+          <a:bodyPr>
+            <a:normAutofit/>
+          </a:bodyPr>
           <a:lstStyle/>
           <a:p>
-            <a:r>
-              <a:rPr lang="ko-KR" altLang="en-US" dirty="0"/>
-              <a:t>콘솔 창에 다음과 같이 출력할 수 있도록 만들어보기 </a:t>
-            </a:r>
-            <a:r>
-              <a:rPr lang="en-US" altLang="ko-KR" dirty="0"/>
-              <a:t>(2</a:t>
-            </a:r>
-            <a:r>
-              <a:rPr lang="ko-KR" altLang="en-US" dirty="0"/>
-              <a:t>단 </a:t>
-            </a:r>
-            <a:r>
-              <a:rPr lang="en-US" altLang="ko-KR" dirty="0"/>
-              <a:t>~ 9</a:t>
-            </a:r>
-            <a:r>
-              <a:rPr lang="ko-KR" altLang="en-US" dirty="0"/>
-              <a:t>단</a:t>
-            </a:r>
-            <a:r>
-              <a:rPr lang="en-US" altLang="ko-KR" dirty="0"/>
-              <a:t>)</a:t>
-            </a:r>
-            <a:endParaRPr lang="ko-KR" altLang="en-US" dirty="0"/>
-          </a:p>
-        </p:txBody>
-      </p:sp>
-      <p:sp>
-        <p:nvSpPr>
-          <p:cNvPr id="3" name="날짜 개체 틀 2">
+            <a:endParaRPr lang="en-US" altLang="ko-KR" dirty="0"/>
+          </a:p>
+          <a:p>
+            <a:pPr marL="0" indent="0">
+              <a:buNone/>
+            </a:pPr>
+            <a:endParaRPr lang="en-US" altLang="ko-KR" dirty="0"/>
+          </a:p>
+          <a:p>
+            <a:endParaRPr lang="en-US" altLang="ko-KR" dirty="0"/>
+          </a:p>
+        </p:txBody>
+      </p:sp>
+      <p:sp>
+        <p:nvSpPr>
+          <p:cNvPr id="4" name="날짜 개체 틀 3">
             <a:extLst>
               <a:ext uri="{FF2B5EF4-FFF2-40B4-BE49-F238E27FC236}">
-                <a16:creationId xmlns:a16="http://schemas.microsoft.com/office/drawing/2014/main" id="{37C156C7-B7D5-0400-4B32-B1245EA9098B}"/>
+                <a16:creationId xmlns:a16="http://schemas.microsoft.com/office/drawing/2014/main" id="{A695DDE5-0A39-A366-4CFE-A283911999CD}"/>
               </a:ext>
             </a:extLst>
           </p:cNvPr>
@@ -19225,9 +20070,9 @@
           <a:bodyPr/>
           <a:lstStyle/>
           <a:p>
-            <a:fld id="{3C9CE3CE-253F-4F9D-BA15-C226C8D8501E}" type="datetime6">
+            <a:fld id="{0F78D9C4-20C1-4B15-A116-16DC77AD9A1E}" type="datetime1">
               <a:rPr lang="ko-KR" altLang="en-US" smtClean="0"/>
-              <a:t>2024년 5월</a:t>
+              <a:t>2024-05-29</a:t>
             </a:fld>
             <a:endParaRPr lang="ko-KR" altLang="en-US"/>
           </a:p>
@@ -19235,10 +20080,10 @@
       </p:sp>
       <p:sp>
         <p:nvSpPr>
-          <p:cNvPr id="4" name="슬라이드 번호 개체 틀 3">
+          <p:cNvPr id="5" name="슬라이드 번호 개체 틀 4">
             <a:extLst>
               <a:ext uri="{FF2B5EF4-FFF2-40B4-BE49-F238E27FC236}">
-                <a16:creationId xmlns:a16="http://schemas.microsoft.com/office/drawing/2014/main" id="{14C52CC2-EF92-DE03-579E-531952D7FEC7}"/>
+                <a16:creationId xmlns:a16="http://schemas.microsoft.com/office/drawing/2014/main" id="{5E040F43-60A7-C50D-1F5B-F984054F2D7C}"/>
               </a:ext>
             </a:extLst>
           </p:cNvPr>
@@ -19264,10 +20109,10 @@
       </p:sp>
       <p:sp>
         <p:nvSpPr>
-          <p:cNvPr id="5" name="제목 4">
+          <p:cNvPr id="2" name="제목 1">
             <a:extLst>
               <a:ext uri="{FF2B5EF4-FFF2-40B4-BE49-F238E27FC236}">
-                <a16:creationId xmlns:a16="http://schemas.microsoft.com/office/drawing/2014/main" id="{598ED348-3DCC-6572-AE99-BE64F8B400BC}"/>
+                <a16:creationId xmlns:a16="http://schemas.microsoft.com/office/drawing/2014/main" id="{5FAC57F5-99D7-9C46-B6C1-D16224151FE9}"/>
               </a:ext>
             </a:extLst>
           </p:cNvPr>
@@ -19286,7 +20131,7 @@
             <a:r>
               <a:rPr lang="ko-KR" altLang="en-US" dirty="0">
                 <a:solidFill>
-                  <a:schemeClr val="accent1"/>
+                  <a:srgbClr val="6EC173"/>
                 </a:solidFill>
               </a:rPr>
               <a:t>실습</a:t>
@@ -19294,10 +20139,10 @@
             <a:r>
               <a:rPr lang="en-US" altLang="ko-KR" dirty="0">
                 <a:solidFill>
-                  <a:schemeClr val="accent1"/>
-                </a:solidFill>
-              </a:rPr>
-              <a:t>. </a:t>
+                  <a:srgbClr val="6EC173"/>
+                </a:solidFill>
+              </a:rPr>
+              <a:t>.  </a:t>
             </a:r>
             <a:r>
               <a:rPr lang="ko-KR" altLang="en-US" dirty="0"/>
@@ -19306,100 +20151,444 @@
           </a:p>
         </p:txBody>
       </p:sp>
-      <p:pic>
-        <p:nvPicPr>
-          <p:cNvPr id="6" name="그림 5">
+      <p:sp>
+        <p:nvSpPr>
+          <p:cNvPr id="6" name="내용 개체 틀 1">
             <a:extLst>
               <a:ext uri="{FF2B5EF4-FFF2-40B4-BE49-F238E27FC236}">
-                <a16:creationId xmlns:a16="http://schemas.microsoft.com/office/drawing/2014/main" id="{4DD8D93C-FD34-D6DD-1D59-55905F749C3A}"/>
+                <a16:creationId xmlns:a16="http://schemas.microsoft.com/office/drawing/2014/main" id="{70C2BA37-BE91-39C4-AC08-0E8A1052E2F7}"/>
               </a:ext>
             </a:extLst>
           </p:cNvPr>
-          <p:cNvPicPr>
-            <a:picLocks noChangeAspect="1"/>
-          </p:cNvPicPr>
+          <p:cNvSpPr txBox="1">
+            <a:spLocks/>
+          </p:cNvSpPr>
           <p:nvPr/>
-        </p:nvPicPr>
-        <p:blipFill>
-          <a:blip r:embed="rId3"/>
-          <a:stretch>
-            <a:fillRect/>
-          </a:stretch>
-        </p:blipFill>
+        </p:nvSpPr>
         <p:spPr>
           <a:xfrm>
-            <a:off x="1031463" y="1950677"/>
-            <a:ext cx="2568374" cy="3985856"/>
+            <a:off x="838200" y="1825625"/>
+            <a:ext cx="10515600" cy="4351338"/>
           </a:xfrm>
           <a:prstGeom prst="rect">
             <a:avLst/>
           </a:prstGeom>
         </p:spPr>
-      </p:pic>
-      <p:pic>
-        <p:nvPicPr>
-          <p:cNvPr id="7" name="그림 6">
-            <a:extLst>
-              <a:ext uri="{FF2B5EF4-FFF2-40B4-BE49-F238E27FC236}">
-                <a16:creationId xmlns:a16="http://schemas.microsoft.com/office/drawing/2014/main" id="{14298167-89AF-E96F-795D-DEE13B4C5DC4}"/>
-              </a:ext>
-            </a:extLst>
-          </p:cNvPr>
-          <p:cNvPicPr>
-            <a:picLocks noChangeAspect="1"/>
-          </p:cNvPicPr>
-          <p:nvPr/>
-        </p:nvPicPr>
-        <p:blipFill>
-          <a:blip r:embed="rId4"/>
-          <a:stretch>
-            <a:fillRect/>
-          </a:stretch>
-        </p:blipFill>
-        <p:spPr>
-          <a:xfrm>
-            <a:off x="3793100" y="1950677"/>
-            <a:ext cx="2608811" cy="4017569"/>
-          </a:xfrm>
-          <a:prstGeom prst="rect">
-            <a:avLst/>
-          </a:prstGeom>
-        </p:spPr>
-      </p:pic>
-      <p:pic>
-        <p:nvPicPr>
-          <p:cNvPr id="8" name="그림 7">
-            <a:extLst>
-              <a:ext uri="{FF2B5EF4-FFF2-40B4-BE49-F238E27FC236}">
-                <a16:creationId xmlns:a16="http://schemas.microsoft.com/office/drawing/2014/main" id="{7C9DD19D-AD96-A358-9026-90558E3CAE30}"/>
-              </a:ext>
-            </a:extLst>
-          </p:cNvPr>
-          <p:cNvPicPr>
-            <a:picLocks noChangeAspect="1"/>
-          </p:cNvPicPr>
-          <p:nvPr/>
-        </p:nvPicPr>
-        <p:blipFill>
-          <a:blip r:embed="rId5"/>
-          <a:stretch>
-            <a:fillRect/>
-          </a:stretch>
-        </p:blipFill>
-        <p:spPr>
-          <a:xfrm>
-            <a:off x="6595175" y="1950678"/>
-            <a:ext cx="2727952" cy="2832338"/>
-          </a:xfrm>
-          <a:prstGeom prst="rect">
-            <a:avLst/>
-          </a:prstGeom>
-        </p:spPr>
-      </p:pic>
+        <p:txBody>
+          <a:bodyPr vert="horz" lIns="91440" tIns="45720" rIns="91440" bIns="45720" rtlCol="0">
+            <a:normAutofit/>
+          </a:bodyPr>
+          <a:lstStyle>
+            <a:lvl1pPr marL="228600" indent="-228600" algn="l" defTabSz="914400" rtl="0" eaLnBrk="1" latinLnBrk="1" hangingPunct="1">
+              <a:lnSpc>
+                <a:spcPct val="90000"/>
+              </a:lnSpc>
+              <a:spcBef>
+                <a:spcPts val="1000"/>
+              </a:spcBef>
+              <a:buFont typeface="Arial" panose="020B0604020202020204" pitchFamily="34" charset="0"/>
+              <a:buChar char="•"/>
+              <a:defRPr sz="2800" kern="1200">
+                <a:solidFill>
+                  <a:schemeClr val="tx1"/>
+                </a:solidFill>
+                <a:latin typeface="+mn-lt"/>
+                <a:ea typeface="+mn-ea"/>
+                <a:cs typeface="+mn-cs"/>
+              </a:defRPr>
+            </a:lvl1pPr>
+            <a:lvl2pPr marL="685800" indent="-228600" algn="l" defTabSz="914400" rtl="0" eaLnBrk="1" latinLnBrk="1" hangingPunct="1">
+              <a:lnSpc>
+                <a:spcPct val="90000"/>
+              </a:lnSpc>
+              <a:spcBef>
+                <a:spcPts val="500"/>
+              </a:spcBef>
+              <a:buFont typeface="Arial" panose="020B0604020202020204" pitchFamily="34" charset="0"/>
+              <a:buChar char="•"/>
+              <a:defRPr sz="2400" kern="1200">
+                <a:solidFill>
+                  <a:schemeClr val="tx1"/>
+                </a:solidFill>
+                <a:latin typeface="+mn-lt"/>
+                <a:ea typeface="+mn-ea"/>
+                <a:cs typeface="+mn-cs"/>
+              </a:defRPr>
+            </a:lvl2pPr>
+            <a:lvl3pPr marL="1143000" indent="-228600" algn="l" defTabSz="914400" rtl="0" eaLnBrk="1" latinLnBrk="1" hangingPunct="1">
+              <a:lnSpc>
+                <a:spcPct val="90000"/>
+              </a:lnSpc>
+              <a:spcBef>
+                <a:spcPts val="500"/>
+              </a:spcBef>
+              <a:buFont typeface="Arial" panose="020B0604020202020204" pitchFamily="34" charset="0"/>
+              <a:buChar char="•"/>
+              <a:defRPr sz="2000" kern="1200">
+                <a:solidFill>
+                  <a:schemeClr val="tx1"/>
+                </a:solidFill>
+                <a:latin typeface="+mn-lt"/>
+                <a:ea typeface="+mn-ea"/>
+                <a:cs typeface="+mn-cs"/>
+              </a:defRPr>
+            </a:lvl3pPr>
+            <a:lvl4pPr marL="1600200" indent="-228600" algn="l" defTabSz="914400" rtl="0" eaLnBrk="1" latinLnBrk="1" hangingPunct="1">
+              <a:lnSpc>
+                <a:spcPct val="90000"/>
+              </a:lnSpc>
+              <a:spcBef>
+                <a:spcPts val="500"/>
+              </a:spcBef>
+              <a:buFont typeface="Arial" panose="020B0604020202020204" pitchFamily="34" charset="0"/>
+              <a:buChar char="•"/>
+              <a:defRPr sz="1800" kern="1200">
+                <a:solidFill>
+                  <a:schemeClr val="tx1"/>
+                </a:solidFill>
+                <a:latin typeface="+mn-lt"/>
+                <a:ea typeface="+mn-ea"/>
+                <a:cs typeface="+mn-cs"/>
+              </a:defRPr>
+            </a:lvl4pPr>
+            <a:lvl5pPr marL="2057400" indent="-228600" algn="l" defTabSz="914400" rtl="0" eaLnBrk="1" latinLnBrk="1" hangingPunct="1">
+              <a:lnSpc>
+                <a:spcPct val="90000"/>
+              </a:lnSpc>
+              <a:spcBef>
+                <a:spcPts val="500"/>
+              </a:spcBef>
+              <a:buFont typeface="Arial" panose="020B0604020202020204" pitchFamily="34" charset="0"/>
+              <a:buChar char="•"/>
+              <a:defRPr sz="1800" kern="1200">
+                <a:solidFill>
+                  <a:schemeClr val="tx1"/>
+                </a:solidFill>
+                <a:latin typeface="+mn-lt"/>
+                <a:ea typeface="+mn-ea"/>
+                <a:cs typeface="+mn-cs"/>
+              </a:defRPr>
+            </a:lvl5pPr>
+            <a:lvl6pPr marL="2514600" indent="-228600" algn="l" defTabSz="914400" rtl="0" eaLnBrk="1" latinLnBrk="1" hangingPunct="1">
+              <a:lnSpc>
+                <a:spcPct val="90000"/>
+              </a:lnSpc>
+              <a:spcBef>
+                <a:spcPts val="500"/>
+              </a:spcBef>
+              <a:buFont typeface="Arial" panose="020B0604020202020204" pitchFamily="34" charset="0"/>
+              <a:buChar char="•"/>
+              <a:defRPr sz="1800" kern="1200">
+                <a:solidFill>
+                  <a:schemeClr val="tx1"/>
+                </a:solidFill>
+                <a:latin typeface="+mn-lt"/>
+                <a:ea typeface="+mn-ea"/>
+                <a:cs typeface="+mn-cs"/>
+              </a:defRPr>
+            </a:lvl6pPr>
+            <a:lvl7pPr marL="2971800" indent="-228600" algn="l" defTabSz="914400" rtl="0" eaLnBrk="1" latinLnBrk="1" hangingPunct="1">
+              <a:lnSpc>
+                <a:spcPct val="90000"/>
+              </a:lnSpc>
+              <a:spcBef>
+                <a:spcPts val="500"/>
+              </a:spcBef>
+              <a:buFont typeface="Arial" panose="020B0604020202020204" pitchFamily="34" charset="0"/>
+              <a:buChar char="•"/>
+              <a:defRPr sz="1800" kern="1200">
+                <a:solidFill>
+                  <a:schemeClr val="tx1"/>
+                </a:solidFill>
+                <a:latin typeface="+mn-lt"/>
+                <a:ea typeface="+mn-ea"/>
+                <a:cs typeface="+mn-cs"/>
+              </a:defRPr>
+            </a:lvl7pPr>
+            <a:lvl8pPr marL="3429000" indent="-228600" algn="l" defTabSz="914400" rtl="0" eaLnBrk="1" latinLnBrk="1" hangingPunct="1">
+              <a:lnSpc>
+                <a:spcPct val="90000"/>
+              </a:lnSpc>
+              <a:spcBef>
+                <a:spcPts val="500"/>
+              </a:spcBef>
+              <a:buFont typeface="Arial" panose="020B0604020202020204" pitchFamily="34" charset="0"/>
+              <a:buChar char="•"/>
+              <a:defRPr sz="1800" kern="1200">
+                <a:solidFill>
+                  <a:schemeClr val="tx1"/>
+                </a:solidFill>
+                <a:latin typeface="+mn-lt"/>
+                <a:ea typeface="+mn-ea"/>
+                <a:cs typeface="+mn-cs"/>
+              </a:defRPr>
+            </a:lvl8pPr>
+            <a:lvl9pPr marL="3886200" indent="-228600" algn="l" defTabSz="914400" rtl="0" eaLnBrk="1" latinLnBrk="1" hangingPunct="1">
+              <a:lnSpc>
+                <a:spcPct val="90000"/>
+              </a:lnSpc>
+              <a:spcBef>
+                <a:spcPts val="500"/>
+              </a:spcBef>
+              <a:buFont typeface="Arial" panose="020B0604020202020204" pitchFamily="34" charset="0"/>
+              <a:buChar char="•"/>
+              <a:defRPr sz="1800" kern="1200">
+                <a:solidFill>
+                  <a:schemeClr val="tx1"/>
+                </a:solidFill>
+                <a:latin typeface="+mn-lt"/>
+                <a:ea typeface="+mn-ea"/>
+                <a:cs typeface="+mn-cs"/>
+              </a:defRPr>
+            </a:lvl9pPr>
+          </a:lstStyle>
+          <a:p>
+            <a:pPr marL="457200" lvl="1" indent="0">
+              <a:buFont typeface="Arial" panose="020B0604020202020204" pitchFamily="34" charset="0"/>
+              <a:buNone/>
+            </a:pPr>
+            <a:endParaRPr lang="en-US" altLang="ko-KR" dirty="0">
+              <a:solidFill>
+                <a:srgbClr val="212529"/>
+              </a:solidFill>
+              <a:latin typeface="+mn-ea"/>
+            </a:endParaRPr>
+          </a:p>
+          <a:p>
+            <a:pPr marL="457200" lvl="1" indent="0">
+              <a:buFont typeface="Arial" panose="020B0604020202020204" pitchFamily="34" charset="0"/>
+              <a:buNone/>
+            </a:pPr>
+            <a:endParaRPr lang="en-US" altLang="ko-KR" dirty="0">
+              <a:solidFill>
+                <a:srgbClr val="212529"/>
+              </a:solidFill>
+              <a:latin typeface="+mn-ea"/>
+            </a:endParaRPr>
+          </a:p>
+          <a:p>
+            <a:r>
+              <a:rPr lang="en-US" altLang="ko-KR" b="1" dirty="0">
+                <a:solidFill>
+                  <a:srgbClr val="212529"/>
+                </a:solidFill>
+                <a:latin typeface="+mn-ea"/>
+              </a:rPr>
+              <a:t>[</a:t>
+            </a:r>
+            <a:r>
+              <a:rPr lang="ko-KR" altLang="en-US" b="1" dirty="0" err="1">
+                <a:solidFill>
+                  <a:srgbClr val="212529"/>
+                </a:solidFill>
+                <a:latin typeface="+mn-ea"/>
+              </a:rPr>
+              <a:t>코딩온</a:t>
+            </a:r>
+            <a:r>
+              <a:rPr lang="en-US" altLang="ko-KR" b="1" dirty="0">
+                <a:solidFill>
+                  <a:srgbClr val="212529"/>
+                </a:solidFill>
+                <a:latin typeface="+mn-ea"/>
+              </a:rPr>
+              <a:t>] HTML, CSS, JS </a:t>
+            </a:r>
+            <a:r>
+              <a:rPr lang="ko-KR" altLang="en-US" b="1" dirty="0">
+                <a:solidFill>
+                  <a:srgbClr val="212529"/>
+                </a:solidFill>
+                <a:latin typeface="+mn-ea"/>
+              </a:rPr>
+              <a:t>실습</a:t>
+            </a:r>
+            <a:r>
+              <a:rPr lang="en-US" altLang="ko-KR" b="1" dirty="0">
+                <a:solidFill>
+                  <a:srgbClr val="212529"/>
+                </a:solidFill>
+                <a:latin typeface="+mn-ea"/>
+              </a:rPr>
+              <a:t> </a:t>
+            </a:r>
+            <a:r>
+              <a:rPr lang="ko-KR" altLang="en-US" dirty="0">
+                <a:solidFill>
+                  <a:srgbClr val="212529"/>
+                </a:solidFill>
+                <a:latin typeface="+mn-ea"/>
+              </a:rPr>
+              <a:t>강의 클릭</a:t>
+            </a:r>
+            <a:br>
+              <a:rPr lang="en-US" altLang="ko-KR" dirty="0">
+                <a:solidFill>
+                  <a:srgbClr val="212529"/>
+                </a:solidFill>
+                <a:latin typeface="+mn-ea"/>
+              </a:rPr>
+            </a:br>
+            <a:endParaRPr lang="en-US" altLang="ko-KR" dirty="0">
+              <a:solidFill>
+                <a:srgbClr val="212529"/>
+              </a:solidFill>
+              <a:latin typeface="+mn-ea"/>
+            </a:endParaRPr>
+          </a:p>
+          <a:p>
+            <a:pPr lvl="1"/>
+            <a:r>
+              <a:rPr lang="ko-KR" altLang="en-US" sz="2800" b="1" dirty="0">
+                <a:solidFill>
+                  <a:srgbClr val="212529"/>
+                </a:solidFill>
+                <a:latin typeface="+mn-ea"/>
+              </a:rPr>
+              <a:t>➡ </a:t>
+            </a:r>
+            <a:r>
+              <a:rPr lang="en-US" altLang="ko-KR" sz="2800" b="1" dirty="0">
+                <a:solidFill>
+                  <a:srgbClr val="212529"/>
+                </a:solidFill>
+                <a:latin typeface="+mn-ea"/>
+              </a:rPr>
+              <a:t>[</a:t>
+            </a:r>
+            <a:r>
+              <a:rPr lang="ko-KR" altLang="en-US" sz="2800" b="1" dirty="0" err="1">
+                <a:solidFill>
+                  <a:srgbClr val="212529"/>
+                </a:solidFill>
+                <a:latin typeface="+mn-ea"/>
+              </a:rPr>
+              <a:t>반복문</a:t>
+            </a:r>
+            <a:r>
+              <a:rPr lang="ko-KR" altLang="en-US" sz="2800" b="1" dirty="0">
+                <a:solidFill>
+                  <a:srgbClr val="212529"/>
+                </a:solidFill>
+                <a:latin typeface="+mn-ea"/>
+              </a:rPr>
+              <a:t> 실습</a:t>
+            </a:r>
+            <a:r>
+              <a:rPr lang="en-US" altLang="ko-KR" sz="2800" b="1" dirty="0">
+                <a:solidFill>
+                  <a:srgbClr val="212529"/>
+                </a:solidFill>
+                <a:latin typeface="+mn-ea"/>
+              </a:rPr>
+              <a:t>]</a:t>
+            </a:r>
+            <a:r>
+              <a:rPr lang="en-US" altLang="ko-KR" sz="2800" dirty="0">
+                <a:solidFill>
+                  <a:srgbClr val="212529"/>
+                </a:solidFill>
+                <a:latin typeface="+mn-ea"/>
+              </a:rPr>
+              <a:t> </a:t>
+            </a:r>
+            <a:r>
+              <a:rPr lang="ko-KR" altLang="en-US" sz="2800" dirty="0">
+                <a:solidFill>
+                  <a:srgbClr val="212529"/>
+                </a:solidFill>
+                <a:latin typeface="+mn-ea"/>
+              </a:rPr>
+              <a:t>커리큘럼 클릭</a:t>
+            </a:r>
+            <a:endParaRPr lang="en-US" altLang="ko-KR" sz="2800" dirty="0">
+              <a:solidFill>
+                <a:srgbClr val="212529"/>
+              </a:solidFill>
+              <a:latin typeface="+mn-ea"/>
+            </a:endParaRPr>
+          </a:p>
+          <a:p>
+            <a:pPr lvl="1"/>
+            <a:r>
+              <a:rPr lang="ko-KR" altLang="en-US" sz="2800" b="1" dirty="0">
+                <a:solidFill>
+                  <a:srgbClr val="212529"/>
+                </a:solidFill>
+                <a:latin typeface="+mn-ea"/>
+              </a:rPr>
+              <a:t>➡ </a:t>
+            </a:r>
+            <a:r>
+              <a:rPr lang="en-US" altLang="ko-KR" sz="2800" b="1" dirty="0">
+                <a:solidFill>
+                  <a:schemeClr val="accent1"/>
+                </a:solidFill>
+                <a:latin typeface="+mn-ea"/>
+              </a:rPr>
+              <a:t>[</a:t>
+            </a:r>
+            <a:r>
+              <a:rPr lang="ko-KR" altLang="en-US" sz="2800" b="1" dirty="0">
+                <a:solidFill>
+                  <a:schemeClr val="accent1"/>
+                </a:solidFill>
+                <a:latin typeface="+mn-ea"/>
+              </a:rPr>
+              <a:t>실습문제</a:t>
+            </a:r>
+            <a:r>
+              <a:rPr lang="en-US" altLang="ko-KR" sz="2800" b="1" dirty="0">
+                <a:solidFill>
+                  <a:schemeClr val="accent1"/>
+                </a:solidFill>
+                <a:latin typeface="+mn-ea"/>
+              </a:rPr>
+              <a:t>2. </a:t>
+            </a:r>
+            <a:r>
+              <a:rPr lang="ko-KR" altLang="en-US" sz="2800" b="1" dirty="0">
+                <a:solidFill>
+                  <a:schemeClr val="accent1"/>
+                </a:solidFill>
+                <a:latin typeface="+mn-ea"/>
+              </a:rPr>
+              <a:t>구구단 출력하기</a:t>
+            </a:r>
+            <a:r>
+              <a:rPr lang="en-US" altLang="ko-KR" sz="2800" b="1" dirty="0">
+                <a:solidFill>
+                  <a:schemeClr val="accent1"/>
+                </a:solidFill>
+                <a:latin typeface="+mn-ea"/>
+              </a:rPr>
+              <a:t>]</a:t>
+            </a:r>
+            <a:r>
+              <a:rPr lang="en-US" altLang="ko-KR" sz="2800" dirty="0">
+                <a:solidFill>
+                  <a:schemeClr val="accent1"/>
+                </a:solidFill>
+                <a:latin typeface="+mn-ea"/>
+              </a:rPr>
+              <a:t> </a:t>
+            </a:r>
+            <a:r>
+              <a:rPr lang="ko-KR" altLang="en-US" sz="2800" dirty="0">
+                <a:solidFill>
+                  <a:srgbClr val="212529"/>
+                </a:solidFill>
+                <a:latin typeface="+mn-ea"/>
+              </a:rPr>
+              <a:t> 진행</a:t>
+            </a:r>
+          </a:p>
+        </p:txBody>
+      </p:sp>
     </p:spTree>
     <p:extLst>
       <p:ext uri="{BB962C8B-B14F-4D97-AF65-F5344CB8AC3E}">
-        <p14:creationId xmlns:p14="http://schemas.microsoft.com/office/powerpoint/2010/main" val="222148150"/>
+        <p14:creationId xmlns:p14="http://schemas.microsoft.com/office/powerpoint/2010/main" val="2545953697"/>
       </p:ext>
     </p:extLst>
   </p:cSld>
@@ -21065,10 +22254,10 @@
       </p:grpSpPr>
       <p:sp>
         <p:nvSpPr>
-          <p:cNvPr id="7" name="내용 개체 틀 6">
+          <p:cNvPr id="13" name="내용 개체 틀 2">
             <a:extLst>
               <a:ext uri="{FF2B5EF4-FFF2-40B4-BE49-F238E27FC236}">
-                <a16:creationId xmlns:a16="http://schemas.microsoft.com/office/drawing/2014/main" id="{40F26C72-9B21-C720-7E83-683D6328141A}"/>
+                <a16:creationId xmlns:a16="http://schemas.microsoft.com/office/drawing/2014/main" id="{847FD532-7F61-A001-537F-B970BD821AF3}"/>
               </a:ext>
             </a:extLst>
           </p:cNvPr>
@@ -21079,159 +22268,28 @@
             <p:ph idx="1"/>
           </p:nvPr>
         </p:nvSpPr>
-        <p:spPr/>
-        <p:txBody>
-          <a:bodyPr/>
+        <p:spPr>
+          <a:xfrm>
+            <a:off x="510988" y="1328391"/>
+            <a:ext cx="11260802" cy="5328442"/>
+          </a:xfrm>
+        </p:spPr>
+        <p:txBody>
+          <a:bodyPr>
+            <a:normAutofit/>
+          </a:bodyPr>
           <a:lstStyle/>
           <a:p>
-            <a:r>
-              <a:rPr lang="en-US" altLang="ko-KR" dirty="0">
-                <a:latin typeface="+mn-ea"/>
-              </a:rPr>
-              <a:t>0 ~ 100</a:t>
-            </a:r>
-            <a:r>
-              <a:rPr lang="ko-KR" altLang="en-US" dirty="0">
-                <a:latin typeface="+mn-ea"/>
-              </a:rPr>
-              <a:t>의 숫자 중에서 </a:t>
-            </a:r>
-            <a:r>
-              <a:rPr lang="en-US" altLang="ko-KR" dirty="0">
-                <a:latin typeface="+mn-ea"/>
-              </a:rPr>
-              <a:t>2 </a:t>
-            </a:r>
-            <a:r>
-              <a:rPr lang="ko-KR" altLang="en-US" dirty="0">
-                <a:latin typeface="+mn-ea"/>
-              </a:rPr>
-              <a:t>또는 </a:t>
-            </a:r>
-            <a:r>
-              <a:rPr lang="en-US" altLang="ko-KR" dirty="0">
-                <a:latin typeface="+mn-ea"/>
-              </a:rPr>
-              <a:t>5</a:t>
-            </a:r>
-            <a:r>
-              <a:rPr lang="ko-KR" altLang="en-US" dirty="0">
-                <a:latin typeface="+mn-ea"/>
-              </a:rPr>
-              <a:t>의 배수 총합 구하기</a:t>
-            </a:r>
-            <a:r>
-              <a:rPr lang="en-US" altLang="ko-KR" dirty="0">
-                <a:latin typeface="+mn-ea"/>
-              </a:rPr>
-              <a:t>!</a:t>
-            </a:r>
-          </a:p>
-          <a:p>
-            <a:endParaRPr lang="en-US" altLang="ko-KR" dirty="0">
-              <a:latin typeface="+mn-ea"/>
-            </a:endParaRPr>
-          </a:p>
-          <a:p>
-            <a:r>
-              <a:rPr lang="ko-KR" altLang="en-US" dirty="0">
-                <a:latin typeface="+mn-ea"/>
-              </a:rPr>
-              <a:t>힌트</a:t>
-            </a:r>
-            <a:endParaRPr lang="en-US" altLang="ko-KR" dirty="0">
-              <a:latin typeface="+mn-ea"/>
-            </a:endParaRPr>
-          </a:p>
-          <a:p>
-            <a:pPr lvl="1"/>
-            <a:r>
-              <a:rPr lang="ko-KR" altLang="en-US" dirty="0">
-                <a:latin typeface="+mn-ea"/>
-              </a:rPr>
-              <a:t>나머지 연산자 </a:t>
-            </a:r>
-            <a:r>
-              <a:rPr lang="en-US" altLang="ko-KR" dirty="0">
-                <a:latin typeface="+mn-ea"/>
-              </a:rPr>
-              <a:t>% </a:t>
-            </a:r>
-            <a:r>
-              <a:rPr lang="ko-KR" altLang="en-US" dirty="0">
-                <a:latin typeface="+mn-ea"/>
-              </a:rPr>
-              <a:t>를 사용</a:t>
-            </a:r>
-            <a:endParaRPr lang="en-US" altLang="ko-KR" dirty="0">
-              <a:latin typeface="+mn-ea"/>
-            </a:endParaRPr>
-          </a:p>
-          <a:p>
-            <a:pPr lvl="1"/>
-            <a:r>
-              <a:rPr lang="en-US" altLang="ko-KR" dirty="0">
-                <a:latin typeface="+mn-ea"/>
-              </a:rPr>
-              <a:t>5 % 3 </a:t>
-            </a:r>
-            <a:r>
-              <a:rPr lang="en-US" altLang="ko-KR" dirty="0">
-                <a:latin typeface="+mn-ea"/>
-                <a:sym typeface="Wingdings" panose="05000000000000000000" pitchFamily="2" charset="2"/>
-              </a:rPr>
-              <a:t> 2 (5</a:t>
-            </a:r>
-            <a:r>
-              <a:rPr lang="ko-KR" altLang="en-US" dirty="0">
-                <a:latin typeface="+mn-ea"/>
-                <a:sym typeface="Wingdings" panose="05000000000000000000" pitchFamily="2" charset="2"/>
-              </a:rPr>
-              <a:t>를 </a:t>
-            </a:r>
-            <a:r>
-              <a:rPr lang="en-US" altLang="ko-KR" dirty="0">
-                <a:latin typeface="+mn-ea"/>
-                <a:sym typeface="Wingdings" panose="05000000000000000000" pitchFamily="2" charset="2"/>
-              </a:rPr>
-              <a:t>3</a:t>
-            </a:r>
-            <a:r>
-              <a:rPr lang="ko-KR" altLang="en-US" dirty="0">
-                <a:latin typeface="+mn-ea"/>
-                <a:sym typeface="Wingdings" panose="05000000000000000000" pitchFamily="2" charset="2"/>
-              </a:rPr>
-              <a:t>으로 나눈 나머지인 </a:t>
-            </a:r>
-            <a:r>
-              <a:rPr lang="en-US" altLang="ko-KR" dirty="0">
-                <a:latin typeface="+mn-ea"/>
-                <a:sym typeface="Wingdings" panose="05000000000000000000" pitchFamily="2" charset="2"/>
-              </a:rPr>
-              <a:t>2</a:t>
-            </a:r>
-            <a:r>
-              <a:rPr lang="ko-KR" altLang="en-US" dirty="0">
-                <a:latin typeface="+mn-ea"/>
-                <a:sym typeface="Wingdings" panose="05000000000000000000" pitchFamily="2" charset="2"/>
-              </a:rPr>
-              <a:t>의 값을 반환</a:t>
-            </a:r>
-            <a:r>
-              <a:rPr lang="en-US" altLang="ko-KR" dirty="0">
-                <a:latin typeface="+mn-ea"/>
-                <a:sym typeface="Wingdings" panose="05000000000000000000" pitchFamily="2" charset="2"/>
-              </a:rPr>
-              <a:t>)</a:t>
-            </a:r>
-            <a:endParaRPr lang="en-US" altLang="ko-KR" dirty="0">
-              <a:latin typeface="+mn-ea"/>
-            </a:endParaRPr>
-          </a:p>
-          <a:p>
-            <a:endParaRPr lang="ko-KR" altLang="en-US" dirty="0">
-              <a:latin typeface="+mn-ea"/>
-            </a:endParaRPr>
+            <a:endParaRPr lang="en-US" altLang="ko-KR" dirty="0"/>
+          </a:p>
+          <a:p>
+            <a:pPr marL="0" indent="0">
+              <a:buNone/>
+            </a:pPr>
+            <a:endParaRPr lang="en-US" altLang="ko-KR" dirty="0"/>
+          </a:p>
+          <a:p>
+            <a:endParaRPr lang="en-US" altLang="ko-KR" dirty="0"/>
           </a:p>
         </p:txBody>
       </p:sp>
@@ -21258,7 +22316,7 @@
           <a:p>
             <a:fld id="{0F78D9C4-20C1-4B15-A116-16DC77AD9A1E}" type="datetime1">
               <a:rPr lang="ko-KR" altLang="en-US" smtClean="0"/>
-              <a:t>2024-05-27</a:t>
+              <a:t>2024-05-29</a:t>
             </a:fld>
             <a:endParaRPr lang="ko-KR" altLang="en-US"/>
           </a:p>
@@ -21317,22 +22375,456 @@
             <a:r>
               <a:rPr lang="ko-KR" altLang="en-US" dirty="0">
                 <a:solidFill>
+                  <a:srgbClr val="6EC173"/>
+                </a:solidFill>
+              </a:rPr>
+              <a:t>실습</a:t>
+            </a:r>
+            <a:r>
+              <a:rPr lang="en-US" altLang="ko-KR" dirty="0">
+                <a:solidFill>
+                  <a:srgbClr val="6EC173"/>
+                </a:solidFill>
+              </a:rPr>
+              <a:t>.  </a:t>
+            </a:r>
+            <a:r>
+              <a:rPr lang="ko-KR" altLang="en-US" dirty="0"/>
+              <a:t>배수 찾기</a:t>
+            </a:r>
+          </a:p>
+        </p:txBody>
+      </p:sp>
+      <p:sp>
+        <p:nvSpPr>
+          <p:cNvPr id="6" name="내용 개체 틀 1">
+            <a:extLst>
+              <a:ext uri="{FF2B5EF4-FFF2-40B4-BE49-F238E27FC236}">
+                <a16:creationId xmlns:a16="http://schemas.microsoft.com/office/drawing/2014/main" id="{70C2BA37-BE91-39C4-AC08-0E8A1052E2F7}"/>
+              </a:ext>
+            </a:extLst>
+          </p:cNvPr>
+          <p:cNvSpPr txBox="1">
+            <a:spLocks/>
+          </p:cNvSpPr>
+          <p:nvPr/>
+        </p:nvSpPr>
+        <p:spPr>
+          <a:xfrm>
+            <a:off x="838200" y="1825625"/>
+            <a:ext cx="10515600" cy="4351338"/>
+          </a:xfrm>
+          <a:prstGeom prst="rect">
+            <a:avLst/>
+          </a:prstGeom>
+        </p:spPr>
+        <p:txBody>
+          <a:bodyPr vert="horz" lIns="91440" tIns="45720" rIns="91440" bIns="45720" rtlCol="0">
+            <a:normAutofit/>
+          </a:bodyPr>
+          <a:lstStyle>
+            <a:lvl1pPr marL="228600" indent="-228600" algn="l" defTabSz="914400" rtl="0" eaLnBrk="1" latinLnBrk="1" hangingPunct="1">
+              <a:lnSpc>
+                <a:spcPct val="90000"/>
+              </a:lnSpc>
+              <a:spcBef>
+                <a:spcPts val="1000"/>
+              </a:spcBef>
+              <a:buFont typeface="Arial" panose="020B0604020202020204" pitchFamily="34" charset="0"/>
+              <a:buChar char="•"/>
+              <a:defRPr sz="2800" kern="1200">
+                <a:solidFill>
+                  <a:schemeClr val="tx1"/>
+                </a:solidFill>
+                <a:latin typeface="+mn-lt"/>
+                <a:ea typeface="+mn-ea"/>
+                <a:cs typeface="+mn-cs"/>
+              </a:defRPr>
+            </a:lvl1pPr>
+            <a:lvl2pPr marL="685800" indent="-228600" algn="l" defTabSz="914400" rtl="0" eaLnBrk="1" latinLnBrk="1" hangingPunct="1">
+              <a:lnSpc>
+                <a:spcPct val="90000"/>
+              </a:lnSpc>
+              <a:spcBef>
+                <a:spcPts val="500"/>
+              </a:spcBef>
+              <a:buFont typeface="Arial" panose="020B0604020202020204" pitchFamily="34" charset="0"/>
+              <a:buChar char="•"/>
+              <a:defRPr sz="2400" kern="1200">
+                <a:solidFill>
+                  <a:schemeClr val="tx1"/>
+                </a:solidFill>
+                <a:latin typeface="+mn-lt"/>
+                <a:ea typeface="+mn-ea"/>
+                <a:cs typeface="+mn-cs"/>
+              </a:defRPr>
+            </a:lvl2pPr>
+            <a:lvl3pPr marL="1143000" indent="-228600" algn="l" defTabSz="914400" rtl="0" eaLnBrk="1" latinLnBrk="1" hangingPunct="1">
+              <a:lnSpc>
+                <a:spcPct val="90000"/>
+              </a:lnSpc>
+              <a:spcBef>
+                <a:spcPts val="500"/>
+              </a:spcBef>
+              <a:buFont typeface="Arial" panose="020B0604020202020204" pitchFamily="34" charset="0"/>
+              <a:buChar char="•"/>
+              <a:defRPr sz="2000" kern="1200">
+                <a:solidFill>
+                  <a:schemeClr val="tx1"/>
+                </a:solidFill>
+                <a:latin typeface="+mn-lt"/>
+                <a:ea typeface="+mn-ea"/>
+                <a:cs typeface="+mn-cs"/>
+              </a:defRPr>
+            </a:lvl3pPr>
+            <a:lvl4pPr marL="1600200" indent="-228600" algn="l" defTabSz="914400" rtl="0" eaLnBrk="1" latinLnBrk="1" hangingPunct="1">
+              <a:lnSpc>
+                <a:spcPct val="90000"/>
+              </a:lnSpc>
+              <a:spcBef>
+                <a:spcPts val="500"/>
+              </a:spcBef>
+              <a:buFont typeface="Arial" panose="020B0604020202020204" pitchFamily="34" charset="0"/>
+              <a:buChar char="•"/>
+              <a:defRPr sz="1800" kern="1200">
+                <a:solidFill>
+                  <a:schemeClr val="tx1"/>
+                </a:solidFill>
+                <a:latin typeface="+mn-lt"/>
+                <a:ea typeface="+mn-ea"/>
+                <a:cs typeface="+mn-cs"/>
+              </a:defRPr>
+            </a:lvl4pPr>
+            <a:lvl5pPr marL="2057400" indent="-228600" algn="l" defTabSz="914400" rtl="0" eaLnBrk="1" latinLnBrk="1" hangingPunct="1">
+              <a:lnSpc>
+                <a:spcPct val="90000"/>
+              </a:lnSpc>
+              <a:spcBef>
+                <a:spcPts val="500"/>
+              </a:spcBef>
+              <a:buFont typeface="Arial" panose="020B0604020202020204" pitchFamily="34" charset="0"/>
+              <a:buChar char="•"/>
+              <a:defRPr sz="1800" kern="1200">
+                <a:solidFill>
+                  <a:schemeClr val="tx1"/>
+                </a:solidFill>
+                <a:latin typeface="+mn-lt"/>
+                <a:ea typeface="+mn-ea"/>
+                <a:cs typeface="+mn-cs"/>
+              </a:defRPr>
+            </a:lvl5pPr>
+            <a:lvl6pPr marL="2514600" indent="-228600" algn="l" defTabSz="914400" rtl="0" eaLnBrk="1" latinLnBrk="1" hangingPunct="1">
+              <a:lnSpc>
+                <a:spcPct val="90000"/>
+              </a:lnSpc>
+              <a:spcBef>
+                <a:spcPts val="500"/>
+              </a:spcBef>
+              <a:buFont typeface="Arial" panose="020B0604020202020204" pitchFamily="34" charset="0"/>
+              <a:buChar char="•"/>
+              <a:defRPr sz="1800" kern="1200">
+                <a:solidFill>
+                  <a:schemeClr val="tx1"/>
+                </a:solidFill>
+                <a:latin typeface="+mn-lt"/>
+                <a:ea typeface="+mn-ea"/>
+                <a:cs typeface="+mn-cs"/>
+              </a:defRPr>
+            </a:lvl6pPr>
+            <a:lvl7pPr marL="2971800" indent="-228600" algn="l" defTabSz="914400" rtl="0" eaLnBrk="1" latinLnBrk="1" hangingPunct="1">
+              <a:lnSpc>
+                <a:spcPct val="90000"/>
+              </a:lnSpc>
+              <a:spcBef>
+                <a:spcPts val="500"/>
+              </a:spcBef>
+              <a:buFont typeface="Arial" panose="020B0604020202020204" pitchFamily="34" charset="0"/>
+              <a:buChar char="•"/>
+              <a:defRPr sz="1800" kern="1200">
+                <a:solidFill>
+                  <a:schemeClr val="tx1"/>
+                </a:solidFill>
+                <a:latin typeface="+mn-lt"/>
+                <a:ea typeface="+mn-ea"/>
+                <a:cs typeface="+mn-cs"/>
+              </a:defRPr>
+            </a:lvl7pPr>
+            <a:lvl8pPr marL="3429000" indent="-228600" algn="l" defTabSz="914400" rtl="0" eaLnBrk="1" latinLnBrk="1" hangingPunct="1">
+              <a:lnSpc>
+                <a:spcPct val="90000"/>
+              </a:lnSpc>
+              <a:spcBef>
+                <a:spcPts val="500"/>
+              </a:spcBef>
+              <a:buFont typeface="Arial" panose="020B0604020202020204" pitchFamily="34" charset="0"/>
+              <a:buChar char="•"/>
+              <a:defRPr sz="1800" kern="1200">
+                <a:solidFill>
+                  <a:schemeClr val="tx1"/>
+                </a:solidFill>
+                <a:latin typeface="+mn-lt"/>
+                <a:ea typeface="+mn-ea"/>
+                <a:cs typeface="+mn-cs"/>
+              </a:defRPr>
+            </a:lvl8pPr>
+            <a:lvl9pPr marL="3886200" indent="-228600" algn="l" defTabSz="914400" rtl="0" eaLnBrk="1" latinLnBrk="1" hangingPunct="1">
+              <a:lnSpc>
+                <a:spcPct val="90000"/>
+              </a:lnSpc>
+              <a:spcBef>
+                <a:spcPts val="500"/>
+              </a:spcBef>
+              <a:buFont typeface="Arial" panose="020B0604020202020204" pitchFamily="34" charset="0"/>
+              <a:buChar char="•"/>
+              <a:defRPr sz="1800" kern="1200">
+                <a:solidFill>
+                  <a:schemeClr val="tx1"/>
+                </a:solidFill>
+                <a:latin typeface="+mn-lt"/>
+                <a:ea typeface="+mn-ea"/>
+                <a:cs typeface="+mn-cs"/>
+              </a:defRPr>
+            </a:lvl9pPr>
+          </a:lstStyle>
+          <a:p>
+            <a:pPr marL="457200" lvl="1" indent="0">
+              <a:buFont typeface="Arial" panose="020B0604020202020204" pitchFamily="34" charset="0"/>
+              <a:buNone/>
+            </a:pPr>
+            <a:endParaRPr lang="en-US" altLang="ko-KR" dirty="0">
+              <a:solidFill>
+                <a:srgbClr val="212529"/>
+              </a:solidFill>
+              <a:latin typeface="+mn-ea"/>
+            </a:endParaRPr>
+          </a:p>
+          <a:p>
+            <a:pPr marL="457200" lvl="1" indent="0">
+              <a:buFont typeface="Arial" panose="020B0604020202020204" pitchFamily="34" charset="0"/>
+              <a:buNone/>
+            </a:pPr>
+            <a:endParaRPr lang="en-US" altLang="ko-KR" dirty="0">
+              <a:solidFill>
+                <a:srgbClr val="212529"/>
+              </a:solidFill>
+              <a:latin typeface="+mn-ea"/>
+            </a:endParaRPr>
+          </a:p>
+          <a:p>
+            <a:r>
+              <a:rPr lang="en-US" altLang="ko-KR" b="1" dirty="0">
+                <a:solidFill>
+                  <a:srgbClr val="212529"/>
+                </a:solidFill>
+                <a:latin typeface="+mn-ea"/>
+              </a:rPr>
+              <a:t>[</a:t>
+            </a:r>
+            <a:r>
+              <a:rPr lang="ko-KR" altLang="en-US" b="1" dirty="0" err="1">
+                <a:solidFill>
+                  <a:srgbClr val="212529"/>
+                </a:solidFill>
+                <a:latin typeface="+mn-ea"/>
+              </a:rPr>
+              <a:t>코딩온</a:t>
+            </a:r>
+            <a:r>
+              <a:rPr lang="en-US" altLang="ko-KR" b="1" dirty="0">
+                <a:solidFill>
+                  <a:srgbClr val="212529"/>
+                </a:solidFill>
+                <a:latin typeface="+mn-ea"/>
+              </a:rPr>
+              <a:t>] HTML, CSS, JS </a:t>
+            </a:r>
+            <a:r>
+              <a:rPr lang="ko-KR" altLang="en-US" b="1" dirty="0">
+                <a:solidFill>
+                  <a:srgbClr val="212529"/>
+                </a:solidFill>
+                <a:latin typeface="+mn-ea"/>
+              </a:rPr>
+              <a:t>실습</a:t>
+            </a:r>
+            <a:r>
+              <a:rPr lang="en-US" altLang="ko-KR" b="1" dirty="0">
+                <a:solidFill>
+                  <a:srgbClr val="212529"/>
+                </a:solidFill>
+                <a:latin typeface="+mn-ea"/>
+              </a:rPr>
+              <a:t> </a:t>
+            </a:r>
+            <a:r>
+              <a:rPr lang="ko-KR" altLang="en-US" dirty="0">
+                <a:solidFill>
+                  <a:srgbClr val="212529"/>
+                </a:solidFill>
+                <a:latin typeface="+mn-ea"/>
+              </a:rPr>
+              <a:t>강의 클릭</a:t>
+            </a:r>
+            <a:br>
+              <a:rPr lang="en-US" altLang="ko-KR" dirty="0">
+                <a:solidFill>
+                  <a:srgbClr val="212529"/>
+                </a:solidFill>
+                <a:latin typeface="+mn-ea"/>
+              </a:rPr>
+            </a:br>
+            <a:endParaRPr lang="en-US" altLang="ko-KR" dirty="0">
+              <a:solidFill>
+                <a:srgbClr val="212529"/>
+              </a:solidFill>
+              <a:latin typeface="+mn-ea"/>
+            </a:endParaRPr>
+          </a:p>
+          <a:p>
+            <a:pPr lvl="1"/>
+            <a:r>
+              <a:rPr lang="ko-KR" altLang="en-US" sz="2800" b="1" dirty="0">
+                <a:solidFill>
+                  <a:srgbClr val="212529"/>
+                </a:solidFill>
+                <a:latin typeface="+mn-ea"/>
+              </a:rPr>
+              <a:t>➡ </a:t>
+            </a:r>
+            <a:r>
+              <a:rPr lang="en-US" altLang="ko-KR" sz="2800" b="1" dirty="0">
+                <a:solidFill>
+                  <a:srgbClr val="212529"/>
+                </a:solidFill>
+                <a:latin typeface="+mn-ea"/>
+              </a:rPr>
+              <a:t>[</a:t>
+            </a:r>
+            <a:r>
+              <a:rPr lang="ko-KR" altLang="en-US" sz="2800" b="1" dirty="0" err="1">
+                <a:solidFill>
+                  <a:srgbClr val="212529"/>
+                </a:solidFill>
+                <a:latin typeface="+mn-ea"/>
+              </a:rPr>
+              <a:t>반복문</a:t>
+            </a:r>
+            <a:r>
+              <a:rPr lang="ko-KR" altLang="en-US" sz="2800" b="1" dirty="0">
+                <a:solidFill>
+                  <a:srgbClr val="212529"/>
+                </a:solidFill>
+                <a:latin typeface="+mn-ea"/>
+              </a:rPr>
+              <a:t> 실습</a:t>
+            </a:r>
+            <a:r>
+              <a:rPr lang="en-US" altLang="ko-KR" sz="2800" b="1" dirty="0">
+                <a:solidFill>
+                  <a:srgbClr val="212529"/>
+                </a:solidFill>
+                <a:latin typeface="+mn-ea"/>
+              </a:rPr>
+              <a:t>]</a:t>
+            </a:r>
+            <a:r>
+              <a:rPr lang="en-US" altLang="ko-KR" sz="2800" dirty="0">
+                <a:solidFill>
+                  <a:srgbClr val="212529"/>
+                </a:solidFill>
+                <a:latin typeface="+mn-ea"/>
+              </a:rPr>
+              <a:t> </a:t>
+            </a:r>
+            <a:r>
+              <a:rPr lang="ko-KR" altLang="en-US" sz="2800" dirty="0">
+                <a:solidFill>
+                  <a:srgbClr val="212529"/>
+                </a:solidFill>
+                <a:latin typeface="+mn-ea"/>
+              </a:rPr>
+              <a:t>커리큘럼 클릭</a:t>
+            </a:r>
+            <a:endParaRPr lang="en-US" altLang="ko-KR" sz="2800" dirty="0">
+              <a:solidFill>
+                <a:srgbClr val="212529"/>
+              </a:solidFill>
+              <a:latin typeface="+mn-ea"/>
+            </a:endParaRPr>
+          </a:p>
+          <a:p>
+            <a:pPr lvl="1"/>
+            <a:r>
+              <a:rPr lang="ko-KR" altLang="en-US" sz="2800" b="1" dirty="0">
+                <a:solidFill>
+                  <a:srgbClr val="212529"/>
+                </a:solidFill>
+                <a:latin typeface="+mn-ea"/>
+              </a:rPr>
+              <a:t>➡ </a:t>
+            </a:r>
+            <a:r>
+              <a:rPr lang="en-US" altLang="ko-KR" sz="2800" b="1" dirty="0">
+                <a:solidFill>
                   <a:schemeClr val="accent1"/>
                 </a:solidFill>
-              </a:rPr>
-              <a:t>실습</a:t>
-            </a:r>
-            <a:r>
-              <a:rPr lang="en-US" altLang="ko-KR" dirty="0">
+                <a:latin typeface="+mn-ea"/>
+              </a:rPr>
+              <a:t>[</a:t>
+            </a:r>
+            <a:r>
+              <a:rPr lang="ko-KR" altLang="en-US" sz="2800" b="1" dirty="0">
                 <a:solidFill>
                   <a:schemeClr val="accent1"/>
                 </a:solidFill>
-              </a:rPr>
-              <a:t>. </a:t>
-            </a:r>
-            <a:r>
-              <a:rPr lang="ko-KR" altLang="en-US" dirty="0"/>
-              <a:t>합계 구하기</a:t>
+                <a:latin typeface="+mn-ea"/>
+              </a:rPr>
+              <a:t>실습문제</a:t>
+            </a:r>
+            <a:r>
+              <a:rPr lang="en-US" altLang="ko-KR" sz="2800" b="1" dirty="0">
+                <a:solidFill>
+                  <a:schemeClr val="accent1"/>
+                </a:solidFill>
+                <a:latin typeface="+mn-ea"/>
+              </a:rPr>
+              <a:t>1. </a:t>
+            </a:r>
+            <a:r>
+              <a:rPr lang="ko-KR" altLang="en-US" sz="2800" b="1" dirty="0">
+                <a:solidFill>
+                  <a:schemeClr val="accent1"/>
+                </a:solidFill>
+                <a:latin typeface="+mn-ea"/>
+              </a:rPr>
+              <a:t>배수 찾기</a:t>
+            </a:r>
+            <a:r>
+              <a:rPr lang="en-US" altLang="ko-KR" sz="2800" b="1" dirty="0">
+                <a:solidFill>
+                  <a:schemeClr val="accent1"/>
+                </a:solidFill>
+                <a:latin typeface="+mn-ea"/>
+              </a:rPr>
+              <a:t>]</a:t>
+            </a:r>
+            <a:r>
+              <a:rPr lang="en-US" altLang="ko-KR" sz="2800" dirty="0">
+                <a:solidFill>
+                  <a:schemeClr val="accent1"/>
+                </a:solidFill>
+                <a:latin typeface="+mn-ea"/>
+              </a:rPr>
+              <a:t> </a:t>
+            </a:r>
+            <a:r>
+              <a:rPr lang="ko-KR" altLang="en-US" sz="2800" dirty="0">
+                <a:solidFill>
+                  <a:srgbClr val="212529"/>
+                </a:solidFill>
+                <a:latin typeface="+mn-ea"/>
+              </a:rPr>
+              <a:t> 진행</a:t>
             </a:r>
           </a:p>
         </p:txBody>
@@ -21340,7 +22832,7 @@
     </p:spTree>
     <p:extLst>
       <p:ext uri="{BB962C8B-B14F-4D97-AF65-F5344CB8AC3E}">
-        <p14:creationId xmlns:p14="http://schemas.microsoft.com/office/powerpoint/2010/main" val="974223821"/>
+        <p14:creationId xmlns:p14="http://schemas.microsoft.com/office/powerpoint/2010/main" val="2159761115"/>
       </p:ext>
     </p:extLst>
   </p:cSld>
@@ -21369,10 +22861,10 @@
       </p:grpSpPr>
       <p:sp>
         <p:nvSpPr>
-          <p:cNvPr id="2" name="내용 개체 틀 1">
+          <p:cNvPr id="13" name="내용 개체 틀 2">
             <a:extLst>
               <a:ext uri="{FF2B5EF4-FFF2-40B4-BE49-F238E27FC236}">
-                <a16:creationId xmlns:a16="http://schemas.microsoft.com/office/drawing/2014/main" id="{C1C54FCA-AA73-40F5-4B3E-206B3C5BCB4B}"/>
+                <a16:creationId xmlns:a16="http://schemas.microsoft.com/office/drawing/2014/main" id="{847FD532-7F61-A001-537F-B970BD821AF3}"/>
               </a:ext>
             </a:extLst>
           </p:cNvPr>
@@ -21383,139 +22875,37 @@
             <p:ph idx="1"/>
           </p:nvPr>
         </p:nvSpPr>
-        <p:spPr/>
-        <p:txBody>
-          <a:bodyPr/>
+        <p:spPr>
+          <a:xfrm>
+            <a:off x="510988" y="1328391"/>
+            <a:ext cx="11260802" cy="5328442"/>
+          </a:xfrm>
+        </p:spPr>
+        <p:txBody>
+          <a:bodyPr>
+            <a:normAutofit/>
+          </a:bodyPr>
           <a:lstStyle/>
           <a:p>
-            <a:r>
-              <a:rPr lang="en-US" altLang="ko-KR" dirty="0">
-                <a:latin typeface="+mn-ea"/>
-              </a:rPr>
-              <a:t>10000 </a:t>
-            </a:r>
-            <a:r>
-              <a:rPr lang="ko-KR" altLang="en-US" dirty="0">
-                <a:latin typeface="+mn-ea"/>
-              </a:rPr>
-              <a:t>까지의 숫자 중에서</a:t>
-            </a:r>
-            <a:r>
-              <a:rPr lang="en-US" altLang="ko-KR" dirty="0">
-                <a:latin typeface="+mn-ea"/>
-              </a:rPr>
-              <a:t> </a:t>
-            </a:r>
-            <a:r>
-              <a:rPr lang="en-US" altLang="ko-KR" dirty="0">
-                <a:solidFill>
-                  <a:schemeClr val="accent1"/>
-                </a:solidFill>
-                <a:latin typeface="+mn-ea"/>
-              </a:rPr>
-              <a:t>13</a:t>
-            </a:r>
-            <a:r>
-              <a:rPr lang="ko-KR" altLang="en-US" dirty="0">
-                <a:solidFill>
-                  <a:schemeClr val="accent1"/>
-                </a:solidFill>
-                <a:latin typeface="+mn-ea"/>
-              </a:rPr>
-              <a:t>의 배수면서 홀수인 숫자</a:t>
-            </a:r>
-            <a:r>
-              <a:rPr lang="ko-KR" altLang="en-US" dirty="0">
-                <a:latin typeface="+mn-ea"/>
-              </a:rPr>
-              <a:t>를 찾아 봅시다</a:t>
-            </a:r>
-            <a:r>
-              <a:rPr lang="en-US" altLang="ko-KR" dirty="0">
-                <a:latin typeface="+mn-ea"/>
-              </a:rPr>
-              <a:t>!</a:t>
-            </a:r>
-          </a:p>
-          <a:p>
-            <a:endParaRPr lang="en-US" altLang="ko-KR" dirty="0">
-              <a:latin typeface="+mn-ea"/>
-            </a:endParaRPr>
-          </a:p>
-          <a:p>
-            <a:r>
-              <a:rPr lang="en-US" altLang="ko-KR" dirty="0">
-                <a:latin typeface="+mn-ea"/>
-              </a:rPr>
-              <a:t>(</a:t>
-            </a:r>
-            <a:r>
-              <a:rPr lang="ko-KR" altLang="en-US" dirty="0">
-                <a:latin typeface="+mn-ea"/>
-              </a:rPr>
-              <a:t>심화</a:t>
-            </a:r>
-            <a:r>
-              <a:rPr lang="en-US" altLang="ko-KR" dirty="0">
-                <a:latin typeface="+mn-ea"/>
-              </a:rPr>
-              <a:t>) prompt() </a:t>
-            </a:r>
-            <a:r>
-              <a:rPr lang="ko-KR" altLang="en-US" dirty="0">
-                <a:latin typeface="+mn-ea"/>
-              </a:rPr>
-              <a:t>를 이용해서 </a:t>
-            </a:r>
-            <a:r>
-              <a:rPr lang="ko-KR" altLang="en-US" dirty="0" err="1">
-                <a:latin typeface="+mn-ea"/>
-              </a:rPr>
-              <a:t>입력받은</a:t>
-            </a:r>
-            <a:r>
-              <a:rPr lang="ko-KR" altLang="en-US" dirty="0">
-                <a:latin typeface="+mn-ea"/>
-              </a:rPr>
-              <a:t> 수까지 </a:t>
-            </a:r>
-            <a:r>
-              <a:rPr lang="en-US" altLang="ko-KR" dirty="0">
-                <a:latin typeface="+mn-ea"/>
-              </a:rPr>
-              <a:t>13</a:t>
-            </a:r>
-            <a:r>
-              <a:rPr lang="ko-KR" altLang="en-US" dirty="0">
-                <a:latin typeface="+mn-ea"/>
-              </a:rPr>
-              <a:t>의 배수면서 홀수인 숫자를 찾는 프로그램을 만들어 봅시다</a:t>
-            </a:r>
-            <a:r>
-              <a:rPr lang="en-US" altLang="ko-KR" dirty="0">
-                <a:latin typeface="+mn-ea"/>
-              </a:rPr>
-              <a:t>!</a:t>
-            </a:r>
-          </a:p>
-          <a:p>
-            <a:endParaRPr lang="en-US" altLang="ko-KR" dirty="0">
-              <a:latin typeface="+mn-ea"/>
-            </a:endParaRPr>
-          </a:p>
-          <a:p>
-            <a:endParaRPr lang="ko-KR" altLang="en-US" dirty="0">
-              <a:latin typeface="+mn-ea"/>
-            </a:endParaRPr>
-          </a:p>
-        </p:txBody>
-      </p:sp>
-      <p:sp>
-        <p:nvSpPr>
-          <p:cNvPr id="3" name="날짜 개체 틀 2">
+            <a:endParaRPr lang="en-US" altLang="ko-KR" dirty="0"/>
+          </a:p>
+          <a:p>
+            <a:pPr marL="0" indent="0">
+              <a:buNone/>
+            </a:pPr>
+            <a:endParaRPr lang="en-US" altLang="ko-KR" dirty="0"/>
+          </a:p>
+          <a:p>
+            <a:endParaRPr lang="en-US" altLang="ko-KR" dirty="0"/>
+          </a:p>
+        </p:txBody>
+      </p:sp>
+      <p:sp>
+        <p:nvSpPr>
+          <p:cNvPr id="4" name="날짜 개체 틀 3">
             <a:extLst>
               <a:ext uri="{FF2B5EF4-FFF2-40B4-BE49-F238E27FC236}">
-                <a16:creationId xmlns:a16="http://schemas.microsoft.com/office/drawing/2014/main" id="{9FD55E0F-487B-4463-126B-E1D7CCB987ED}"/>
+                <a16:creationId xmlns:a16="http://schemas.microsoft.com/office/drawing/2014/main" id="{A695DDE5-0A39-A366-4CFE-A283911999CD}"/>
               </a:ext>
             </a:extLst>
           </p:cNvPr>
@@ -21531,9 +22921,9 @@
           <a:bodyPr/>
           <a:lstStyle/>
           <a:p>
-            <a:fld id="{3C9CE3CE-253F-4F9D-BA15-C226C8D8501E}" type="datetime6">
+            <a:fld id="{0F78D9C4-20C1-4B15-A116-16DC77AD9A1E}" type="datetime1">
               <a:rPr lang="ko-KR" altLang="en-US" smtClean="0"/>
-              <a:t>2024년 5월</a:t>
+              <a:t>2024-05-29</a:t>
             </a:fld>
             <a:endParaRPr lang="ko-KR" altLang="en-US"/>
           </a:p>
@@ -21541,10 +22931,10 @@
       </p:sp>
       <p:sp>
         <p:nvSpPr>
-          <p:cNvPr id="4" name="슬라이드 번호 개체 틀 3">
+          <p:cNvPr id="5" name="슬라이드 번호 개체 틀 4">
             <a:extLst>
               <a:ext uri="{FF2B5EF4-FFF2-40B4-BE49-F238E27FC236}">
-                <a16:creationId xmlns:a16="http://schemas.microsoft.com/office/drawing/2014/main" id="{12991CB5-972D-2F79-AAA6-B2F6CB98CB99}"/>
+                <a16:creationId xmlns:a16="http://schemas.microsoft.com/office/drawing/2014/main" id="{5E040F43-60A7-C50D-1F5B-F984054F2D7C}"/>
               </a:ext>
             </a:extLst>
           </p:cNvPr>
@@ -21570,10 +22960,10 @@
       </p:sp>
       <p:sp>
         <p:nvSpPr>
-          <p:cNvPr id="5" name="제목 4">
+          <p:cNvPr id="2" name="제목 1">
             <a:extLst>
               <a:ext uri="{FF2B5EF4-FFF2-40B4-BE49-F238E27FC236}">
-                <a16:creationId xmlns:a16="http://schemas.microsoft.com/office/drawing/2014/main" id="{D5E37073-786C-FCFE-B489-461AA3092395}"/>
+                <a16:creationId xmlns:a16="http://schemas.microsoft.com/office/drawing/2014/main" id="{5FAC57F5-99D7-9C46-B6C1-D16224151FE9}"/>
               </a:ext>
             </a:extLst>
           </p:cNvPr>
@@ -21592,26 +22982,456 @@
             <a:r>
               <a:rPr lang="ko-KR" altLang="en-US" dirty="0">
                 <a:solidFill>
+                  <a:srgbClr val="6EC173"/>
+                </a:solidFill>
+              </a:rPr>
+              <a:t>실습</a:t>
+            </a:r>
+            <a:r>
+              <a:rPr lang="en-US" altLang="ko-KR" dirty="0">
+                <a:solidFill>
+                  <a:srgbClr val="6EC173"/>
+                </a:solidFill>
+              </a:rPr>
+              <a:t>.  </a:t>
+            </a:r>
+            <a:r>
+              <a:rPr lang="ko-KR" altLang="en-US" dirty="0"/>
+              <a:t>배수의 합</a:t>
+            </a:r>
+          </a:p>
+        </p:txBody>
+      </p:sp>
+      <p:sp>
+        <p:nvSpPr>
+          <p:cNvPr id="6" name="내용 개체 틀 1">
+            <a:extLst>
+              <a:ext uri="{FF2B5EF4-FFF2-40B4-BE49-F238E27FC236}">
+                <a16:creationId xmlns:a16="http://schemas.microsoft.com/office/drawing/2014/main" id="{70C2BA37-BE91-39C4-AC08-0E8A1052E2F7}"/>
+              </a:ext>
+            </a:extLst>
+          </p:cNvPr>
+          <p:cNvSpPr txBox="1">
+            <a:spLocks/>
+          </p:cNvSpPr>
+          <p:nvPr/>
+        </p:nvSpPr>
+        <p:spPr>
+          <a:xfrm>
+            <a:off x="838200" y="1825625"/>
+            <a:ext cx="10515600" cy="4351338"/>
+          </a:xfrm>
+          <a:prstGeom prst="rect">
+            <a:avLst/>
+          </a:prstGeom>
+        </p:spPr>
+        <p:txBody>
+          <a:bodyPr vert="horz" lIns="91440" tIns="45720" rIns="91440" bIns="45720" rtlCol="0">
+            <a:normAutofit/>
+          </a:bodyPr>
+          <a:lstStyle>
+            <a:lvl1pPr marL="228600" indent="-228600" algn="l" defTabSz="914400" rtl="0" eaLnBrk="1" latinLnBrk="1" hangingPunct="1">
+              <a:lnSpc>
+                <a:spcPct val="90000"/>
+              </a:lnSpc>
+              <a:spcBef>
+                <a:spcPts val="1000"/>
+              </a:spcBef>
+              <a:buFont typeface="Arial" panose="020B0604020202020204" pitchFamily="34" charset="0"/>
+              <a:buChar char="•"/>
+              <a:defRPr sz="2800" kern="1200">
+                <a:solidFill>
+                  <a:schemeClr val="tx1"/>
+                </a:solidFill>
+                <a:latin typeface="+mn-lt"/>
+                <a:ea typeface="+mn-ea"/>
+                <a:cs typeface="+mn-cs"/>
+              </a:defRPr>
+            </a:lvl1pPr>
+            <a:lvl2pPr marL="685800" indent="-228600" algn="l" defTabSz="914400" rtl="0" eaLnBrk="1" latinLnBrk="1" hangingPunct="1">
+              <a:lnSpc>
+                <a:spcPct val="90000"/>
+              </a:lnSpc>
+              <a:spcBef>
+                <a:spcPts val="500"/>
+              </a:spcBef>
+              <a:buFont typeface="Arial" panose="020B0604020202020204" pitchFamily="34" charset="0"/>
+              <a:buChar char="•"/>
+              <a:defRPr sz="2400" kern="1200">
+                <a:solidFill>
+                  <a:schemeClr val="tx1"/>
+                </a:solidFill>
+                <a:latin typeface="+mn-lt"/>
+                <a:ea typeface="+mn-ea"/>
+                <a:cs typeface="+mn-cs"/>
+              </a:defRPr>
+            </a:lvl2pPr>
+            <a:lvl3pPr marL="1143000" indent="-228600" algn="l" defTabSz="914400" rtl="0" eaLnBrk="1" latinLnBrk="1" hangingPunct="1">
+              <a:lnSpc>
+                <a:spcPct val="90000"/>
+              </a:lnSpc>
+              <a:spcBef>
+                <a:spcPts val="500"/>
+              </a:spcBef>
+              <a:buFont typeface="Arial" panose="020B0604020202020204" pitchFamily="34" charset="0"/>
+              <a:buChar char="•"/>
+              <a:defRPr sz="2000" kern="1200">
+                <a:solidFill>
+                  <a:schemeClr val="tx1"/>
+                </a:solidFill>
+                <a:latin typeface="+mn-lt"/>
+                <a:ea typeface="+mn-ea"/>
+                <a:cs typeface="+mn-cs"/>
+              </a:defRPr>
+            </a:lvl3pPr>
+            <a:lvl4pPr marL="1600200" indent="-228600" algn="l" defTabSz="914400" rtl="0" eaLnBrk="1" latinLnBrk="1" hangingPunct="1">
+              <a:lnSpc>
+                <a:spcPct val="90000"/>
+              </a:lnSpc>
+              <a:spcBef>
+                <a:spcPts val="500"/>
+              </a:spcBef>
+              <a:buFont typeface="Arial" panose="020B0604020202020204" pitchFamily="34" charset="0"/>
+              <a:buChar char="•"/>
+              <a:defRPr sz="1800" kern="1200">
+                <a:solidFill>
+                  <a:schemeClr val="tx1"/>
+                </a:solidFill>
+                <a:latin typeface="+mn-lt"/>
+                <a:ea typeface="+mn-ea"/>
+                <a:cs typeface="+mn-cs"/>
+              </a:defRPr>
+            </a:lvl4pPr>
+            <a:lvl5pPr marL="2057400" indent="-228600" algn="l" defTabSz="914400" rtl="0" eaLnBrk="1" latinLnBrk="1" hangingPunct="1">
+              <a:lnSpc>
+                <a:spcPct val="90000"/>
+              </a:lnSpc>
+              <a:spcBef>
+                <a:spcPts val="500"/>
+              </a:spcBef>
+              <a:buFont typeface="Arial" panose="020B0604020202020204" pitchFamily="34" charset="0"/>
+              <a:buChar char="•"/>
+              <a:defRPr sz="1800" kern="1200">
+                <a:solidFill>
+                  <a:schemeClr val="tx1"/>
+                </a:solidFill>
+                <a:latin typeface="+mn-lt"/>
+                <a:ea typeface="+mn-ea"/>
+                <a:cs typeface="+mn-cs"/>
+              </a:defRPr>
+            </a:lvl5pPr>
+            <a:lvl6pPr marL="2514600" indent="-228600" algn="l" defTabSz="914400" rtl="0" eaLnBrk="1" latinLnBrk="1" hangingPunct="1">
+              <a:lnSpc>
+                <a:spcPct val="90000"/>
+              </a:lnSpc>
+              <a:spcBef>
+                <a:spcPts val="500"/>
+              </a:spcBef>
+              <a:buFont typeface="Arial" panose="020B0604020202020204" pitchFamily="34" charset="0"/>
+              <a:buChar char="•"/>
+              <a:defRPr sz="1800" kern="1200">
+                <a:solidFill>
+                  <a:schemeClr val="tx1"/>
+                </a:solidFill>
+                <a:latin typeface="+mn-lt"/>
+                <a:ea typeface="+mn-ea"/>
+                <a:cs typeface="+mn-cs"/>
+              </a:defRPr>
+            </a:lvl6pPr>
+            <a:lvl7pPr marL="2971800" indent="-228600" algn="l" defTabSz="914400" rtl="0" eaLnBrk="1" latinLnBrk="1" hangingPunct="1">
+              <a:lnSpc>
+                <a:spcPct val="90000"/>
+              </a:lnSpc>
+              <a:spcBef>
+                <a:spcPts val="500"/>
+              </a:spcBef>
+              <a:buFont typeface="Arial" panose="020B0604020202020204" pitchFamily="34" charset="0"/>
+              <a:buChar char="•"/>
+              <a:defRPr sz="1800" kern="1200">
+                <a:solidFill>
+                  <a:schemeClr val="tx1"/>
+                </a:solidFill>
+                <a:latin typeface="+mn-lt"/>
+                <a:ea typeface="+mn-ea"/>
+                <a:cs typeface="+mn-cs"/>
+              </a:defRPr>
+            </a:lvl7pPr>
+            <a:lvl8pPr marL="3429000" indent="-228600" algn="l" defTabSz="914400" rtl="0" eaLnBrk="1" latinLnBrk="1" hangingPunct="1">
+              <a:lnSpc>
+                <a:spcPct val="90000"/>
+              </a:lnSpc>
+              <a:spcBef>
+                <a:spcPts val="500"/>
+              </a:spcBef>
+              <a:buFont typeface="Arial" panose="020B0604020202020204" pitchFamily="34" charset="0"/>
+              <a:buChar char="•"/>
+              <a:defRPr sz="1800" kern="1200">
+                <a:solidFill>
+                  <a:schemeClr val="tx1"/>
+                </a:solidFill>
+                <a:latin typeface="+mn-lt"/>
+                <a:ea typeface="+mn-ea"/>
+                <a:cs typeface="+mn-cs"/>
+              </a:defRPr>
+            </a:lvl8pPr>
+            <a:lvl9pPr marL="3886200" indent="-228600" algn="l" defTabSz="914400" rtl="0" eaLnBrk="1" latinLnBrk="1" hangingPunct="1">
+              <a:lnSpc>
+                <a:spcPct val="90000"/>
+              </a:lnSpc>
+              <a:spcBef>
+                <a:spcPts val="500"/>
+              </a:spcBef>
+              <a:buFont typeface="Arial" panose="020B0604020202020204" pitchFamily="34" charset="0"/>
+              <a:buChar char="•"/>
+              <a:defRPr sz="1800" kern="1200">
+                <a:solidFill>
+                  <a:schemeClr val="tx1"/>
+                </a:solidFill>
+                <a:latin typeface="+mn-lt"/>
+                <a:ea typeface="+mn-ea"/>
+                <a:cs typeface="+mn-cs"/>
+              </a:defRPr>
+            </a:lvl9pPr>
+          </a:lstStyle>
+          <a:p>
+            <a:pPr marL="457200" lvl="1" indent="0">
+              <a:buFont typeface="Arial" panose="020B0604020202020204" pitchFamily="34" charset="0"/>
+              <a:buNone/>
+            </a:pPr>
+            <a:endParaRPr lang="en-US" altLang="ko-KR" dirty="0">
+              <a:solidFill>
+                <a:srgbClr val="212529"/>
+              </a:solidFill>
+              <a:latin typeface="+mn-ea"/>
+            </a:endParaRPr>
+          </a:p>
+          <a:p>
+            <a:pPr marL="457200" lvl="1" indent="0">
+              <a:buFont typeface="Arial" panose="020B0604020202020204" pitchFamily="34" charset="0"/>
+              <a:buNone/>
+            </a:pPr>
+            <a:endParaRPr lang="en-US" altLang="ko-KR" dirty="0">
+              <a:solidFill>
+                <a:srgbClr val="212529"/>
+              </a:solidFill>
+              <a:latin typeface="+mn-ea"/>
+            </a:endParaRPr>
+          </a:p>
+          <a:p>
+            <a:r>
+              <a:rPr lang="en-US" altLang="ko-KR" b="1" dirty="0">
+                <a:solidFill>
+                  <a:srgbClr val="212529"/>
+                </a:solidFill>
+                <a:latin typeface="+mn-ea"/>
+              </a:rPr>
+              <a:t>[</a:t>
+            </a:r>
+            <a:r>
+              <a:rPr lang="ko-KR" altLang="en-US" b="1" dirty="0" err="1">
+                <a:solidFill>
+                  <a:srgbClr val="212529"/>
+                </a:solidFill>
+                <a:latin typeface="+mn-ea"/>
+              </a:rPr>
+              <a:t>코딩온</a:t>
+            </a:r>
+            <a:r>
+              <a:rPr lang="en-US" altLang="ko-KR" b="1" dirty="0">
+                <a:solidFill>
+                  <a:srgbClr val="212529"/>
+                </a:solidFill>
+                <a:latin typeface="+mn-ea"/>
+              </a:rPr>
+              <a:t>] HTML, CSS, JS </a:t>
+            </a:r>
+            <a:r>
+              <a:rPr lang="ko-KR" altLang="en-US" b="1" dirty="0">
+                <a:solidFill>
+                  <a:srgbClr val="212529"/>
+                </a:solidFill>
+                <a:latin typeface="+mn-ea"/>
+              </a:rPr>
+              <a:t>실습</a:t>
+            </a:r>
+            <a:r>
+              <a:rPr lang="en-US" altLang="ko-KR" b="1" dirty="0">
+                <a:solidFill>
+                  <a:srgbClr val="212529"/>
+                </a:solidFill>
+                <a:latin typeface="+mn-ea"/>
+              </a:rPr>
+              <a:t> </a:t>
+            </a:r>
+            <a:r>
+              <a:rPr lang="ko-KR" altLang="en-US" dirty="0">
+                <a:solidFill>
+                  <a:srgbClr val="212529"/>
+                </a:solidFill>
+                <a:latin typeface="+mn-ea"/>
+              </a:rPr>
+              <a:t>강의 클릭</a:t>
+            </a:r>
+            <a:br>
+              <a:rPr lang="en-US" altLang="ko-KR" dirty="0">
+                <a:solidFill>
+                  <a:srgbClr val="212529"/>
+                </a:solidFill>
+                <a:latin typeface="+mn-ea"/>
+              </a:rPr>
+            </a:br>
+            <a:endParaRPr lang="en-US" altLang="ko-KR" dirty="0">
+              <a:solidFill>
+                <a:srgbClr val="212529"/>
+              </a:solidFill>
+              <a:latin typeface="+mn-ea"/>
+            </a:endParaRPr>
+          </a:p>
+          <a:p>
+            <a:pPr lvl="1"/>
+            <a:r>
+              <a:rPr lang="ko-KR" altLang="en-US" sz="2800" b="1" dirty="0">
+                <a:solidFill>
+                  <a:srgbClr val="212529"/>
+                </a:solidFill>
+                <a:latin typeface="+mn-ea"/>
+              </a:rPr>
+              <a:t>➡ </a:t>
+            </a:r>
+            <a:r>
+              <a:rPr lang="en-US" altLang="ko-KR" sz="2800" b="1" dirty="0">
+                <a:solidFill>
+                  <a:srgbClr val="212529"/>
+                </a:solidFill>
+                <a:latin typeface="+mn-ea"/>
+              </a:rPr>
+              <a:t>[</a:t>
+            </a:r>
+            <a:r>
+              <a:rPr lang="ko-KR" altLang="en-US" sz="2800" b="1" dirty="0" err="1">
+                <a:solidFill>
+                  <a:srgbClr val="212529"/>
+                </a:solidFill>
+                <a:latin typeface="+mn-ea"/>
+              </a:rPr>
+              <a:t>반복문</a:t>
+            </a:r>
+            <a:r>
+              <a:rPr lang="ko-KR" altLang="en-US" sz="2800" b="1" dirty="0">
+                <a:solidFill>
+                  <a:srgbClr val="212529"/>
+                </a:solidFill>
+                <a:latin typeface="+mn-ea"/>
+              </a:rPr>
+              <a:t> 실습</a:t>
+            </a:r>
+            <a:r>
+              <a:rPr lang="en-US" altLang="ko-KR" sz="2800" b="1" dirty="0">
+                <a:solidFill>
+                  <a:srgbClr val="212529"/>
+                </a:solidFill>
+                <a:latin typeface="+mn-ea"/>
+              </a:rPr>
+              <a:t>]</a:t>
+            </a:r>
+            <a:r>
+              <a:rPr lang="en-US" altLang="ko-KR" sz="2800" dirty="0">
+                <a:solidFill>
+                  <a:srgbClr val="212529"/>
+                </a:solidFill>
+                <a:latin typeface="+mn-ea"/>
+              </a:rPr>
+              <a:t> </a:t>
+            </a:r>
+            <a:r>
+              <a:rPr lang="ko-KR" altLang="en-US" sz="2800" dirty="0">
+                <a:solidFill>
+                  <a:srgbClr val="212529"/>
+                </a:solidFill>
+                <a:latin typeface="+mn-ea"/>
+              </a:rPr>
+              <a:t>커리큘럼 클릭</a:t>
+            </a:r>
+            <a:endParaRPr lang="en-US" altLang="ko-KR" sz="2800" dirty="0">
+              <a:solidFill>
+                <a:srgbClr val="212529"/>
+              </a:solidFill>
+              <a:latin typeface="+mn-ea"/>
+            </a:endParaRPr>
+          </a:p>
+          <a:p>
+            <a:pPr lvl="1"/>
+            <a:r>
+              <a:rPr lang="ko-KR" altLang="en-US" sz="2800" b="1" dirty="0">
+                <a:solidFill>
+                  <a:srgbClr val="212529"/>
+                </a:solidFill>
+                <a:latin typeface="+mn-ea"/>
+              </a:rPr>
+              <a:t>➡ </a:t>
+            </a:r>
+            <a:r>
+              <a:rPr lang="en-US" altLang="ko-KR" sz="2800" b="1" dirty="0">
+                <a:solidFill>
                   <a:schemeClr val="accent1"/>
                 </a:solidFill>
-              </a:rPr>
-              <a:t>실습</a:t>
-            </a:r>
-            <a:r>
-              <a:rPr lang="en-US" altLang="ko-KR" dirty="0">
+                <a:latin typeface="+mn-ea"/>
+              </a:rPr>
+              <a:t>[</a:t>
+            </a:r>
+            <a:r>
+              <a:rPr lang="ko-KR" altLang="en-US" sz="2800" b="1" dirty="0">
                 <a:solidFill>
                   <a:schemeClr val="accent1"/>
                 </a:solidFill>
-              </a:rPr>
-              <a:t>. </a:t>
-            </a:r>
-            <a:r>
-              <a:rPr lang="en-US" altLang="ko-KR" dirty="0"/>
-              <a:t>13</a:t>
-            </a:r>
-            <a:r>
-              <a:rPr lang="ko-KR" altLang="en-US" dirty="0"/>
-              <a:t>의 배수이자 홀수를 찾아보자</a:t>
+                <a:latin typeface="+mn-ea"/>
+              </a:rPr>
+              <a:t>실습문제</a:t>
+            </a:r>
+            <a:r>
+              <a:rPr lang="en-US" altLang="ko-KR" sz="2800" b="1" dirty="0">
+                <a:solidFill>
+                  <a:schemeClr val="accent1"/>
+                </a:solidFill>
+                <a:latin typeface="+mn-ea"/>
+              </a:rPr>
+              <a:t>3. </a:t>
+            </a:r>
+            <a:r>
+              <a:rPr lang="ko-KR" altLang="en-US" sz="2800" b="1" dirty="0">
+                <a:solidFill>
+                  <a:schemeClr val="accent1"/>
+                </a:solidFill>
+                <a:latin typeface="+mn-ea"/>
+              </a:rPr>
+              <a:t>배수의 합</a:t>
+            </a:r>
+            <a:r>
+              <a:rPr lang="en-US" altLang="ko-KR" sz="2800" b="1" dirty="0">
+                <a:solidFill>
+                  <a:schemeClr val="accent1"/>
+                </a:solidFill>
+                <a:latin typeface="+mn-ea"/>
+              </a:rPr>
+              <a:t>]</a:t>
+            </a:r>
+            <a:r>
+              <a:rPr lang="en-US" altLang="ko-KR" sz="2800" dirty="0">
+                <a:solidFill>
+                  <a:schemeClr val="accent1"/>
+                </a:solidFill>
+                <a:latin typeface="+mn-ea"/>
+              </a:rPr>
+              <a:t> </a:t>
+            </a:r>
+            <a:r>
+              <a:rPr lang="ko-KR" altLang="en-US" sz="2800" dirty="0">
+                <a:solidFill>
+                  <a:srgbClr val="212529"/>
+                </a:solidFill>
+                <a:latin typeface="+mn-ea"/>
+              </a:rPr>
+              <a:t> 진행</a:t>
             </a:r>
           </a:p>
         </p:txBody>
@@ -21619,7 +23439,7 @@
     </p:spTree>
     <p:extLst>
       <p:ext uri="{BB962C8B-B14F-4D97-AF65-F5344CB8AC3E}">
-        <p14:creationId xmlns:p14="http://schemas.microsoft.com/office/powerpoint/2010/main" val="1578624217"/>
+        <p14:creationId xmlns:p14="http://schemas.microsoft.com/office/powerpoint/2010/main" val="542213719"/>
       </p:ext>
     </p:extLst>
   </p:cSld>
@@ -22085,7 +23905,7 @@
           <a:p>
             <a:fld id="{0F78D9C4-20C1-4B15-A116-16DC77AD9A1E}" type="datetime1">
               <a:rPr lang="ko-KR" altLang="en-US" smtClean="0"/>
-              <a:t>2024-05-27</a:t>
+              <a:t>2024-05-29</a:t>
             </a:fld>
             <a:endParaRPr lang="ko-KR" altLang="en-US"/>
           </a:p>
@@ -23830,7 +25650,7 @@
           <a:p>
             <a:fld id="{0F78D9C4-20C1-4B15-A116-16DC77AD9A1E}" type="datetime1">
               <a:rPr lang="ko-KR" altLang="en-US" smtClean="0"/>
-              <a:t>2024-05-27</a:t>
+              <a:t>2024-05-29</a:t>
             </a:fld>
             <a:endParaRPr lang="ko-KR" altLang="en-US"/>
           </a:p>

--- a/material/[SeSAC_YDP_6] 04_3_Javascript.pptx
+++ b/material/[SeSAC_YDP_6] 04_3_Javascript.pptx
@@ -236,7 +236,7 @@
           <a:p>
             <a:fld id="{2EF3F159-7250-4DD4-91C2-13B35D56E1AF}" type="datetimeFigureOut">
               <a:rPr lang="ko-KR" altLang="en-US" smtClean="0"/>
-              <a:t>2024-05-29</a:t>
+              <a:t>2024-05-31</a:t>
             </a:fld>
             <a:endParaRPr lang="ko-KR" altLang="en-US"/>
           </a:p>
@@ -3020,6 +3020,166 @@
           <a:bodyPr/>
           <a:lstStyle/>
           <a:p>
+            <a:r>
+              <a:rPr lang="en-US" altLang="ko-KR" dirty="0" err="1"/>
+              <a:t>i</a:t>
+            </a:r>
+            <a:r>
+              <a:rPr lang="ko-KR" altLang="en-US" b="0" i="0" dirty="0">
+                <a:solidFill>
+                  <a:srgbClr val="0D0D0D"/>
+                </a:solidFill>
+                <a:effectLst/>
+                <a:highlight>
+                  <a:srgbClr val="FFFFFF"/>
+                </a:highlight>
+                <a:latin typeface="ui-sans-serif"/>
+              </a:rPr>
+              <a:t>가 짝수인 경우 </a:t>
+            </a:r>
+            <a:r>
+              <a:rPr lang="en-US" altLang="ko-KR" b="0" i="0" dirty="0">
+                <a:solidFill>
+                  <a:srgbClr val="0D0D0D"/>
+                </a:solidFill>
+                <a:effectLst/>
+                <a:highlight>
+                  <a:srgbClr val="FFFFFF"/>
+                </a:highlight>
+                <a:latin typeface="ui-sans-serif"/>
+              </a:rPr>
+              <a:t>(</a:t>
+            </a:r>
+            <a:r>
+              <a:rPr lang="en-US" altLang="ko-KR" dirty="0" err="1"/>
+              <a:t>i</a:t>
+            </a:r>
+            <a:r>
+              <a:rPr lang="en-US" altLang="ko-KR" dirty="0"/>
+              <a:t> % 2 == 0</a:t>
+            </a:r>
+            <a:r>
+              <a:rPr lang="en-US" altLang="ko-KR" b="0" i="0" dirty="0">
+                <a:solidFill>
+                  <a:srgbClr val="0D0D0D"/>
+                </a:solidFill>
+                <a:effectLst/>
+                <a:highlight>
+                  <a:srgbClr val="FFFFFF"/>
+                </a:highlight>
+                <a:latin typeface="ui-sans-serif"/>
+              </a:rPr>
+              <a:t>), </a:t>
+            </a:r>
+            <a:r>
+              <a:rPr lang="en-US" altLang="ko-KR" dirty="0"/>
+              <a:t>continue</a:t>
+            </a:r>
+            <a:r>
+              <a:rPr lang="ko-KR" altLang="en-US" b="0" i="0" dirty="0">
+                <a:solidFill>
+                  <a:srgbClr val="0D0D0D"/>
+                </a:solidFill>
+                <a:effectLst/>
+                <a:highlight>
+                  <a:srgbClr val="FFFFFF"/>
+                </a:highlight>
+                <a:latin typeface="ui-sans-serif"/>
+              </a:rPr>
+              <a:t> 문이 실행되어 현재 반복 주기의 나머지 부분을 건너뛰고 다음 반복으로 넘어갑니다</a:t>
+            </a:r>
+            <a:r>
+              <a:rPr lang="en-US" altLang="ko-KR" b="0" i="0" dirty="0">
+                <a:solidFill>
+                  <a:srgbClr val="0D0D0D"/>
+                </a:solidFill>
+                <a:effectLst/>
+                <a:highlight>
+                  <a:srgbClr val="FFFFFF"/>
+                </a:highlight>
+                <a:latin typeface="ui-sans-serif"/>
+              </a:rPr>
+              <a:t>. </a:t>
+            </a:r>
+          </a:p>
+          <a:p>
+            <a:r>
+              <a:rPr lang="ko-KR" altLang="en-US" b="0" i="0" dirty="0">
+                <a:solidFill>
+                  <a:srgbClr val="0D0D0D"/>
+                </a:solidFill>
+                <a:effectLst/>
+                <a:highlight>
+                  <a:srgbClr val="FFFFFF"/>
+                </a:highlight>
+                <a:latin typeface="ui-sans-serif"/>
+              </a:rPr>
+              <a:t>즉</a:t>
+            </a:r>
+            <a:r>
+              <a:rPr lang="en-US" altLang="ko-KR" b="0" i="0" dirty="0">
+                <a:solidFill>
+                  <a:srgbClr val="0D0D0D"/>
+                </a:solidFill>
+                <a:effectLst/>
+                <a:highlight>
+                  <a:srgbClr val="FFFFFF"/>
+                </a:highlight>
+                <a:latin typeface="ui-sans-serif"/>
+              </a:rPr>
+              <a:t>, </a:t>
+            </a:r>
+            <a:r>
+              <a:rPr lang="en-US" altLang="ko-KR" dirty="0" err="1"/>
+              <a:t>i</a:t>
+            </a:r>
+            <a:r>
+              <a:rPr lang="ko-KR" altLang="en-US" b="0" i="0" dirty="0">
+                <a:solidFill>
+                  <a:srgbClr val="0D0D0D"/>
+                </a:solidFill>
+                <a:effectLst/>
+                <a:highlight>
+                  <a:srgbClr val="FFFFFF"/>
+                </a:highlight>
+                <a:latin typeface="ui-sans-serif"/>
+              </a:rPr>
+              <a:t>가 짝수일 때는 </a:t>
+            </a:r>
+            <a:r>
+              <a:rPr lang="en-US" altLang="ko-KR" dirty="0"/>
+              <a:t>sum += </a:t>
+            </a:r>
+            <a:r>
+              <a:rPr lang="en-US" altLang="ko-KR" dirty="0" err="1"/>
+              <a:t>i</a:t>
+            </a:r>
+            <a:r>
+              <a:rPr lang="ko-KR" altLang="en-US" b="0" i="0" dirty="0">
+                <a:solidFill>
+                  <a:srgbClr val="0D0D0D"/>
+                </a:solidFill>
+                <a:effectLst/>
+                <a:highlight>
+                  <a:srgbClr val="FFFFFF"/>
+                </a:highlight>
+                <a:latin typeface="ui-sans-serif"/>
+              </a:rPr>
+              <a:t> 부분이 실행되지 않습니다</a:t>
+            </a:r>
+            <a:r>
+              <a:rPr lang="en-US" altLang="ko-KR" b="0" i="0" dirty="0">
+                <a:solidFill>
+                  <a:srgbClr val="0D0D0D"/>
+                </a:solidFill>
+                <a:effectLst/>
+                <a:highlight>
+                  <a:srgbClr val="FFFFFF"/>
+                </a:highlight>
+                <a:latin typeface="ui-sans-serif"/>
+              </a:rPr>
+              <a:t>.</a:t>
+            </a:r>
             <a:endParaRPr lang="ko-KR" altLang="en-US" dirty="0"/>
           </a:p>
         </p:txBody>
@@ -7934,7 +8094,7 @@
           <a:p>
             <a:fld id="{0F78D9C4-20C1-4B15-A116-16DC77AD9A1E}" type="datetime1">
               <a:rPr lang="ko-KR" altLang="en-US" smtClean="0"/>
-              <a:t>2024-05-29</a:t>
+              <a:t>2024-05-31</a:t>
             </a:fld>
             <a:endParaRPr lang="ko-KR" altLang="en-US"/>
           </a:p>
@@ -8514,7 +8674,7 @@
           <a:p>
             <a:fld id="{0F78D9C4-20C1-4B15-A116-16DC77AD9A1E}" type="datetime1">
               <a:rPr lang="ko-KR" altLang="en-US" smtClean="0"/>
-              <a:t>2024-05-29</a:t>
+              <a:t>2024-05-31</a:t>
             </a:fld>
             <a:endParaRPr lang="ko-KR" altLang="en-US"/>
           </a:p>
@@ -12245,7 +12405,7 @@
           <a:p>
             <a:fld id="{0F78D9C4-20C1-4B15-A116-16DC77AD9A1E}" type="datetime1">
               <a:rPr lang="ko-KR" altLang="en-US" smtClean="0"/>
-              <a:t>2024-05-29</a:t>
+              <a:t>2024-05-31</a:t>
             </a:fld>
             <a:endParaRPr lang="ko-KR" altLang="en-US"/>
           </a:p>
@@ -14029,7 +14189,7 @@
         </p:nvSpPr>
         <p:spPr>
           <a:xfrm>
-            <a:off x="1176989" y="2775695"/>
+            <a:off x="926136" y="2767603"/>
             <a:ext cx="10509437" cy="3139321"/>
           </a:xfrm>
           <a:prstGeom prst="rect">
@@ -14579,7 +14739,28 @@
                 <a:latin typeface="Consolas" panose="020B0609020204030204" pitchFamily="49" charset="0"/>
                 <a:ea typeface="Kim jung chul Gothic Regular" panose="020B0503000000000000" pitchFamily="34" charset="-127"/>
               </a:rPr>
-              <a:t> != </a:t>
+              <a:t> </a:t>
+            </a:r>
+            <a:r>
+              <a:rPr lang="en-US" altLang="ko-KR" dirty="0">
+                <a:solidFill>
+                  <a:srgbClr val="D4D4D4"/>
+                </a:solidFill>
+                <a:latin typeface="Consolas" panose="020B0609020204030204" pitchFamily="49" charset="0"/>
+                <a:ea typeface="Kim jung chul Gothic Regular" panose="020B0503000000000000" pitchFamily="34" charset="-127"/>
+              </a:rPr>
+              <a:t>=</a:t>
+            </a:r>
+            <a:r>
+              <a:rPr lang="en-US" altLang="ko-KR" b="0" dirty="0">
+                <a:solidFill>
+                  <a:srgbClr val="D4D4D4"/>
+                </a:solidFill>
+                <a:effectLst/>
+                <a:latin typeface="Consolas" panose="020B0609020204030204" pitchFamily="49" charset="0"/>
+                <a:ea typeface="Kim jung chul Gothic Regular" panose="020B0503000000000000" pitchFamily="34" charset="-127"/>
+              </a:rPr>
+              <a:t>= </a:t>
             </a:r>
             <a:r>
               <a:rPr lang="en-US" altLang="ko-KR" b="0" dirty="0">
@@ -14898,7 +15079,7 @@
           <a:p>
             <a:fld id="{0F78D9C4-20C1-4B15-A116-16DC77AD9A1E}" type="datetime1">
               <a:rPr lang="ko-KR" altLang="en-US" smtClean="0"/>
-              <a:t>2024-05-29</a:t>
+              <a:t>2024-05-31</a:t>
             </a:fld>
             <a:endParaRPr lang="ko-KR" altLang="en-US"/>
           </a:p>
@@ -20072,7 +20253,7 @@
           <a:p>
             <a:fld id="{0F78D9C4-20C1-4B15-A116-16DC77AD9A1E}" type="datetime1">
               <a:rPr lang="ko-KR" altLang="en-US" smtClean="0"/>
-              <a:t>2024-05-29</a:t>
+              <a:t>2024-05-31</a:t>
             </a:fld>
             <a:endParaRPr lang="ko-KR" altLang="en-US"/>
           </a:p>
@@ -22316,7 +22497,7 @@
           <a:p>
             <a:fld id="{0F78D9C4-20C1-4B15-A116-16DC77AD9A1E}" type="datetime1">
               <a:rPr lang="ko-KR" altLang="en-US" smtClean="0"/>
-              <a:t>2024-05-29</a:t>
+              <a:t>2024-05-31</a:t>
             </a:fld>
             <a:endParaRPr lang="ko-KR" altLang="en-US"/>
           </a:p>
@@ -22923,7 +23104,7 @@
           <a:p>
             <a:fld id="{0F78D9C4-20C1-4B15-A116-16DC77AD9A1E}" type="datetime1">
               <a:rPr lang="ko-KR" altLang="en-US" smtClean="0"/>
-              <a:t>2024-05-29</a:t>
+              <a:t>2024-05-31</a:t>
             </a:fld>
             <a:endParaRPr lang="ko-KR" altLang="en-US"/>
           </a:p>
@@ -23905,7 +24086,7 @@
           <a:p>
             <a:fld id="{0F78D9C4-20C1-4B15-A116-16DC77AD9A1E}" type="datetime1">
               <a:rPr lang="ko-KR" altLang="en-US" smtClean="0"/>
-              <a:t>2024-05-29</a:t>
+              <a:t>2024-05-31</a:t>
             </a:fld>
             <a:endParaRPr lang="ko-KR" altLang="en-US"/>
           </a:p>
@@ -25650,7 +25831,7 @@
           <a:p>
             <a:fld id="{0F78D9C4-20C1-4B15-A116-16DC77AD9A1E}" type="datetime1">
               <a:rPr lang="ko-KR" altLang="en-US" smtClean="0"/>
-              <a:t>2024-05-29</a:t>
+              <a:t>2024-05-31</a:t>
             </a:fld>
             <a:endParaRPr lang="ko-KR" altLang="en-US"/>
           </a:p>
